--- a/산출물/교재/PPTX/통합반_온라인/통합반_11일차.pptx
+++ b/산출물/교재/PPTX/통합반_온라인/통합반_11일차.pptx
@@ -635,7 +635,7 @@
           <a:lstStyle/>
           <a:p>
             <a:r>
-              <a:t>evaluate_cards 한 번의 호출이 돌려준 조치 후보 넷이며, 도구 이름의 카드가 이 후보 하나하나를 가리킵니다. 고장 유형에 이어진 SOP 넷이 후보가 되고, DMN 결정표로 적은 판단 규칙이 가능 여부를, BSC 관점의 KPI로 정한 성과 기준이 순위를 정했습니다. 여기서 새로 볼 것은 오른쪽 칸으로, 앞의 셋은 운전원이 승인하고 쿨러 핀 세척은 설비보전팀장이 승인합니다. 누가 승인하는가도 에이전트가 정하지 않고 지식에 적혀 있던 것입니다.</a:t>
+              <a:t>evaluate_cards 한 번의 호출이 돌려준 조치 후보 넷이며, 도구 이름의 카드가 이 후보 하나하나를 가리킵니다. 고장 유형에 이어진 SOP 넷이 후보가 되고, DMN 결정표로 적은 판단 규칙이 가능 여부를 가렸는데, 원격으로 하는 앞의 셋은 설비가 원격 자동일 때만 가능해서 이번에는 모두 남았습니다. 그다음 BSC 관점의 KPI로 정한 성과 기준이 앞에서 읽은 납기 사정까지 넣어 순위를 정했습니다. 오른쪽 칸을 보면 앞의 셋은 운전원이, 쿨러 핀 세척은 설비보전팀장이 승인하며, 누가 승인하는가도 에이전트가 정하지 않고 지식에 적혀 있던 것입니다.</a:t>
             </a:r>
           </a:p>
         </p:txBody>
@@ -705,7 +705,7 @@
           <a:lstStyle/>
           <a:p>
             <a:r>
-              <a:t>설비 밖의 사정도 판단의 재료입니다. mes_orders는 HYD-01에 걸린 생산 오더를, qms_lots는 품질 로트를 업무 DB에서 읽습니다. 쿨러 사건에서는 납기가 여섯 시간쯤 남은 OEM 오더와 출하를 기다리는 로트 800개가 읽혔습니다. 이런 값은 계속 바뀌므로 지식 그래프에는 값을 두지 않고, 값이 놓인 자리와 읽는 방법만 등록해 두었습니다.</a:t>
+              <a:t>도구 사이를 넘어 다닌 것을 한 줄로 놓았습니다. 경보의 식별자가 diagnose에 들어가 고장 유형과 원인의 식별자가 나왔습니다. 그 둘이 evaluate_cards에 들어가 1순위 조치 방법의 식별자가 나왔고, submit_decision이 이것들을 묶어 추천안 하나로 제출하자 판단 id가 붙었습니다. 쿨러 핀 오염이라는 말 대신 식별자가 넘어가므로, 뒤의 도구가 이름이 비슷한 다른 대상을 읽는 일이 없습니다.</a:t>
             </a:r>
           </a:p>
         </p:txBody>
@@ -1825,7 +1825,7 @@
           <a:lstStyle/>
           <a:p>
             <a:r>
-              <a:t>두 쪽의 장치가 같은 처리 건에서 실제로 한 일을 줄 위에 놓았습니다. 파란 점선 상자로 두른 둘째 자리가 에이전트 쪽이며, agent:cooling은 이 한 자리에서 냉각 긴급 대응 스킬을 따라 hyd-dmn과 enterprise라는 MCP 서버의 도구를 열 번 불렀습니다. 왼쪽 아래의 명세와 시나리오는 이 실행 안에서 일한 것이 아니라 결과의 형식과 기대 행동을 실행에 앞서 정해 둔 것입니다. 위쪽은 프로세스 쪽으로, 정의 c3_cooling에서 열린 인스턴스가 경보에서 끝까지를 덮고, 승인은 운전원 역할의 승인 기록으로, 시스템 실행은 설비 명령과 작업지시로 남았습니다.</a:t>
+              <a:t>두 쪽의 장치가 같은 처리 건에서 실제로 한 일을 줄 위에 놓았습니다. 파란 상자로 두른 둘째 자리가 에이전트 쪽이며, agent:cooling은 이 한 자리에서 냉각 긴급 대응 스킬을 따라 hyd-dmn과 enterprise라는 MCP 서버의 도구를 열 번 불렀고, 지식 그래프는 hyd-dmn의 진단 도구가 안에서 읽습니다. 왼쪽 아래의 명세와 시나리오는 이 실행 안에서 일한 것이 아니라 결과의 형식과 기대 행동을 실행에 앞서 정해 둔 것입니다. 위쪽은 프로세스 쪽으로, 정의 c3_cooling에서 열린 인스턴스가 경보에서 끝까지를 덮고, 승인은 운전원 역할의 승인 기록으로, 시스템 실행은 설비 명령과 작업지시로 남았습니다.</a:t>
             </a:r>
           </a:p>
         </p:txBody>
@@ -2525,7 +2525,7 @@
           <a:lstStyle/>
           <a:p>
             <a:r>
-              <a:t>제공된 문서나 각자의 공개할 수 있는 자료에서 작은 지식 구조를 만듭니다. 먼저 이 문서로 답할 질문을 정하고, 핵심 개념과 속성과 관계를 가려 스키마로 정의한 뒤 식별자와 출처를 붙인 샘플 인스턴스를 적습니다. 그런 다음 수업의 기준 그래프와 섞이지 않도록 따로 둔 이름 공간에 넣어, 정한 질문이 조회로 풀리는지 확인합니다. 결과물은 스키마, 샘플 인스턴스, 질문의 조회문입니다.</a:t>
+              <a:t>제공된 문서나 각자의 공개할 수 있는 자료에서 작은 지식 구조를 만듭니다. 먼저 이 문서로 답할 질문을 정하고, 그 질문에 필요한 핵심 개념과 속성과 관계만 가려 스키마로 정의한 뒤 식별자와 출처를 붙인 샘플 인스턴스를 적습니다. 결과물은 스키마, 샘플 인스턴스, 질문의 조회문입니다. 수업의 기준 그래프와 섞이지 않도록 따로 둔 이름 공간에 넣어, 정한 질문이 조회로 풀리면 성공입니다.</a:t>
             </a:r>
           </a:p>
         </p:txBody>
@@ -2595,7 +2595,7 @@
           <a:lstStyle/>
           <a:p>
             <a:r>
-              <a:t>앞서 만든 지식을 읽는 작은 에이전트를 바이브 코딩으로 구성합니다. 목표와 스킬을 적고, 쓸 수 있는 읽기 도구를 연결합니다. 이 에이전트는 정보가 확인될 때만 제안하고, 확인하지 못한 값이나 권한 밖의 작업은 지어내지 않고 보류로 냅니다. 결과물은 에이전트 정의와 스킬, 그리고 제안이나 보류가 담긴 결과 한 건입니다.</a:t>
+              <a:t>앞서 만든 지식을 읽는 작은 에이전트를 바이브 코딩으로 구성합니다. 목표와 스킬을 적고, 쓸 수 있는 읽기 도구를 연결합니다. 결과물은 에이전트 정의와 스킬, 그리고 제안이나 보류가 담긴 결과 한 건입니다. 제안의 근거가 실제로 읽은 값이고, 확인하지 못한 값이나 권한 밖의 작업은 지어내지 않고 보류로 남았으면 성공입니다.</a:t>
             </a:r>
           </a:p>
         </p:txBody>
@@ -3645,7 +3645,7 @@
           <a:lstStyle/>
           <a:p>
             <a:r>
-              <a:t>에이전트가 이 단계에서 따르는 절차는 냉각 긴급 대응 스킬에 적혀 있습니다. diagnose는 지식 그래프의 관계와 시계열 DB의 값을 읽어 원인을 가리고, evaluate_cards는 SOP와 판단 규칙, 성과 기준으로 조치 후보를 견줍니다. 납기와 품질 사정이 필요하면 mes_orders와 qms_lots로 업무 DB를 읽고, 마지막으로 submit_decision이 추천안을 제출합니다. 아래 줄의 재료는 모두 앞에서 정의하고 등록해 둔 것이며, 이 도구들은 제출 하나를 빼면 읽기만 합니다.</a:t>
+              <a:t>에이전트가 이 단계에서 따르는 절차는 냉각 긴급 대응 스킬에 적혀 있고, 위 띠가 그 순서입니다. diagnose는 지식 그래프의 관계와 시계열 DB의 값을 읽어 원인을 가리고, 필요하면 mes_orders와 qms_lots로 업무 DB의 납기와 품질 사정을 읽습니다. evaluate_cards는 SOP와 판단 규칙, 성과 기준으로 조치 후보를 견주고, 마지막으로 submit_decision이 추천안을 제출합니다. 아래 줄의 재료는 모두 앞에서 정의하고 등록해 둔 것이며, 이 도구들은 제출 하나를 빼면 읽기만 합니다.</a:t>
             </a:r>
           </a:p>
         </p:txBody>
@@ -3925,7 +3925,7 @@
           <a:lstStyle/>
           <a:p>
             <a:r>
-              <a:t>원인을 가르는 기준과 그 기준에 댈 값은 놓인 곳이 다릅니다. 냉각 효율이 70 % 미만이고 팬 진동이 0.9 mm/s 미만이면 쿨러 핀 오염이라는 기준은 지식 그래프에 있고, 문서가 개정될 때만 바뀝니다. 지금의 냉각 효율 46.2 %와 팬 진동 0.575 mm/s는 시계열 DB에 있고 계속 바뀝니다. diagnose는 한 번의 호출 안에서 두 곳을 읽어 값을 기준에 대었고, 기준에 모두 맞은 쿨러 핀 오염 하나가 남았습니다.</a:t>
+              <a:t>원인을 가르는 기준과 그 기준에 댈 값은 놓인 곳이 다릅니다. 냉각 효율이 70 % 미만이고 팬 진동이 0.9 mm/s 미만이면 쿨러 핀 오염이라는 기준, 그리고 다른 두 후보의 기준은 지식 그래프에 있고, 문서가 개정될 때만 바뀝니다. 지금의 냉각 효율 46.2 %와 팬 진동 0.575 mm/s는 시계열 DB에 있고 계속 바뀝니다. diagnose는 한 번의 호출 안에서 두 곳을 읽어 값을 기준에 대었고, 기준에 모두 맞은 쿨러 핀 오염 하나가 남았습니다.</a:t>
             </a:r>
           </a:p>
         </p:txBody>
@@ -3995,7 +3995,7 @@
           <a:lstStyle/>
           <a:p>
             <a:r>
-              <a:t>도구 사이를 넘어 다닌 것을 한 줄로 놓았습니다. 경보의 식별자가 diagnose에 들어가 고장 유형과 원인의 식별자가 나왔습니다. 그 둘이 evaluate_cards에 들어가 1순위 조치 방법의 식별자가 나왔고, submit_decision이 이것들을 묶어 추천안 하나로 제출하자 판단 id가 붙었습니다. 쿨러 핀 오염이라는 말 대신 식별자가 넘어가므로, 뒤의 도구가 이름이 비슷한 다른 대상을 읽는 일이 없습니다.</a:t>
+              <a:t>설비 밖의 사정도 판단의 재료입니다. mes_orders는 HYD-01에 걸린 생산 오더를, qms_lots는 품질 로트를 업무 DB에서 읽는 도구이고, 스킬은 이 조회를 필요할 때 하게 둡니다. 이런 값은 계속 바뀌므로 지식 그래프에는 값을 두지 않고, 값이 놓인 자리와 읽는 방법만 등록해 두었습니다. 그래서 조치를 견주는 평가 도구도 이 자리를 따라 판단하는 순간의 납기와 사정을 직접 읽어 순위에 넣으며, 쿨러 사건에서는 납기가 여섯 시간쯤 남은 오더와 출하를 기다리는 로트 800개가 읽혔습니다.</a:t>
             </a:r>
           </a:p>
         </p:txBody>
@@ -8834,7 +8834,7 @@
                 <a:ea typeface="맑은 고딕"/>
                 <a:cs typeface="맑은 고딕"/>
               </a:rPr>
-              <a:t>증거 기준과 현재 값: diagnose가 읽는 두 곳</a:t>
+              <a:t>증거 기준과 현재 값: 진단 도구가 읽는 두 곳</a:t>
             </a:r>
           </a:p>
         </p:txBody>
@@ -8873,7 +8873,7 @@
                 <a:ea typeface="맑은 고딕"/>
                 <a:cs typeface="맑은 고딕"/>
               </a:rPr>
-              <a:t>증거 기준은 지식 그래프에, 견줄 값은 시계열 DB에 있어서 diagnose는 한 번의 호출 안에서 두 곳을 모두 읽는다.</a:t>
+              <a:t>증거 기준은 지식 그래프에, 견줄 값은 시계열 DB에 있어서 진단 도구는 한 번의 호출 안에서 두 곳을 모두 읽는다.</a:t>
             </a:r>
           </a:p>
         </p:txBody>
@@ -8954,8 +8954,8 @@
         </p:nvSpPr>
         <p:spPr>
           <a:xfrm>
-            <a:off x="548640" y="2336546"/>
-            <a:ext cx="5181447" cy="3309620"/>
+            <a:off x="548640" y="2182241"/>
+            <a:ext cx="5181447" cy="3618230"/>
           </a:xfrm>
           <a:prstGeom prst="roundRect">
             <a:avLst>
@@ -8985,7 +8985,7 @@
         </p:nvSpPr>
         <p:spPr>
           <a:xfrm>
-            <a:off x="822959" y="2537714"/>
+            <a:off x="822959" y="2383409"/>
             <a:ext cx="731520" cy="731520"/>
           </a:xfrm>
           <a:prstGeom prst="ellipse">
@@ -9022,7 +9022,7 @@
         </p:blipFill>
         <p:spPr>
           <a:xfrm>
-            <a:off x="976579" y="2691333"/>
+            <a:off x="976579" y="2537028"/>
             <a:ext cx="424281" cy="424281"/>
           </a:xfrm>
           <a:prstGeom prst="rect">
@@ -9038,7 +9038,7 @@
         </p:nvSpPr>
         <p:spPr>
           <a:xfrm>
-            <a:off x="1691640" y="2537714"/>
+            <a:off x="1691640" y="2383409"/>
             <a:ext cx="3855567" cy="731520"/>
           </a:xfrm>
           <a:prstGeom prst="rect">
@@ -9077,8 +9077,8 @@
         </p:nvSpPr>
         <p:spPr>
           <a:xfrm>
-            <a:off x="822959" y="3388105"/>
-            <a:ext cx="4632807" cy="1709420"/>
+            <a:off x="822959" y="3233801"/>
+            <a:ext cx="4632807" cy="2018030"/>
           </a:xfrm>
           <a:prstGeom prst="rect">
             <a:avLst/>
@@ -9089,7 +9089,7 @@
           <a:bodyPr wrap="square" anchor="t"/>
           <a:lstStyle/>
           <a:p>
-            <a:pPr algn="l" eaLnBrk="0" marL="200025" indent="-200025">
+            <a:pPr algn="l" eaLnBrk="0" marL="194310" indent="-194310">
               <a:lnSpc>
                 <a:spcPct val="110000"/>
               </a:lnSpc>
@@ -9098,7 +9098,7 @@
               </a:spcAft>
             </a:pPr>
             <a:r>
-              <a:rPr sz="1750" b="0">
+              <a:rPr sz="1700" b="0">
                 <a:solidFill>
                   <a:srgbClr val="1F2A3A"/>
                 </a:solidFill>
@@ -9110,7 +9110,7 @@
             </a:r>
           </a:p>
           <a:p>
-            <a:pPr algn="l" eaLnBrk="0" marL="200025" indent="-200025">
+            <a:pPr algn="l" eaLnBrk="0" marL="194310" indent="-194310">
               <a:lnSpc>
                 <a:spcPct val="110000"/>
               </a:lnSpc>
@@ -9119,7 +9119,7 @@
               </a:spcAft>
             </a:pPr>
             <a:r>
-              <a:rPr sz="1750" b="0">
+              <a:rPr sz="1700" b="0">
                 <a:solidFill>
                   <a:srgbClr val="1F2A3A"/>
                 </a:solidFill>
@@ -9131,7 +9131,7 @@
             </a:r>
           </a:p>
           <a:p>
-            <a:pPr algn="l" eaLnBrk="0" marL="200025" indent="-200025">
+            <a:pPr algn="l" eaLnBrk="0" marL="194310" indent="-194310">
               <a:lnSpc>
                 <a:spcPct val="110000"/>
               </a:lnSpc>
@@ -9140,7 +9140,7 @@
               </a:spcAft>
             </a:pPr>
             <a:r>
-              <a:rPr sz="1750" b="0">
+              <a:rPr sz="1700" b="0">
                 <a:solidFill>
                   <a:srgbClr val="1F2A3A"/>
                 </a:solidFill>
@@ -9148,11 +9148,11 @@
                 <a:ea typeface="맑은 고딕"/>
                 <a:cs typeface="맑은 고딕"/>
               </a:rPr>
-              <a:t>• 매뉴얼에서 추출해 검토하고 적재한 지식</a:t>
-            </a:r>
-          </a:p>
-          <a:p>
-            <a:pPr algn="l" eaLnBrk="0" marL="200025" indent="-200025">
+              <a:t>• 팬 구동 불량: 팬 진동 평균 0.9 mm/s 이상</a:t>
+            </a:r>
+          </a:p>
+          <a:p>
+            <a:pPr algn="l" eaLnBrk="0" marL="194310" indent="-194310">
               <a:lnSpc>
                 <a:spcPct val="110000"/>
               </a:lnSpc>
@@ -9161,7 +9161,28 @@
               </a:spcAft>
             </a:pPr>
             <a:r>
-              <a:rPr sz="1750" b="0">
+              <a:rPr sz="1700" b="0">
+                <a:solidFill>
+                  <a:srgbClr val="1F2A3A"/>
+                </a:solidFill>
+                <a:latin typeface="맑은 고딕"/>
+                <a:ea typeface="맑은 고딕"/>
+                <a:cs typeface="맑은 고딕"/>
+              </a:rPr>
+              <a:t>• 주변 온도 상승: 캐비닛 온도 35 ℃ 이상</a:t>
+            </a:r>
+          </a:p>
+          <a:p>
+            <a:pPr algn="l" eaLnBrk="0" marL="194310" indent="-194310">
+              <a:lnSpc>
+                <a:spcPct val="110000"/>
+              </a:lnSpc>
+              <a:spcAft>
+                <a:spcPts val="600"/>
+              </a:spcAft>
+            </a:pPr>
+            <a:r>
+              <a:rPr sz="1700" b="0">
                 <a:solidFill>
                   <a:srgbClr val="1F2A3A"/>
                 </a:solidFill>
@@ -9182,7 +9203,7 @@
         </p:nvSpPr>
         <p:spPr>
           <a:xfrm>
-            <a:off x="868680" y="5188966"/>
+            <a:off x="868680" y="5343271"/>
             <a:ext cx="1021080" cy="292608"/>
           </a:xfrm>
           <a:prstGeom prst="roundRect">
@@ -9213,7 +9234,7 @@
         </p:nvSpPr>
         <p:spPr>
           <a:xfrm>
-            <a:off x="868680" y="5188966"/>
+            <a:off x="868680" y="5343271"/>
             <a:ext cx="1021080" cy="292608"/>
           </a:xfrm>
           <a:prstGeom prst="rect">
@@ -9252,8 +9273,8 @@
         </p:nvSpPr>
         <p:spPr>
           <a:xfrm>
-            <a:off x="6461607" y="2336546"/>
-            <a:ext cx="5181447" cy="3309620"/>
+            <a:off x="6461607" y="2182241"/>
+            <a:ext cx="5181447" cy="3618230"/>
           </a:xfrm>
           <a:prstGeom prst="roundRect">
             <a:avLst>
@@ -9285,7 +9306,7 @@
         </p:nvSpPr>
         <p:spPr>
           <a:xfrm>
-            <a:off x="6735927" y="2537714"/>
+            <a:off x="6735927" y="2383409"/>
             <a:ext cx="731520" cy="731520"/>
           </a:xfrm>
           <a:prstGeom prst="ellipse">
@@ -9322,7 +9343,7 @@
         </p:blipFill>
         <p:spPr>
           <a:xfrm>
-            <a:off x="6889546" y="2691333"/>
+            <a:off x="6889546" y="2537028"/>
             <a:ext cx="424281" cy="424281"/>
           </a:xfrm>
           <a:prstGeom prst="rect">
@@ -9338,7 +9359,7 @@
         </p:nvSpPr>
         <p:spPr>
           <a:xfrm>
-            <a:off x="7604607" y="2537714"/>
+            <a:off x="7604607" y="2383409"/>
             <a:ext cx="3855567" cy="731520"/>
           </a:xfrm>
           <a:prstGeom prst="rect">
@@ -9377,8 +9398,8 @@
         </p:nvSpPr>
         <p:spPr>
           <a:xfrm>
-            <a:off x="6735927" y="3388105"/>
-            <a:ext cx="4632807" cy="1709420"/>
+            <a:off x="6735927" y="3233801"/>
+            <a:ext cx="4632807" cy="2018030"/>
           </a:xfrm>
           <a:prstGeom prst="rect">
             <a:avLst/>
@@ -9389,7 +9410,7 @@
           <a:bodyPr wrap="square" anchor="t"/>
           <a:lstStyle/>
           <a:p>
-            <a:pPr algn="l" eaLnBrk="0" marL="200025" indent="-200025">
+            <a:pPr algn="l" eaLnBrk="0" marL="194310" indent="-194310">
               <a:lnSpc>
                 <a:spcPct val="110000"/>
               </a:lnSpc>
@@ -9398,7 +9419,7 @@
               </a:spcAft>
             </a:pPr>
             <a:r>
-              <a:rPr sz="1750" b="0">
+              <a:rPr sz="1700" b="0">
                 <a:solidFill>
                   <a:srgbClr val="1F2A3A"/>
                 </a:solidFill>
@@ -9410,7 +9431,7 @@
             </a:r>
           </a:p>
           <a:p>
-            <a:pPr algn="l" eaLnBrk="0" marL="200025" indent="-200025">
+            <a:pPr algn="l" eaLnBrk="0" marL="194310" indent="-194310">
               <a:lnSpc>
                 <a:spcPct val="110000"/>
               </a:lnSpc>
@@ -9419,7 +9440,7 @@
               </a:spcAft>
             </a:pPr>
             <a:r>
-              <a:rPr sz="1750" b="0">
+              <a:rPr sz="1700" b="0">
                 <a:solidFill>
                   <a:srgbClr val="1F2A3A"/>
                 </a:solidFill>
@@ -9431,7 +9452,7 @@
             </a:r>
           </a:p>
           <a:p>
-            <a:pPr algn="l" eaLnBrk="0" marL="200025" indent="-200025">
+            <a:pPr algn="l" eaLnBrk="0" marL="194310" indent="-194310">
               <a:lnSpc>
                 <a:spcPct val="110000"/>
               </a:lnSpc>
@@ -9440,7 +9461,7 @@
               </a:spcAft>
             </a:pPr>
             <a:r>
-              <a:rPr sz="1750" b="0">
+              <a:rPr sz="1700" b="0">
                 <a:solidFill>
                   <a:srgbClr val="1F2A3A"/>
                 </a:solidFill>
@@ -9452,7 +9473,7 @@
             </a:r>
           </a:p>
           <a:p>
-            <a:pPr algn="l" eaLnBrk="0" marL="200025" indent="-200025">
+            <a:pPr algn="l" eaLnBrk="0" marL="194310" indent="-194310">
               <a:lnSpc>
                 <a:spcPct val="110000"/>
               </a:lnSpc>
@@ -9461,7 +9482,7 @@
               </a:spcAft>
             </a:pPr>
             <a:r>
-              <a:rPr sz="1750" b="0">
+              <a:rPr sz="1700" b="0">
                 <a:solidFill>
                   <a:srgbClr val="1F2A3A"/>
                 </a:solidFill>
@@ -9482,7 +9503,7 @@
         </p:nvSpPr>
         <p:spPr>
           <a:xfrm>
-            <a:off x="6781647" y="5188966"/>
+            <a:off x="6781647" y="5343271"/>
             <a:ext cx="868680" cy="292608"/>
           </a:xfrm>
           <a:prstGeom prst="roundRect">
@@ -9513,7 +9534,7 @@
         </p:nvSpPr>
         <p:spPr>
           <a:xfrm>
-            <a:off x="6781647" y="5188966"/>
+            <a:off x="6781647" y="5343271"/>
             <a:ext cx="868680" cy="292608"/>
           </a:xfrm>
           <a:prstGeom prst="rect">
@@ -9621,6 +9642,305 @@
 </file>
 
 <file path=ppt/slides/slide13.xml><?xml version="1.0" encoding="utf-8"?>
+<p:sld xmlns:a="http://schemas.openxmlformats.org/drawingml/2006/main" xmlns:p="http://schemas.openxmlformats.org/presentationml/2006/main" xmlns:r="http://schemas.openxmlformats.org/officeDocument/2006/relationships">
+  <p:cSld>
+    <p:bg>
+      <p:bgPr>
+        <a:solidFill>
+          <a:srgbClr val="E7F3FD"/>
+        </a:solidFill>
+        <a:effectLst/>
+      </p:bgPr>
+    </p:bg>
+    <p:spTree>
+      <p:nvGrpSpPr>
+        <p:cNvPr id="1" name=""/>
+        <p:cNvGrpSpPr/>
+        <p:nvPr/>
+      </p:nvGrpSpPr>
+      <p:grpSpPr/>
+      <p:sp>
+        <p:nvSpPr>
+          <p:cNvPr id="2" name="TextBox 1"/>
+          <p:cNvSpPr txBox="1"/>
+          <p:nvPr/>
+        </p:nvSpPr>
+        <p:spPr>
+          <a:xfrm>
+            <a:off x="457200" y="384048"/>
+            <a:ext cx="8229600" cy="457200"/>
+          </a:xfrm>
+          <a:prstGeom prst="rect">
+            <a:avLst/>
+          </a:prstGeom>
+          <a:noFill/>
+        </p:spPr>
+        <p:txBody>
+          <a:bodyPr wrap="square" anchor="t"/>
+          <a:lstStyle/>
+          <a:p>
+            <a:pPr algn="l" eaLnBrk="0">
+              <a:lnSpc>
+                <a:spcPct val="110000"/>
+              </a:lnSpc>
+            </a:pPr>
+            <a:r>
+              <a:rPr sz="2000" b="1">
+                <a:solidFill>
+                  <a:srgbClr val="5CB8F2"/>
+                </a:solidFill>
+                <a:latin typeface="맑은 고딕"/>
+                <a:ea typeface="맑은 고딕"/>
+                <a:cs typeface="맑은 고딕"/>
+              </a:rPr>
+              <a:t>경남대학교 피지컬AI 사관학교</a:t>
+            </a:r>
+          </a:p>
+        </p:txBody>
+      </p:sp>
+      <p:sp>
+        <p:nvSpPr>
+          <p:cNvPr id="3" name="Rectangle 2"/>
+          <p:cNvSpPr/>
+          <p:nvPr/>
+        </p:nvSpPr>
+        <p:spPr>
+          <a:xfrm>
+            <a:off x="548640" y="859536"/>
+            <a:ext cx="3606800" cy="41148"/>
+          </a:xfrm>
+          <a:prstGeom prst="rect">
+            <a:avLst/>
+          </a:prstGeom>
+          <a:solidFill>
+            <a:srgbClr val="5CB8F2"/>
+          </a:solidFill>
+          <a:ln>
+            <a:noFill/>
+          </a:ln>
+        </p:spPr>
+        <p:txBody>
+          <a:bodyPr rtlCol="0" anchor="ctr"/>
+          <a:lstStyle/>
+          <a:p>
+            <a:pPr algn="ctr"/>
+          </a:p>
+        </p:txBody>
+      </p:sp>
+      <p:sp>
+        <p:nvSpPr>
+          <p:cNvPr id="4" name="TextBox 3"/>
+          <p:cNvSpPr txBox="1"/>
+          <p:nvPr/>
+        </p:nvSpPr>
+        <p:spPr>
+          <a:xfrm>
+            <a:off x="548640" y="2148840"/>
+            <a:ext cx="2377440" cy="1737360"/>
+          </a:xfrm>
+          <a:prstGeom prst="rect">
+            <a:avLst/>
+          </a:prstGeom>
+          <a:noFill/>
+        </p:spPr>
+        <p:txBody>
+          <a:bodyPr wrap="square" anchor="ctr"/>
+          <a:lstStyle/>
+          <a:p>
+            <a:pPr algn="l" eaLnBrk="0">
+              <a:lnSpc>
+                <a:spcPct val="110000"/>
+              </a:lnSpc>
+            </a:pPr>
+            <a:r>
+              <a:rPr sz="8800" b="1">
+                <a:solidFill>
+                  <a:srgbClr val="5CB8F2"/>
+                </a:solidFill>
+                <a:latin typeface="맑은 고딕"/>
+                <a:ea typeface="맑은 고딕"/>
+                <a:cs typeface="맑은 고딕"/>
+              </a:rPr>
+              <a:t>03</a:t>
+            </a:r>
+          </a:p>
+        </p:txBody>
+      </p:sp>
+      <p:sp>
+        <p:nvSpPr>
+          <p:cNvPr id="5" name="TextBox 4"/>
+          <p:cNvSpPr txBox="1"/>
+          <p:nvPr/>
+        </p:nvSpPr>
+        <p:spPr>
+          <a:xfrm>
+            <a:off x="3017520" y="2011680"/>
+            <a:ext cx="8625535" cy="2011680"/>
+          </a:xfrm>
+          <a:prstGeom prst="rect">
+            <a:avLst/>
+          </a:prstGeom>
+          <a:noFill/>
+        </p:spPr>
+        <p:txBody>
+          <a:bodyPr wrap="square" anchor="ctr"/>
+          <a:lstStyle/>
+          <a:p>
+            <a:pPr algn="l" eaLnBrk="0">
+              <a:lnSpc>
+                <a:spcPct val="110000"/>
+              </a:lnSpc>
+            </a:pPr>
+            <a:r>
+              <a:rPr sz="3400" b="1">
+                <a:solidFill>
+                  <a:srgbClr val="13294B"/>
+                </a:solidFill>
+                <a:latin typeface="맑은 고딕"/>
+                <a:ea typeface="맑은 고딕"/>
+                <a:cs typeface="맑은 고딕"/>
+              </a:rPr>
+              <a:t>조치의 판단과 출처:</a:t>
+            </a:r>
+          </a:p>
+          <a:p>
+            <a:pPr algn="l" eaLnBrk="0">
+              <a:lnSpc>
+                <a:spcPct val="110000"/>
+              </a:lnSpc>
+            </a:pPr>
+            <a:r>
+              <a:rPr sz="3400" b="1">
+                <a:solidFill>
+                  <a:srgbClr val="13294B"/>
+                </a:solidFill>
+                <a:latin typeface="맑은 고딕"/>
+                <a:ea typeface="맑은 고딕"/>
+                <a:cs typeface="맑은 고딕"/>
+              </a:rPr>
+              <a:t>추천안이 되기까지</a:t>
+            </a:r>
+          </a:p>
+        </p:txBody>
+      </p:sp>
+      <p:sp>
+        <p:nvSpPr>
+          <p:cNvPr id="6" name="Rounded Rectangle 5"/>
+          <p:cNvSpPr/>
+          <p:nvPr/>
+        </p:nvSpPr>
+        <p:spPr>
+          <a:xfrm>
+            <a:off x="3108960" y="4160520"/>
+            <a:ext cx="822960" cy="347472"/>
+          </a:xfrm>
+          <a:prstGeom prst="roundRect">
+            <a:avLst>
+              <a:gd name="adj" fmla="val 50000"/>
+            </a:avLst>
+          </a:prstGeom>
+          <a:solidFill>
+            <a:srgbClr val="5CB8F2"/>
+          </a:solidFill>
+          <a:ln>
+            <a:noFill/>
+          </a:ln>
+        </p:spPr>
+        <p:txBody>
+          <a:bodyPr rtlCol="0" anchor="ctr"/>
+          <a:lstStyle/>
+          <a:p>
+            <a:pPr algn="ctr"/>
+          </a:p>
+        </p:txBody>
+      </p:sp>
+      <p:sp>
+        <p:nvSpPr>
+          <p:cNvPr id="7" name="TextBox 6"/>
+          <p:cNvSpPr txBox="1"/>
+          <p:nvPr/>
+        </p:nvSpPr>
+        <p:spPr>
+          <a:xfrm>
+            <a:off x="3108960" y="4160520"/>
+            <a:ext cx="822960" cy="347472"/>
+          </a:xfrm>
+          <a:prstGeom prst="rect">
+            <a:avLst/>
+          </a:prstGeom>
+          <a:noFill/>
+        </p:spPr>
+        <p:txBody>
+          <a:bodyPr wrap="square" anchor="ctr"/>
+          <a:lstStyle/>
+          <a:p>
+            <a:pPr algn="ctr" eaLnBrk="0">
+              <a:lnSpc>
+                <a:spcPct val="110000"/>
+              </a:lnSpc>
+            </a:pPr>
+            <a:r>
+              <a:rPr sz="1300" b="1">
+                <a:solidFill>
+                  <a:srgbClr val="13294B"/>
+                </a:solidFill>
+                <a:latin typeface="맑은 고딕"/>
+                <a:ea typeface="맑은 고딕"/>
+                <a:cs typeface="맑은 고딕"/>
+              </a:rPr>
+              <a:t>이론</a:t>
+            </a:r>
+          </a:p>
+        </p:txBody>
+      </p:sp>
+      <p:sp>
+        <p:nvSpPr>
+          <p:cNvPr id="8" name="TextBox 7"/>
+          <p:cNvSpPr txBox="1"/>
+          <p:nvPr/>
+        </p:nvSpPr>
+        <p:spPr>
+          <a:xfrm>
+            <a:off x="3017520" y="4617720"/>
+            <a:ext cx="8625535" cy="457200"/>
+          </a:xfrm>
+          <a:prstGeom prst="rect">
+            <a:avLst/>
+          </a:prstGeom>
+          <a:noFill/>
+        </p:spPr>
+        <p:txBody>
+          <a:bodyPr wrap="square" anchor="t"/>
+          <a:lstStyle/>
+          <a:p>
+            <a:pPr algn="l" eaLnBrk="0">
+              <a:lnSpc>
+                <a:spcPct val="110000"/>
+              </a:lnSpc>
+            </a:pPr>
+            <a:r>
+              <a:rPr sz="1700" b="0">
+                <a:solidFill>
+                  <a:srgbClr val="556175"/>
+                </a:solidFill>
+                <a:latin typeface="맑은 고딕"/>
+                <a:ea typeface="맑은 고딕"/>
+                <a:cs typeface="맑은 고딕"/>
+              </a:rPr>
+              <a:t>조치 후보를 견주어 출처가 달린 추천안 한 건을 제출하기까지</a:t>
+            </a:r>
+          </a:p>
+        </p:txBody>
+      </p:sp>
+    </p:spTree>
+  </p:cSld>
+  <p:clrMapOvr>
+    <a:masterClrMapping/>
+  </p:clrMapOvr>
+</p:sld>
+</file>
+
+<file path=ppt/slides/slide14.xml><?xml version="1.0" encoding="utf-8"?>
 <p:sld xmlns:a="http://schemas.openxmlformats.org/drawingml/2006/main" xmlns:p="http://schemas.openxmlformats.org/presentationml/2006/main" xmlns:r="http://schemas.openxmlformats.org/officeDocument/2006/relationships">
   <p:cSld>
     <p:bg>
@@ -9672,7 +9992,7 @@
                 <a:ea typeface="맑은 고딕"/>
                 <a:cs typeface="맑은 고딕"/>
               </a:rPr>
-              <a:t>도구 사이를 넘어가는 식별자</a:t>
+              <a:t>업무 DB에서 읽는 값: 납기와 품질</a:t>
             </a:r>
           </a:p>
         </p:txBody>
@@ -9711,7 +10031,7 @@
                 <a:ea typeface="맑은 고딕"/>
                 <a:cs typeface="맑은 고딕"/>
               </a:rPr>
-              <a:t>도구와 도구 사이에는 문장이 아니라 식별자가 넘어가므로, 뒤의 도구는 앞의 도구가 가리킨 바로 그 대상을 읽는다.</a:t>
+              <a:t>생산과 품질의 사정은 그래프에 값으로 두지 않고, 지식에 등록한 값의 자리를 따라 판단할 때마다 원천에서 읽는다.</a:t>
             </a:r>
           </a:p>
         </p:txBody>
@@ -9779,27 +10099,153 @@
                 <a:ea typeface="맑은 고딕"/>
                 <a:cs typeface="맑은 고딕"/>
               </a:rPr>
-              <a:t>13</a:t>
-            </a:r>
-          </a:p>
-        </p:txBody>
-      </p:sp>
-      <p:sp>
-        <p:nvSpPr>
-          <p:cNvPr id="6" name="Rectangle 5"/>
+              <a:t>14</a:t>
+            </a:r>
+          </a:p>
+        </p:txBody>
+      </p:sp>
+      <p:sp>
+        <p:nvSpPr>
+          <p:cNvPr id="6" name="TextBox 5"/>
+          <p:cNvSpPr txBox="1"/>
+          <p:nvPr/>
+        </p:nvSpPr>
+        <p:spPr>
+          <a:xfrm>
+            <a:off x="640080" y="1627632"/>
+            <a:ext cx="3291839" cy="1181862"/>
+          </a:xfrm>
+          <a:prstGeom prst="rect">
+            <a:avLst/>
+          </a:prstGeom>
+          <a:noFill/>
+        </p:spPr>
+        <p:txBody>
+          <a:bodyPr wrap="square" anchor="ctr"/>
+          <a:lstStyle/>
+          <a:p>
+            <a:pPr algn="l" eaLnBrk="0">
+              <a:lnSpc>
+                <a:spcPct val="110000"/>
+              </a:lnSpc>
+              <a:spcAft>
+                <a:spcPts val="200"/>
+              </a:spcAft>
+            </a:pPr>
+            <a:r>
+              <a:rPr sz="1800" b="1">
+                <a:solidFill>
+                  <a:srgbClr val="13294B"/>
+                </a:solidFill>
+                <a:latin typeface="맑은 고딕"/>
+                <a:ea typeface="맑은 고딕"/>
+                <a:cs typeface="맑은 고딕"/>
+              </a:rPr>
+              <a:t>mes_orders</a:t>
+            </a:r>
+          </a:p>
+          <a:p>
+            <a:pPr algn="l" eaLnBrk="0">
+              <a:lnSpc>
+                <a:spcPct val="110000"/>
+              </a:lnSpc>
+              <a:spcAft>
+                <a:spcPts val="200"/>
+              </a:spcAft>
+            </a:pPr>
+            <a:r>
+              <a:rPr sz="1150" b="0">
+                <a:solidFill>
+                  <a:srgbClr val="556175"/>
+                </a:solidFill>
+                <a:latin typeface="맑은 고딕"/>
+                <a:ea typeface="맑은 고딕"/>
+                <a:cs typeface="맑은 고딕"/>
+              </a:rPr>
+              <a:t>Manufacturing Execution System</a:t>
+            </a:r>
+          </a:p>
+        </p:txBody>
+      </p:sp>
+      <p:sp>
+        <p:nvSpPr>
+          <p:cNvPr id="7" name="TextBox 6"/>
+          <p:cNvSpPr txBox="1"/>
+          <p:nvPr/>
+        </p:nvSpPr>
+        <p:spPr>
+          <a:xfrm>
+            <a:off x="4023359" y="1627632"/>
+            <a:ext cx="7528255" cy="1181862"/>
+          </a:xfrm>
+          <a:prstGeom prst="rect">
+            <a:avLst/>
+          </a:prstGeom>
+          <a:noFill/>
+        </p:spPr>
+        <p:txBody>
+          <a:bodyPr wrap="square" anchor="ctr"/>
+          <a:lstStyle/>
+          <a:p>
+            <a:pPr algn="l" eaLnBrk="0">
+              <a:lnSpc>
+                <a:spcPct val="110000"/>
+              </a:lnSpc>
+              <a:spcAft>
+                <a:spcPts val="300"/>
+              </a:spcAft>
+            </a:pPr>
+            <a:r>
+              <a:rPr sz="1400" b="0">
+                <a:solidFill>
+                  <a:srgbClr val="1F2A3A"/>
+                </a:solidFill>
+                <a:latin typeface="맑은 고딕"/>
+                <a:ea typeface="맑은 고딕"/>
+                <a:cs typeface="맑은 고딕"/>
+              </a:rPr>
+              <a:t>HYD-01에 걸린 생산 오더를 읽는다.</a:t>
+            </a:r>
+          </a:p>
+          <a:p>
+            <a:pPr algn="l" eaLnBrk="0">
+              <a:lnSpc>
+                <a:spcPct val="110000"/>
+              </a:lnSpc>
+              <a:spcAft>
+                <a:spcPts val="300"/>
+              </a:spcAft>
+            </a:pPr>
+            <a:r>
+              <a:rPr sz="1400" b="0">
+                <a:solidFill>
+                  <a:srgbClr val="1F2A3A"/>
+                </a:solidFill>
+                <a:latin typeface="맑은 고딕"/>
+                <a:ea typeface="맑은 고딕"/>
+                <a:cs typeface="맑은 고딕"/>
+              </a:rPr>
+              <a:t>납기까지 남은 시간, 남은 수량</a:t>
+            </a:r>
+          </a:p>
+        </p:txBody>
+      </p:sp>
+      <p:sp>
+        <p:nvSpPr>
+          <p:cNvPr id="8" name="Rectangle 7"/>
           <p:cNvSpPr/>
           <p:nvPr/>
         </p:nvSpPr>
         <p:spPr>
           <a:xfrm>
-            <a:off x="1658081" y="3566096"/>
-            <a:ext cx="8875532" cy="146304"/>
+            <a:off x="548640" y="2800350"/>
+            <a:ext cx="11094415" cy="13716"/>
           </a:xfrm>
           <a:prstGeom prst="rect">
             <a:avLst/>
           </a:prstGeom>
           <a:solidFill>
-            <a:srgbClr val="5CB8F2"/>
+            <a:srgbClr val="D3D9E1"/>
           </a:solidFill>
           <a:ln>
             <a:noFill/>
@@ -9815,20 +10261,146 @@
       </p:sp>
       <p:sp>
         <p:nvSpPr>
-          <p:cNvPr id="7" name="Chevron 6"/>
+          <p:cNvPr id="9" name="TextBox 8"/>
+          <p:cNvSpPr txBox="1"/>
+          <p:nvPr/>
+        </p:nvSpPr>
+        <p:spPr>
+          <a:xfrm>
+            <a:off x="640080" y="2809494"/>
+            <a:ext cx="3291839" cy="1181862"/>
+          </a:xfrm>
+          <a:prstGeom prst="rect">
+            <a:avLst/>
+          </a:prstGeom>
+          <a:noFill/>
+        </p:spPr>
+        <p:txBody>
+          <a:bodyPr wrap="square" anchor="ctr"/>
+          <a:lstStyle/>
+          <a:p>
+            <a:pPr algn="l" eaLnBrk="0">
+              <a:lnSpc>
+                <a:spcPct val="110000"/>
+              </a:lnSpc>
+              <a:spcAft>
+                <a:spcPts val="200"/>
+              </a:spcAft>
+            </a:pPr>
+            <a:r>
+              <a:rPr sz="1800" b="1">
+                <a:solidFill>
+                  <a:srgbClr val="13294B"/>
+                </a:solidFill>
+                <a:latin typeface="맑은 고딕"/>
+                <a:ea typeface="맑은 고딕"/>
+                <a:cs typeface="맑은 고딕"/>
+              </a:rPr>
+              <a:t>qms_lots</a:t>
+            </a:r>
+          </a:p>
+          <a:p>
+            <a:pPr algn="l" eaLnBrk="0">
+              <a:lnSpc>
+                <a:spcPct val="110000"/>
+              </a:lnSpc>
+              <a:spcAft>
+                <a:spcPts val="200"/>
+              </a:spcAft>
+            </a:pPr>
+            <a:r>
+              <a:rPr sz="1150" b="0">
+                <a:solidFill>
+                  <a:srgbClr val="556175"/>
+                </a:solidFill>
+                <a:latin typeface="맑은 고딕"/>
+                <a:ea typeface="맑은 고딕"/>
+                <a:cs typeface="맑은 고딕"/>
+              </a:rPr>
+              <a:t>Quality Management System</a:t>
+            </a:r>
+          </a:p>
+        </p:txBody>
+      </p:sp>
+      <p:sp>
+        <p:nvSpPr>
+          <p:cNvPr id="10" name="TextBox 9"/>
+          <p:cNvSpPr txBox="1"/>
+          <p:nvPr/>
+        </p:nvSpPr>
+        <p:spPr>
+          <a:xfrm>
+            <a:off x="4023359" y="2809494"/>
+            <a:ext cx="7528255" cy="1181862"/>
+          </a:xfrm>
+          <a:prstGeom prst="rect">
+            <a:avLst/>
+          </a:prstGeom>
+          <a:noFill/>
+        </p:spPr>
+        <p:txBody>
+          <a:bodyPr wrap="square" anchor="ctr"/>
+          <a:lstStyle/>
+          <a:p>
+            <a:pPr algn="l" eaLnBrk="0">
+              <a:lnSpc>
+                <a:spcPct val="110000"/>
+              </a:lnSpc>
+              <a:spcAft>
+                <a:spcPts val="300"/>
+              </a:spcAft>
+            </a:pPr>
+            <a:r>
+              <a:rPr sz="1400" b="0">
+                <a:solidFill>
+                  <a:srgbClr val="1F2A3A"/>
+                </a:solidFill>
+                <a:latin typeface="맑은 고딕"/>
+                <a:ea typeface="맑은 고딕"/>
+                <a:cs typeface="맑은 고딕"/>
+              </a:rPr>
+              <a:t>HYD-01의 품질 로트를 읽는다.</a:t>
+            </a:r>
+          </a:p>
+          <a:p>
+            <a:pPr algn="l" eaLnBrk="0">
+              <a:lnSpc>
+                <a:spcPct val="110000"/>
+              </a:lnSpc>
+              <a:spcAft>
+                <a:spcPts val="300"/>
+              </a:spcAft>
+            </a:pPr>
+            <a:r>
+              <a:rPr sz="1400" b="0">
+                <a:solidFill>
+                  <a:srgbClr val="1F2A3A"/>
+                </a:solidFill>
+                <a:latin typeface="맑은 고딕"/>
+                <a:ea typeface="맑은 고딕"/>
+                <a:cs typeface="맑은 고딕"/>
+              </a:rPr>
+              <a:t>고온 구간에 생산된 로트, 검사 비용</a:t>
+            </a:r>
+          </a:p>
+        </p:txBody>
+      </p:sp>
+      <p:sp>
+        <p:nvSpPr>
+          <p:cNvPr id="11" name="Rectangle 10"/>
           <p:cNvSpPr/>
           <p:nvPr/>
         </p:nvSpPr>
         <p:spPr>
           <a:xfrm>
-            <a:off x="2648651" y="3456368"/>
-            <a:ext cx="237744" cy="365760"/>
-          </a:xfrm>
-          <a:prstGeom prst="chevron">
+            <a:off x="548640" y="3982212"/>
+            <a:ext cx="11094415" cy="13716"/>
+          </a:xfrm>
+          <a:prstGeom prst="rect">
             <a:avLst/>
           </a:prstGeom>
           <a:solidFill>
-            <a:srgbClr val="13294B"/>
+            <a:srgbClr val="D3D9E1"/>
           </a:solidFill>
           <a:ln>
             <a:noFill/>
@@ -9844,198 +10416,22 @@
       </p:sp>
       <p:sp>
         <p:nvSpPr>
-          <p:cNvPr id="8" name="TextBox 7"/>
-          <p:cNvSpPr txBox="1"/>
-          <p:nvPr/>
-        </p:nvSpPr>
-        <p:spPr>
-          <a:xfrm>
-            <a:off x="2143551" y="3108896"/>
-            <a:ext cx="1247943" cy="310896"/>
-          </a:xfrm>
-          <a:prstGeom prst="rect">
-            <a:avLst/>
-          </a:prstGeom>
-          <a:noFill/>
-        </p:spPr>
-        <p:txBody>
-          <a:bodyPr wrap="square" anchor="ctr"/>
-          <a:lstStyle/>
-          <a:p>
-            <a:pPr algn="ctr" eaLnBrk="0">
-              <a:lnSpc>
-                <a:spcPct val="110000"/>
-              </a:lnSpc>
-            </a:pPr>
-            <a:r>
-              <a:rPr sz="1150" b="1">
-                <a:solidFill>
-                  <a:srgbClr val="1A6FC4"/>
-                </a:solidFill>
-                <a:latin typeface="맑은 고딕"/>
-                <a:ea typeface="맑은 고딕"/>
-                <a:cs typeface="맑은 고딕"/>
-              </a:rPr>
-              <a:t>diagnose</a:t>
-            </a:r>
-          </a:p>
-        </p:txBody>
-      </p:sp>
-      <p:sp>
-        <p:nvSpPr>
-          <p:cNvPr id="9" name="Oval 8"/>
+          <p:cNvPr id="12" name="Rounded Rectangle 11"/>
           <p:cNvSpPr/>
           <p:nvPr/>
         </p:nvSpPr>
         <p:spPr>
           <a:xfrm>
-            <a:off x="1081171" y="3062338"/>
-            <a:ext cx="1153819" cy="1153819"/>
-          </a:xfrm>
-          <a:prstGeom prst="ellipse">
-            <a:avLst/>
+            <a:off x="548640" y="4018788"/>
+            <a:ext cx="11094415" cy="1126998"/>
+          </a:xfrm>
+          <a:prstGeom prst="roundRect">
+            <a:avLst>
+              <a:gd name="adj" fmla="val 6000"/>
+            </a:avLst>
           </a:prstGeom>
           <a:solidFill>
-            <a:srgbClr val="FFFFFF"/>
-          </a:solidFill>
-          <a:ln w="28575">
-            <a:solidFill>
-              <a:srgbClr val="13294B"/>
-            </a:solidFill>
-          </a:ln>
-        </p:spPr>
-        <p:txBody>
-          <a:bodyPr rtlCol="0" anchor="ctr"/>
-          <a:lstStyle/>
-          <a:p>
-            <a:pPr algn="ctr"/>
-          </a:p>
-        </p:txBody>
-      </p:sp>
-      <p:pic>
-        <p:nvPicPr>
-          <p:cNvPr id="10" name="아이콘:bell" descr="bell_13294B_1.6.png"/>
-          <p:cNvPicPr>
-            <a:picLocks noChangeAspect="1"/>
-          </p:cNvPicPr>
-          <p:nvPr/>
-        </p:nvPicPr>
-        <p:blipFill>
-          <a:blip r:embed="rId3"/>
-          <a:stretch>
-            <a:fillRect/>
-          </a:stretch>
-        </p:blipFill>
-        <p:spPr>
-          <a:xfrm>
-            <a:off x="1358088" y="3339255"/>
-            <a:ext cx="599985" cy="599985"/>
-          </a:xfrm>
-          <a:prstGeom prst="rect">
-            <a:avLst/>
-          </a:prstGeom>
-        </p:spPr>
-      </p:pic>
-      <p:sp>
-        <p:nvSpPr>
-          <p:cNvPr id="11" name="TextBox 10"/>
-          <p:cNvSpPr txBox="1"/>
-          <p:nvPr/>
-        </p:nvSpPr>
-        <p:spPr>
-          <a:xfrm>
-            <a:off x="640079" y="4353318"/>
-            <a:ext cx="2036003" cy="932815"/>
-          </a:xfrm>
-          <a:prstGeom prst="rect">
-            <a:avLst/>
-          </a:prstGeom>
-          <a:noFill/>
-        </p:spPr>
-        <p:txBody>
-          <a:bodyPr wrap="square" anchor="t"/>
-          <a:lstStyle/>
-          <a:p>
-            <a:pPr algn="ctr" eaLnBrk="0">
-              <a:lnSpc>
-                <a:spcPct val="110000"/>
-              </a:lnSpc>
-              <a:spcAft>
-                <a:spcPts val="400"/>
-              </a:spcAft>
-            </a:pPr>
-            <a:r>
-              <a:rPr sz="1650" b="1">
-                <a:solidFill>
-                  <a:srgbClr val="13294B"/>
-                </a:solidFill>
-                <a:latin typeface="맑은 고딕"/>
-                <a:ea typeface="맑은 고딕"/>
-                <a:cs typeface="맑은 고딕"/>
-              </a:rPr>
-              <a:t>경보</a:t>
-            </a:r>
-          </a:p>
-          <a:p>
-            <a:pPr algn="ctr" eaLnBrk="0">
-              <a:lnSpc>
-                <a:spcPct val="110000"/>
-              </a:lnSpc>
-              <a:spcAft>
-                <a:spcPts val="400"/>
-              </a:spcAft>
-            </a:pPr>
-            <a:r>
-              <a:rPr sz="1300" b="0">
-                <a:solidFill>
-                  <a:srgbClr val="1F2A3A"/>
-                </a:solidFill>
-                <a:latin typeface="맑은 고딕"/>
-                <a:ea typeface="맑은 고딕"/>
-                <a:cs typeface="맑은 고딕"/>
-              </a:rPr>
-              <a:t>ALT-hyd01-</a:t>
-            </a:r>
-          </a:p>
-          <a:p>
-            <a:pPr algn="ctr" eaLnBrk="0">
-              <a:lnSpc>
-                <a:spcPct val="110000"/>
-              </a:lnSpc>
-              <a:spcAft>
-                <a:spcPts val="400"/>
-              </a:spcAft>
-            </a:pPr>
-            <a:r>
-              <a:rPr sz="1300" b="0">
-                <a:solidFill>
-                  <a:srgbClr val="1F2A3A"/>
-                </a:solidFill>
-                <a:latin typeface="맑은 고딕"/>
-                <a:ea typeface="맑은 고딕"/>
-                <a:cs typeface="맑은 고딕"/>
-              </a:rPr>
-              <a:t>0014-e0a1</a:t>
-            </a:r>
-          </a:p>
-        </p:txBody>
-      </p:sp>
-      <p:sp>
-        <p:nvSpPr>
-          <p:cNvPr id="12" name="Chevron 11"/>
-          <p:cNvSpPr/>
-          <p:nvPr/>
-        </p:nvSpPr>
-        <p:spPr>
-          <a:xfrm>
-            <a:off x="4867534" y="3456368"/>
-            <a:ext cx="237744" cy="365760"/>
-          </a:xfrm>
-          <a:prstGeom prst="chevron">
-            <a:avLst/>
-          </a:prstGeom>
-          <a:solidFill>
-            <a:srgbClr val="13294B"/>
+            <a:srgbClr val="E7F3FD"/>
           </a:solidFill>
           <a:ln>
             <a:noFill/>
@@ -10057,8 +10453,8 @@
         </p:nvSpPr>
         <p:spPr>
           <a:xfrm>
-            <a:off x="4362434" y="3108896"/>
-            <a:ext cx="1247943" cy="310896"/>
+            <a:off x="640080" y="3991356"/>
+            <a:ext cx="3291839" cy="1181862"/>
           </a:xfrm>
           <a:prstGeom prst="rect">
             <a:avLst/>
@@ -10069,180 +10465,128 @@
           <a:bodyPr wrap="square" anchor="ctr"/>
           <a:lstStyle/>
           <a:p>
-            <a:pPr algn="ctr" eaLnBrk="0">
-              <a:lnSpc>
-                <a:spcPct val="110000"/>
-              </a:lnSpc>
-            </a:pPr>
-            <a:r>
-              <a:rPr sz="1150" b="1">
-                <a:solidFill>
-                  <a:srgbClr val="1A6FC4"/>
-                </a:solidFill>
-                <a:latin typeface="맑은 고딕"/>
-                <a:ea typeface="맑은 고딕"/>
-                <a:cs typeface="맑은 고딕"/>
-              </a:rPr>
-              <a:t>diagnose</a:t>
-            </a:r>
-          </a:p>
-        </p:txBody>
-      </p:sp>
-      <p:sp>
-        <p:nvSpPr>
-          <p:cNvPr id="14" name="Oval 13"/>
+            <a:pPr algn="l" eaLnBrk="0">
+              <a:lnSpc>
+                <a:spcPct val="110000"/>
+              </a:lnSpc>
+              <a:spcAft>
+                <a:spcPts val="200"/>
+              </a:spcAft>
+            </a:pPr>
+            <a:r>
+              <a:rPr sz="1800" b="1">
+                <a:solidFill>
+                  <a:srgbClr val="13294B"/>
+                </a:solidFill>
+                <a:latin typeface="맑은 고딕"/>
+                <a:ea typeface="맑은 고딕"/>
+                <a:cs typeface="맑은 고딕"/>
+              </a:rPr>
+              <a:t>지식에 등록된 것</a:t>
+            </a:r>
+          </a:p>
+          <a:p>
+            <a:pPr algn="l" eaLnBrk="0">
+              <a:lnSpc>
+                <a:spcPct val="110000"/>
+              </a:lnSpc>
+              <a:spcAft>
+                <a:spcPts val="200"/>
+              </a:spcAft>
+            </a:pPr>
+            <a:r>
+              <a:rPr sz="1150" b="0">
+                <a:solidFill>
+                  <a:srgbClr val="556175"/>
+                </a:solidFill>
+                <a:latin typeface="맑은 고딕"/>
+                <a:ea typeface="맑은 고딕"/>
+                <a:cs typeface="맑은 고딕"/>
+              </a:rPr>
+              <a:t>값의 자리</a:t>
+            </a:r>
+          </a:p>
+        </p:txBody>
+      </p:sp>
+      <p:sp>
+        <p:nvSpPr>
+          <p:cNvPr id="14" name="TextBox 13"/>
+          <p:cNvSpPr txBox="1"/>
+          <p:nvPr/>
+        </p:nvSpPr>
+        <p:spPr>
+          <a:xfrm>
+            <a:off x="4023359" y="3991356"/>
+            <a:ext cx="7528255" cy="1181862"/>
+          </a:xfrm>
+          <a:prstGeom prst="rect">
+            <a:avLst/>
+          </a:prstGeom>
+          <a:noFill/>
+        </p:spPr>
+        <p:txBody>
+          <a:bodyPr wrap="square" anchor="ctr"/>
+          <a:lstStyle/>
+          <a:p>
+            <a:pPr algn="l" eaLnBrk="0">
+              <a:lnSpc>
+                <a:spcPct val="110000"/>
+              </a:lnSpc>
+              <a:spcAft>
+                <a:spcPts val="300"/>
+              </a:spcAft>
+            </a:pPr>
+            <a:r>
+              <a:rPr sz="1400" b="0">
+                <a:solidFill>
+                  <a:srgbClr val="1F2A3A"/>
+                </a:solidFill>
+                <a:latin typeface="맑은 고딕"/>
+                <a:ea typeface="맑은 고딕"/>
+                <a:cs typeface="맑은 고딕"/>
+              </a:rPr>
+              <a:t>값이 아니라 값이 놓인 자리와 읽는 방법이다.</a:t>
+            </a:r>
+          </a:p>
+          <a:p>
+            <a:pPr algn="l" eaLnBrk="0">
+              <a:lnSpc>
+                <a:spcPct val="110000"/>
+              </a:lnSpc>
+              <a:spcAft>
+                <a:spcPts val="300"/>
+              </a:spcAft>
+            </a:pPr>
+            <a:r>
+              <a:rPr sz="1400" b="0">
+                <a:solidFill>
+                  <a:srgbClr val="1F2A3A"/>
+                </a:solidFill>
+                <a:latin typeface="맑은 고딕"/>
+                <a:ea typeface="맑은 고딕"/>
+                <a:cs typeface="맑은 고딕"/>
+              </a:rPr>
+              <a:t>업무 데이터베이스를 등록할 때 열마다 입력 데이터의 자리를 만들어 두었다.</a:t>
+            </a:r>
+          </a:p>
+        </p:txBody>
+      </p:sp>
+      <p:sp>
+        <p:nvSpPr>
+          <p:cNvPr id="15" name="Rectangle 14"/>
           <p:cNvSpPr/>
           <p:nvPr/>
         </p:nvSpPr>
         <p:spPr>
           <a:xfrm>
-            <a:off x="3300054" y="3062338"/>
-            <a:ext cx="1153819" cy="1153819"/>
-          </a:xfrm>
-          <a:prstGeom prst="ellipse">
+            <a:off x="548640" y="5164074"/>
+            <a:ext cx="11094415" cy="13716"/>
+          </a:xfrm>
+          <a:prstGeom prst="rect">
             <a:avLst/>
           </a:prstGeom>
           <a:solidFill>
-            <a:srgbClr val="FFFFFF"/>
-          </a:solidFill>
-          <a:ln w="28575">
-            <a:solidFill>
-              <a:srgbClr val="13294B"/>
-            </a:solidFill>
-          </a:ln>
-        </p:spPr>
-        <p:txBody>
-          <a:bodyPr rtlCol="0" anchor="ctr"/>
-          <a:lstStyle/>
-          <a:p>
-            <a:pPr algn="ctr"/>
-          </a:p>
-        </p:txBody>
-      </p:sp>
-      <p:pic>
-        <p:nvPicPr>
-          <p:cNvPr id="15" name="아이콘:alert-triangle" descr="alert-triangle_13294B_1.6.png"/>
-          <p:cNvPicPr>
-            <a:picLocks noChangeAspect="1"/>
-          </p:cNvPicPr>
-          <p:nvPr/>
-        </p:nvPicPr>
-        <p:blipFill>
-          <a:blip r:embed="rId4"/>
-          <a:stretch>
-            <a:fillRect/>
-          </a:stretch>
-        </p:blipFill>
-        <p:spPr>
-          <a:xfrm>
-            <a:off x="3576971" y="3339255"/>
-            <a:ext cx="599985" cy="599985"/>
-          </a:xfrm>
-          <a:prstGeom prst="rect">
-            <a:avLst/>
-          </a:prstGeom>
-        </p:spPr>
-      </p:pic>
-      <p:sp>
-        <p:nvSpPr>
-          <p:cNvPr id="16" name="TextBox 15"/>
-          <p:cNvSpPr txBox="1"/>
-          <p:nvPr/>
-        </p:nvSpPr>
-        <p:spPr>
-          <a:xfrm>
-            <a:off x="2858963" y="4353318"/>
-            <a:ext cx="2036003" cy="932815"/>
-          </a:xfrm>
-          <a:prstGeom prst="rect">
-            <a:avLst/>
-          </a:prstGeom>
-          <a:noFill/>
-        </p:spPr>
-        <p:txBody>
-          <a:bodyPr wrap="square" anchor="t"/>
-          <a:lstStyle/>
-          <a:p>
-            <a:pPr algn="ctr" eaLnBrk="0">
-              <a:lnSpc>
-                <a:spcPct val="110000"/>
-              </a:lnSpc>
-              <a:spcAft>
-                <a:spcPts val="400"/>
-              </a:spcAft>
-            </a:pPr>
-            <a:r>
-              <a:rPr sz="1650" b="1">
-                <a:solidFill>
-                  <a:srgbClr val="13294B"/>
-                </a:solidFill>
-                <a:latin typeface="맑은 고딕"/>
-                <a:ea typeface="맑은 고딕"/>
-                <a:cs typeface="맑은 고딕"/>
-              </a:rPr>
-              <a:t>고장 유형</a:t>
-            </a:r>
-          </a:p>
-          <a:p>
-            <a:pPr algn="ctr" eaLnBrk="0">
-              <a:lnSpc>
-                <a:spcPct val="110000"/>
-              </a:lnSpc>
-              <a:spcAft>
-                <a:spcPts val="400"/>
-              </a:spcAft>
-            </a:pPr>
-            <a:r>
-              <a:rPr sz="1300" b="0">
-                <a:solidFill>
-                  <a:srgbClr val="1F2A3A"/>
-                </a:solidFill>
-                <a:latin typeface="맑은 고딕"/>
-                <a:ea typeface="맑은 고딕"/>
-                <a:cs typeface="맑은 고딕"/>
-              </a:rPr>
-              <a:t>fm:cooler-</a:t>
-            </a:r>
-          </a:p>
-          <a:p>
-            <a:pPr algn="ctr" eaLnBrk="0">
-              <a:lnSpc>
-                <a:spcPct val="110000"/>
-              </a:lnSpc>
-              <a:spcAft>
-                <a:spcPts val="400"/>
-              </a:spcAft>
-            </a:pPr>
-            <a:r>
-              <a:rPr sz="1300" b="0">
-                <a:solidFill>
-                  <a:srgbClr val="1F2A3A"/>
-                </a:solidFill>
-                <a:latin typeface="맑은 고딕"/>
-                <a:ea typeface="맑은 고딕"/>
-                <a:cs typeface="맑은 고딕"/>
-              </a:rPr>
-              <a:t>performance-loss</a:t>
-            </a:r>
-          </a:p>
-        </p:txBody>
-      </p:sp>
-      <p:sp>
-        <p:nvSpPr>
-          <p:cNvPr id="17" name="Chevron 16"/>
-          <p:cNvSpPr/>
-          <p:nvPr/>
-        </p:nvSpPr>
-        <p:spPr>
-          <a:xfrm>
-            <a:off x="7086417" y="3456368"/>
-            <a:ext cx="237744" cy="365760"/>
-          </a:xfrm>
-          <a:prstGeom prst="chevron">
-            <a:avLst/>
-          </a:prstGeom>
-          <a:solidFill>
-            <a:srgbClr val="13294B"/>
+            <a:srgbClr val="D3D9E1"/>
           </a:solidFill>
           <a:ln>
             <a:noFill/>
@@ -10258,14 +10602,14 @@
       </p:sp>
       <p:sp>
         <p:nvSpPr>
-          <p:cNvPr id="18" name="TextBox 17"/>
-          <p:cNvSpPr txBox="1"/>
-          <p:nvPr/>
-        </p:nvSpPr>
-        <p:spPr>
-          <a:xfrm>
-            <a:off x="6581317" y="3108896"/>
-            <a:ext cx="1247943" cy="310896"/>
+          <p:cNvPr id="16" name="TextBox 15"/>
+          <p:cNvSpPr txBox="1"/>
+          <p:nvPr/>
+        </p:nvSpPr>
+        <p:spPr>
+          <a:xfrm>
+            <a:off x="640080" y="5173218"/>
+            <a:ext cx="3291839" cy="1181862"/>
           </a:xfrm>
           <a:prstGeom prst="rect">
             <a:avLst/>
@@ -10276,110 +10620,16 @@
           <a:bodyPr wrap="square" anchor="ctr"/>
           <a:lstStyle/>
           <a:p>
-            <a:pPr algn="ctr" eaLnBrk="0">
-              <a:lnSpc>
-                <a:spcPct val="110000"/>
-              </a:lnSpc>
-            </a:pPr>
-            <a:r>
-              <a:rPr sz="1150" b="1">
-                <a:solidFill>
-                  <a:srgbClr val="1A6FC4"/>
-                </a:solidFill>
-                <a:latin typeface="맑은 고딕"/>
-                <a:ea typeface="맑은 고딕"/>
-                <a:cs typeface="맑은 고딕"/>
-              </a:rPr>
-              <a:t>evaluate</a:t>
-            </a:r>
-          </a:p>
-        </p:txBody>
-      </p:sp>
-      <p:sp>
-        <p:nvSpPr>
-          <p:cNvPr id="19" name="Oval 18"/>
-          <p:cNvSpPr/>
-          <p:nvPr/>
-        </p:nvSpPr>
-        <p:spPr>
-          <a:xfrm>
-            <a:off x="5518938" y="3062338"/>
-            <a:ext cx="1153819" cy="1153819"/>
-          </a:xfrm>
-          <a:prstGeom prst="ellipse">
-            <a:avLst/>
-          </a:prstGeom>
-          <a:solidFill>
-            <a:srgbClr val="FFFFFF"/>
-          </a:solidFill>
-          <a:ln w="28575">
-            <a:solidFill>
-              <a:srgbClr val="13294B"/>
-            </a:solidFill>
-          </a:ln>
-        </p:spPr>
-        <p:txBody>
-          <a:bodyPr rtlCol="0" anchor="ctr"/>
-          <a:lstStyle/>
-          <a:p>
-            <a:pPr algn="ctr"/>
-          </a:p>
-        </p:txBody>
-      </p:sp>
-      <p:pic>
-        <p:nvPicPr>
-          <p:cNvPr id="20" name="아이콘:search" descr="search_13294B_1.6.png"/>
-          <p:cNvPicPr>
-            <a:picLocks noChangeAspect="1"/>
-          </p:cNvPicPr>
-          <p:nvPr/>
-        </p:nvPicPr>
-        <p:blipFill>
-          <a:blip r:embed="rId5"/>
-          <a:stretch>
-            <a:fillRect/>
-          </a:stretch>
-        </p:blipFill>
-        <p:spPr>
-          <a:xfrm>
-            <a:off x="5795854" y="3339255"/>
-            <a:ext cx="599985" cy="599985"/>
-          </a:xfrm>
-          <a:prstGeom prst="rect">
-            <a:avLst/>
-          </a:prstGeom>
-        </p:spPr>
-      </p:pic>
-      <p:sp>
-        <p:nvSpPr>
-          <p:cNvPr id="21" name="TextBox 20"/>
-          <p:cNvSpPr txBox="1"/>
-          <p:nvPr/>
-        </p:nvSpPr>
-        <p:spPr>
-          <a:xfrm>
-            <a:off x="5077846" y="4353318"/>
-            <a:ext cx="2036003" cy="932815"/>
-          </a:xfrm>
-          <a:prstGeom prst="rect">
-            <a:avLst/>
-          </a:prstGeom>
-          <a:noFill/>
-        </p:spPr>
-        <p:txBody>
-          <a:bodyPr wrap="square" anchor="t"/>
-          <a:lstStyle/>
-          <a:p>
-            <a:pPr algn="ctr" eaLnBrk="0">
+            <a:pPr algn="l" eaLnBrk="0">
               <a:lnSpc>
                 <a:spcPct val="110000"/>
               </a:lnSpc>
               <a:spcAft>
-                <a:spcPts val="400"/>
+                <a:spcPts val="200"/>
               </a:spcAft>
             </a:pPr>
             <a:r>
-              <a:rPr sz="1650" b="1">
+              <a:rPr sz="1800" b="1">
                 <a:solidFill>
                   <a:srgbClr val="13294B"/>
                 </a:solidFill>
@@ -10387,20 +10637,62 @@
                 <a:ea typeface="맑은 고딕"/>
                 <a:cs typeface="맑은 고딕"/>
               </a:rPr>
-              <a:t>원인</a:t>
-            </a:r>
-          </a:p>
-          <a:p>
-            <a:pPr algn="ctr" eaLnBrk="0">
+              <a:t>조치 평가 도구</a:t>
+            </a:r>
+          </a:p>
+          <a:p>
+            <a:pPr algn="l" eaLnBrk="0">
               <a:lnSpc>
                 <a:spcPct val="110000"/>
               </a:lnSpc>
               <a:spcAft>
-                <a:spcPts val="400"/>
+                <a:spcPts val="200"/>
               </a:spcAft>
             </a:pPr>
             <a:r>
-              <a:rPr sz="1300" b="0">
+              <a:rPr sz="1150" b="0">
+                <a:solidFill>
+                  <a:srgbClr val="556175"/>
+                </a:solidFill>
+                <a:latin typeface="맑은 고딕"/>
+                <a:ea typeface="맑은 고딕"/>
+                <a:cs typeface="맑은 고딕"/>
+              </a:rPr>
+              <a:t>evaluate_cards</a:t>
+            </a:r>
+          </a:p>
+        </p:txBody>
+      </p:sp>
+      <p:sp>
+        <p:nvSpPr>
+          <p:cNvPr id="17" name="TextBox 16"/>
+          <p:cNvSpPr txBox="1"/>
+          <p:nvPr/>
+        </p:nvSpPr>
+        <p:spPr>
+          <a:xfrm>
+            <a:off x="4023359" y="5173218"/>
+            <a:ext cx="7528255" cy="1181862"/>
+          </a:xfrm>
+          <a:prstGeom prst="rect">
+            <a:avLst/>
+          </a:prstGeom>
+          <a:noFill/>
+        </p:spPr>
+        <p:txBody>
+          <a:bodyPr wrap="square" anchor="ctr"/>
+          <a:lstStyle/>
+          <a:p>
+            <a:pPr algn="l" eaLnBrk="0">
+              <a:lnSpc>
+                <a:spcPct val="110000"/>
+              </a:lnSpc>
+              <a:spcAft>
+                <a:spcPts val="300"/>
+              </a:spcAft>
+            </a:pPr>
+            <a:r>
+              <a:rPr sz="1400" b="0">
                 <a:solidFill>
                   <a:srgbClr val="1F2A3A"/>
                 </a:solidFill>
@@ -10408,20 +10700,20 @@
                 <a:ea typeface="맑은 고딕"/>
                 <a:cs typeface="맑은 고딕"/>
               </a:rPr>
-              <a:t>cause:cooler-</a:t>
-            </a:r>
-          </a:p>
-          <a:p>
-            <a:pPr algn="ctr" eaLnBrk="0">
+              <a:t>같은 자리를 따라 업무 값을 직접 읽어 순위에 넣는다.</a:t>
+            </a:r>
+          </a:p>
+          <a:p>
+            <a:pPr algn="l" eaLnBrk="0">
               <a:lnSpc>
                 <a:spcPct val="110000"/>
               </a:lnSpc>
               <a:spcAft>
-                <a:spcPts val="400"/>
+                <a:spcPts val="300"/>
               </a:spcAft>
             </a:pPr>
             <a:r>
-              <a:rPr sz="1300" b="0">
+              <a:rPr sz="1400" b="0">
                 <a:solidFill>
                   <a:srgbClr val="1F2A3A"/>
                 </a:solidFill>
@@ -10429,652 +10721,7 @@
                 <a:ea typeface="맑은 고딕"/>
                 <a:cs typeface="맑은 고딕"/>
               </a:rPr>
-              <a:t>fin-fouling</a:t>
-            </a:r>
-          </a:p>
-        </p:txBody>
-      </p:sp>
-      <p:sp>
-        <p:nvSpPr>
-          <p:cNvPr id="22" name="Chevron 21"/>
-          <p:cNvSpPr/>
-          <p:nvPr/>
-        </p:nvSpPr>
-        <p:spPr>
-          <a:xfrm>
-            <a:off x="9305300" y="3456368"/>
-            <a:ext cx="237744" cy="365760"/>
-          </a:xfrm>
-          <a:prstGeom prst="chevron">
-            <a:avLst/>
-          </a:prstGeom>
-          <a:solidFill>
-            <a:srgbClr val="13294B"/>
-          </a:solidFill>
-          <a:ln>
-            <a:noFill/>
-          </a:ln>
-        </p:spPr>
-        <p:txBody>
-          <a:bodyPr rtlCol="0" anchor="ctr"/>
-          <a:lstStyle/>
-          <a:p>
-            <a:pPr algn="ctr"/>
-          </a:p>
-        </p:txBody>
-      </p:sp>
-      <p:sp>
-        <p:nvSpPr>
-          <p:cNvPr id="23" name="TextBox 22"/>
-          <p:cNvSpPr txBox="1"/>
-          <p:nvPr/>
-        </p:nvSpPr>
-        <p:spPr>
-          <a:xfrm>
-            <a:off x="8800200" y="3108896"/>
-            <a:ext cx="1247943" cy="310896"/>
-          </a:xfrm>
-          <a:prstGeom prst="rect">
-            <a:avLst/>
-          </a:prstGeom>
-          <a:noFill/>
-        </p:spPr>
-        <p:txBody>
-          <a:bodyPr wrap="square" anchor="ctr"/>
-          <a:lstStyle/>
-          <a:p>
-            <a:pPr algn="ctr" eaLnBrk="0">
-              <a:lnSpc>
-                <a:spcPct val="110000"/>
-              </a:lnSpc>
-            </a:pPr>
-            <a:r>
-              <a:rPr sz="1150" b="1">
-                <a:solidFill>
-                  <a:srgbClr val="1A6FC4"/>
-                </a:solidFill>
-                <a:latin typeface="맑은 고딕"/>
-                <a:ea typeface="맑은 고딕"/>
-                <a:cs typeface="맑은 고딕"/>
-              </a:rPr>
-              <a:t>submit</a:t>
-            </a:r>
-          </a:p>
-        </p:txBody>
-      </p:sp>
-      <p:sp>
-        <p:nvSpPr>
-          <p:cNvPr id="24" name="Oval 23"/>
-          <p:cNvSpPr/>
-          <p:nvPr/>
-        </p:nvSpPr>
-        <p:spPr>
-          <a:xfrm>
-            <a:off x="7737821" y="3062338"/>
-            <a:ext cx="1153819" cy="1153819"/>
-          </a:xfrm>
-          <a:prstGeom prst="ellipse">
-            <a:avLst/>
-          </a:prstGeom>
-          <a:solidFill>
-            <a:srgbClr val="FFFFFF"/>
-          </a:solidFill>
-          <a:ln w="28575">
-            <a:solidFill>
-              <a:srgbClr val="13294B"/>
-            </a:solidFill>
-          </a:ln>
-        </p:spPr>
-        <p:txBody>
-          <a:bodyPr rtlCol="0" anchor="ctr"/>
-          <a:lstStyle/>
-          <a:p>
-            <a:pPr algn="ctr"/>
-          </a:p>
-        </p:txBody>
-      </p:sp>
-      <p:pic>
-        <p:nvPicPr>
-          <p:cNvPr id="25" name="아이콘:tool" descr="tool_13294B_1.6.png"/>
-          <p:cNvPicPr>
-            <a:picLocks noChangeAspect="1"/>
-          </p:cNvPicPr>
-          <p:nvPr/>
-        </p:nvPicPr>
-        <p:blipFill>
-          <a:blip r:embed="rId6"/>
-          <a:stretch>
-            <a:fillRect/>
-          </a:stretch>
-        </p:blipFill>
-        <p:spPr>
-          <a:xfrm>
-            <a:off x="8014737" y="3339255"/>
-            <a:ext cx="599985" cy="599985"/>
-          </a:xfrm>
-          <a:prstGeom prst="rect">
-            <a:avLst/>
-          </a:prstGeom>
-        </p:spPr>
-      </p:pic>
-      <p:sp>
-        <p:nvSpPr>
-          <p:cNvPr id="26" name="TextBox 25"/>
-          <p:cNvSpPr txBox="1"/>
-          <p:nvPr/>
-        </p:nvSpPr>
-        <p:spPr>
-          <a:xfrm>
-            <a:off x="7296729" y="4353318"/>
-            <a:ext cx="2036003" cy="932815"/>
-          </a:xfrm>
-          <a:prstGeom prst="rect">
-            <a:avLst/>
-          </a:prstGeom>
-          <a:noFill/>
-        </p:spPr>
-        <p:txBody>
-          <a:bodyPr wrap="square" anchor="t"/>
-          <a:lstStyle/>
-          <a:p>
-            <a:pPr algn="ctr" eaLnBrk="0">
-              <a:lnSpc>
-                <a:spcPct val="110000"/>
-              </a:lnSpc>
-              <a:spcAft>
-                <a:spcPts val="400"/>
-              </a:spcAft>
-            </a:pPr>
-            <a:r>
-              <a:rPr sz="1650" b="1">
-                <a:solidFill>
-                  <a:srgbClr val="13294B"/>
-                </a:solidFill>
-                <a:latin typeface="맑은 고딕"/>
-                <a:ea typeface="맑은 고딕"/>
-                <a:cs typeface="맑은 고딕"/>
-              </a:rPr>
-              <a:t>조치 방법</a:t>
-            </a:r>
-          </a:p>
-          <a:p>
-            <a:pPr algn="ctr" eaLnBrk="0">
-              <a:lnSpc>
-                <a:spcPct val="110000"/>
-              </a:lnSpc>
-              <a:spcAft>
-                <a:spcPts val="400"/>
-              </a:spcAft>
-            </a:pPr>
-            <a:r>
-              <a:rPr sz="1300" b="0">
-                <a:solidFill>
-                  <a:srgbClr val="1F2A3A"/>
-                </a:solidFill>
-                <a:latin typeface="맑은 고딕"/>
-                <a:ea typeface="맑은 고딕"/>
-                <a:cs typeface="맑은 고딕"/>
-              </a:rPr>
-              <a:t>skill:</a:t>
-            </a:r>
-          </a:p>
-          <a:p>
-            <a:pPr algn="ctr" eaLnBrk="0">
-              <a:lnSpc>
-                <a:spcPct val="110000"/>
-              </a:lnSpc>
-              <a:spcAft>
-                <a:spcPts val="400"/>
-              </a:spcAft>
-            </a:pPr>
-            <a:r>
-              <a:rPr sz="1300" b="0">
-                <a:solidFill>
-                  <a:srgbClr val="1F2A3A"/>
-                </a:solidFill>
-                <a:latin typeface="맑은 고딕"/>
-                <a:ea typeface="맑은 고딕"/>
-                <a:cs typeface="맑은 고딕"/>
-              </a:rPr>
-              <a:t>sop-cool-11</a:t>
-            </a:r>
-          </a:p>
-        </p:txBody>
-      </p:sp>
-      <p:sp>
-        <p:nvSpPr>
-          <p:cNvPr id="27" name="Oval 26"/>
-          <p:cNvSpPr/>
-          <p:nvPr/>
-        </p:nvSpPr>
-        <p:spPr>
-          <a:xfrm>
-            <a:off x="9956704" y="3062338"/>
-            <a:ext cx="1153819" cy="1153819"/>
-          </a:xfrm>
-          <a:prstGeom prst="ellipse">
-            <a:avLst/>
-          </a:prstGeom>
-          <a:solidFill>
-            <a:srgbClr val="5CB8F2"/>
-          </a:solidFill>
-          <a:ln w="28575">
-            <a:solidFill>
-              <a:srgbClr val="13294B"/>
-            </a:solidFill>
-          </a:ln>
-        </p:spPr>
-        <p:txBody>
-          <a:bodyPr rtlCol="0" anchor="ctr"/>
-          <a:lstStyle/>
-          <a:p>
-            <a:pPr algn="ctr"/>
-          </a:p>
-        </p:txBody>
-      </p:sp>
-      <p:pic>
-        <p:nvPicPr>
-          <p:cNvPr id="28" name="아이콘:file-check" descr="file-check_13294B_1.6.png"/>
-          <p:cNvPicPr>
-            <a:picLocks noChangeAspect="1"/>
-          </p:cNvPicPr>
-          <p:nvPr/>
-        </p:nvPicPr>
-        <p:blipFill>
-          <a:blip r:embed="rId7"/>
-          <a:stretch>
-            <a:fillRect/>
-          </a:stretch>
-        </p:blipFill>
-        <p:spPr>
-          <a:xfrm>
-            <a:off x="10233620" y="3339255"/>
-            <a:ext cx="599985" cy="599985"/>
-          </a:xfrm>
-          <a:prstGeom prst="rect">
-            <a:avLst/>
-          </a:prstGeom>
-        </p:spPr>
-      </p:pic>
-      <p:sp>
-        <p:nvSpPr>
-          <p:cNvPr id="29" name="TextBox 28"/>
-          <p:cNvSpPr txBox="1"/>
-          <p:nvPr/>
-        </p:nvSpPr>
-        <p:spPr>
-          <a:xfrm>
-            <a:off x="9515612" y="4353318"/>
-            <a:ext cx="2036003" cy="932815"/>
-          </a:xfrm>
-          <a:prstGeom prst="rect">
-            <a:avLst/>
-          </a:prstGeom>
-          <a:noFill/>
-        </p:spPr>
-        <p:txBody>
-          <a:bodyPr wrap="square" anchor="t"/>
-          <a:lstStyle/>
-          <a:p>
-            <a:pPr algn="ctr" eaLnBrk="0">
-              <a:lnSpc>
-                <a:spcPct val="110000"/>
-              </a:lnSpc>
-              <a:spcAft>
-                <a:spcPts val="400"/>
-              </a:spcAft>
-            </a:pPr>
-            <a:r>
-              <a:rPr sz="1650" b="1">
-                <a:solidFill>
-                  <a:srgbClr val="13294B"/>
-                </a:solidFill>
-                <a:latin typeface="맑은 고딕"/>
-                <a:ea typeface="맑은 고딕"/>
-                <a:cs typeface="맑은 고딕"/>
-              </a:rPr>
-              <a:t>추천안</a:t>
-            </a:r>
-          </a:p>
-          <a:p>
-            <a:pPr algn="ctr" eaLnBrk="0">
-              <a:lnSpc>
-                <a:spcPct val="110000"/>
-              </a:lnSpc>
-              <a:spcAft>
-                <a:spcPts val="400"/>
-              </a:spcAft>
-            </a:pPr>
-            <a:r>
-              <a:rPr sz="1300" b="0">
-                <a:solidFill>
-                  <a:srgbClr val="1F2A3A"/>
-                </a:solidFill>
-                <a:latin typeface="맑은 고딕"/>
-                <a:ea typeface="맑은 고딕"/>
-                <a:cs typeface="맑은 고딕"/>
-              </a:rPr>
-              <a:t>DEC-1010-</a:t>
-            </a:r>
-          </a:p>
-          <a:p>
-            <a:pPr algn="ctr" eaLnBrk="0">
-              <a:lnSpc>
-                <a:spcPct val="110000"/>
-              </a:lnSpc>
-              <a:spcAft>
-                <a:spcPts val="400"/>
-              </a:spcAft>
-            </a:pPr>
-            <a:r>
-              <a:rPr sz="1300" b="0">
-                <a:solidFill>
-                  <a:srgbClr val="1F2A3A"/>
-                </a:solidFill>
-                <a:latin typeface="맑은 고딕"/>
-                <a:ea typeface="맑은 고딕"/>
-                <a:cs typeface="맑은 고딕"/>
-              </a:rPr>
-              <a:t>002-408b</a:t>
-            </a:r>
-          </a:p>
-        </p:txBody>
-      </p:sp>
-    </p:spTree>
-  </p:cSld>
-  <p:clrMapOvr>
-    <a:masterClrMapping/>
-  </p:clrMapOvr>
-</p:sld>
-</file>
-
-<file path=ppt/slides/slide14.xml><?xml version="1.0" encoding="utf-8"?>
-<p:sld xmlns:a="http://schemas.openxmlformats.org/drawingml/2006/main" xmlns:p="http://schemas.openxmlformats.org/presentationml/2006/main" xmlns:r="http://schemas.openxmlformats.org/officeDocument/2006/relationships">
-  <p:cSld>
-    <p:bg>
-      <p:bgPr>
-        <a:solidFill>
-          <a:srgbClr val="E7F3FD"/>
-        </a:solidFill>
-        <a:effectLst/>
-      </p:bgPr>
-    </p:bg>
-    <p:spTree>
-      <p:nvGrpSpPr>
-        <p:cNvPr id="1" name=""/>
-        <p:cNvGrpSpPr/>
-        <p:nvPr/>
-      </p:nvGrpSpPr>
-      <p:grpSpPr/>
-      <p:sp>
-        <p:nvSpPr>
-          <p:cNvPr id="2" name="TextBox 1"/>
-          <p:cNvSpPr txBox="1"/>
-          <p:nvPr/>
-        </p:nvSpPr>
-        <p:spPr>
-          <a:xfrm>
-            <a:off x="457200" y="384048"/>
-            <a:ext cx="8229600" cy="457200"/>
-          </a:xfrm>
-          <a:prstGeom prst="rect">
-            <a:avLst/>
-          </a:prstGeom>
-          <a:noFill/>
-        </p:spPr>
-        <p:txBody>
-          <a:bodyPr wrap="square" anchor="t"/>
-          <a:lstStyle/>
-          <a:p>
-            <a:pPr algn="l" eaLnBrk="0">
-              <a:lnSpc>
-                <a:spcPct val="110000"/>
-              </a:lnSpc>
-            </a:pPr>
-            <a:r>
-              <a:rPr sz="2000" b="1">
-                <a:solidFill>
-                  <a:srgbClr val="5CB8F2"/>
-                </a:solidFill>
-                <a:latin typeface="맑은 고딕"/>
-                <a:ea typeface="맑은 고딕"/>
-                <a:cs typeface="맑은 고딕"/>
-              </a:rPr>
-              <a:t>경남대학교 피지컬AI 사관학교</a:t>
-            </a:r>
-          </a:p>
-        </p:txBody>
-      </p:sp>
-      <p:sp>
-        <p:nvSpPr>
-          <p:cNvPr id="3" name="Rectangle 2"/>
-          <p:cNvSpPr/>
-          <p:nvPr/>
-        </p:nvSpPr>
-        <p:spPr>
-          <a:xfrm>
-            <a:off x="548640" y="859536"/>
-            <a:ext cx="3606800" cy="41148"/>
-          </a:xfrm>
-          <a:prstGeom prst="rect">
-            <a:avLst/>
-          </a:prstGeom>
-          <a:solidFill>
-            <a:srgbClr val="5CB8F2"/>
-          </a:solidFill>
-          <a:ln>
-            <a:noFill/>
-          </a:ln>
-        </p:spPr>
-        <p:txBody>
-          <a:bodyPr rtlCol="0" anchor="ctr"/>
-          <a:lstStyle/>
-          <a:p>
-            <a:pPr algn="ctr"/>
-          </a:p>
-        </p:txBody>
-      </p:sp>
-      <p:sp>
-        <p:nvSpPr>
-          <p:cNvPr id="4" name="TextBox 3"/>
-          <p:cNvSpPr txBox="1"/>
-          <p:nvPr/>
-        </p:nvSpPr>
-        <p:spPr>
-          <a:xfrm>
-            <a:off x="548640" y="2148840"/>
-            <a:ext cx="2377440" cy="1737360"/>
-          </a:xfrm>
-          <a:prstGeom prst="rect">
-            <a:avLst/>
-          </a:prstGeom>
-          <a:noFill/>
-        </p:spPr>
-        <p:txBody>
-          <a:bodyPr wrap="square" anchor="ctr"/>
-          <a:lstStyle/>
-          <a:p>
-            <a:pPr algn="l" eaLnBrk="0">
-              <a:lnSpc>
-                <a:spcPct val="110000"/>
-              </a:lnSpc>
-            </a:pPr>
-            <a:r>
-              <a:rPr sz="8800" b="1">
-                <a:solidFill>
-                  <a:srgbClr val="5CB8F2"/>
-                </a:solidFill>
-                <a:latin typeface="맑은 고딕"/>
-                <a:ea typeface="맑은 고딕"/>
-                <a:cs typeface="맑은 고딕"/>
-              </a:rPr>
-              <a:t>03</a:t>
-            </a:r>
-          </a:p>
-        </p:txBody>
-      </p:sp>
-      <p:sp>
-        <p:nvSpPr>
-          <p:cNvPr id="5" name="TextBox 4"/>
-          <p:cNvSpPr txBox="1"/>
-          <p:nvPr/>
-        </p:nvSpPr>
-        <p:spPr>
-          <a:xfrm>
-            <a:off x="3017520" y="2011680"/>
-            <a:ext cx="8625535" cy="2011680"/>
-          </a:xfrm>
-          <a:prstGeom prst="rect">
-            <a:avLst/>
-          </a:prstGeom>
-          <a:noFill/>
-        </p:spPr>
-        <p:txBody>
-          <a:bodyPr wrap="square" anchor="ctr"/>
-          <a:lstStyle/>
-          <a:p>
-            <a:pPr algn="l" eaLnBrk="0">
-              <a:lnSpc>
-                <a:spcPct val="110000"/>
-              </a:lnSpc>
-            </a:pPr>
-            <a:r>
-              <a:rPr sz="3400" b="1">
-                <a:solidFill>
-                  <a:srgbClr val="13294B"/>
-                </a:solidFill>
-                <a:latin typeface="맑은 고딕"/>
-                <a:ea typeface="맑은 고딕"/>
-                <a:cs typeface="맑은 고딕"/>
-              </a:rPr>
-              <a:t>조치의 판단과 출처:</a:t>
-            </a:r>
-          </a:p>
-          <a:p>
-            <a:pPr algn="l" eaLnBrk="0">
-              <a:lnSpc>
-                <a:spcPct val="110000"/>
-              </a:lnSpc>
-            </a:pPr>
-            <a:r>
-              <a:rPr sz="3400" b="1">
-                <a:solidFill>
-                  <a:srgbClr val="13294B"/>
-                </a:solidFill>
-                <a:latin typeface="맑은 고딕"/>
-                <a:ea typeface="맑은 고딕"/>
-                <a:cs typeface="맑은 고딕"/>
-              </a:rPr>
-              <a:t>추천안이 되기까지</a:t>
-            </a:r>
-          </a:p>
-        </p:txBody>
-      </p:sp>
-      <p:sp>
-        <p:nvSpPr>
-          <p:cNvPr id="6" name="Rounded Rectangle 5"/>
-          <p:cNvSpPr/>
-          <p:nvPr/>
-        </p:nvSpPr>
-        <p:spPr>
-          <a:xfrm>
-            <a:off x="3108960" y="4160520"/>
-            <a:ext cx="822960" cy="347472"/>
-          </a:xfrm>
-          <a:prstGeom prst="roundRect">
-            <a:avLst>
-              <a:gd name="adj" fmla="val 50000"/>
-            </a:avLst>
-          </a:prstGeom>
-          <a:solidFill>
-            <a:srgbClr val="5CB8F2"/>
-          </a:solidFill>
-          <a:ln>
-            <a:noFill/>
-          </a:ln>
-        </p:spPr>
-        <p:txBody>
-          <a:bodyPr rtlCol="0" anchor="ctr"/>
-          <a:lstStyle/>
-          <a:p>
-            <a:pPr algn="ctr"/>
-          </a:p>
-        </p:txBody>
-      </p:sp>
-      <p:sp>
-        <p:nvSpPr>
-          <p:cNvPr id="7" name="TextBox 6"/>
-          <p:cNvSpPr txBox="1"/>
-          <p:nvPr/>
-        </p:nvSpPr>
-        <p:spPr>
-          <a:xfrm>
-            <a:off x="3108960" y="4160520"/>
-            <a:ext cx="822960" cy="347472"/>
-          </a:xfrm>
-          <a:prstGeom prst="rect">
-            <a:avLst/>
-          </a:prstGeom>
-          <a:noFill/>
-        </p:spPr>
-        <p:txBody>
-          <a:bodyPr wrap="square" anchor="ctr"/>
-          <a:lstStyle/>
-          <a:p>
-            <a:pPr algn="ctr" eaLnBrk="0">
-              <a:lnSpc>
-                <a:spcPct val="110000"/>
-              </a:lnSpc>
-            </a:pPr>
-            <a:r>
-              <a:rPr sz="1300" b="1">
-                <a:solidFill>
-                  <a:srgbClr val="13294B"/>
-                </a:solidFill>
-                <a:latin typeface="맑은 고딕"/>
-                <a:ea typeface="맑은 고딕"/>
-                <a:cs typeface="맑은 고딕"/>
-              </a:rPr>
-              <a:t>이론</a:t>
-            </a:r>
-          </a:p>
-        </p:txBody>
-      </p:sp>
-      <p:sp>
-        <p:nvSpPr>
-          <p:cNvPr id="8" name="TextBox 7"/>
-          <p:cNvSpPr txBox="1"/>
-          <p:nvPr/>
-        </p:nvSpPr>
-        <p:spPr>
-          <a:xfrm>
-            <a:off x="3017520" y="4617720"/>
-            <a:ext cx="8625535" cy="457200"/>
-          </a:xfrm>
-          <a:prstGeom prst="rect">
-            <a:avLst/>
-          </a:prstGeom>
-          <a:noFill/>
-        </p:spPr>
-        <p:txBody>
-          <a:bodyPr wrap="square" anchor="t"/>
-          <a:lstStyle/>
-          <a:p>
-            <a:pPr algn="l" eaLnBrk="0">
-              <a:lnSpc>
-                <a:spcPct val="110000"/>
-              </a:lnSpc>
-            </a:pPr>
-            <a:r>
-              <a:rPr sz="1700" b="0">
-                <a:solidFill>
-                  <a:srgbClr val="556175"/>
-                </a:solidFill>
-                <a:latin typeface="맑은 고딕"/>
-                <a:ea typeface="맑은 고딕"/>
-                <a:cs typeface="맑은 고딕"/>
-              </a:rPr>
-              <a:t>조치 후보를 견주어 출처가 달린 추천안 한 건을 제출하기까지</a:t>
+              <a:t>이 사건: 납기까지 5.98 h, 지연 보상 시간당 120만 원, 출하 대기 로트 800개</a:t>
             </a:r>
           </a:p>
         </p:txBody>
@@ -11139,7 +10786,7 @@
                 <a:ea typeface="맑은 고딕"/>
                 <a:cs typeface="맑은 고딕"/>
               </a:rPr>
-              <a:t>evaluate_cards의 결과: 순위와 승인 역할</a:t>
+              <a:t>조치 평가 도구의 결과: 순위와 승인 역할</a:t>
             </a:r>
           </a:p>
         </p:txBody>
@@ -11178,7 +10825,7 @@
                 <a:ea typeface="맑은 고딕"/>
                 <a:cs typeface="맑은 고딕"/>
               </a:rPr>
-              <a:t>SOP에서 나온 조치 후보를 판단 규칙과 성과 기준으로 평가한 결과에는 후보마다 정해진 승인 역할이 함께 실린다.</a:t>
+              <a:t>판단 규칙(DMN)이 가린 후보에 성과 기준(BSC · KPI)으로 순위를 매긴 결과에는 승인 역할이 함께 실린다.</a:t>
             </a:r>
           </a:p>
         </p:txBody>
@@ -11355,7 +11002,7 @@
                 <a:ea typeface="맑은 고딕"/>
                 <a:cs typeface="맑은 고딕"/>
               </a:rPr>
-              <a:t>조치와 점수</a:t>
+              <a:t>조치와 점수 · 판단 규칙(DMN)</a:t>
             </a:r>
           </a:p>
         </p:txBody>
@@ -11506,6 +11153,24 @@
               <a:t>팬 최대 운전 (SOP-COOL-11) · 점수 +3.38</a:t>
             </a:r>
           </a:p>
+          <a:p>
+            <a:pPr algn="l" eaLnBrk="0">
+              <a:lnSpc>
+                <a:spcPct val="110000"/>
+              </a:lnSpc>
+            </a:pPr>
+            <a:r>
+              <a:rPr sz="1400" b="0">
+                <a:solidFill>
+                  <a:srgbClr val="1F2A3A"/>
+                </a:solidFill>
+                <a:latin typeface="맑은 고딕"/>
+                <a:ea typeface="맑은 고딕"/>
+                <a:cs typeface="맑은 고딕"/>
+              </a:rPr>
+              <a:t>판단 규칙: 원격 자동이어서 가능</a:t>
+            </a:r>
+          </a:p>
         </p:txBody>
       </p:sp>
       <p:sp>
@@ -11654,6 +11319,24 @@
               <a:t>부하 70 %와 야간 핀 세척 (SOP-COOL-13) · 점수 +2.75</a:t>
             </a:r>
           </a:p>
+          <a:p>
+            <a:pPr algn="l" eaLnBrk="0">
+              <a:lnSpc>
+                <a:spcPct val="110000"/>
+              </a:lnSpc>
+            </a:pPr>
+            <a:r>
+              <a:rPr sz="1400" b="0">
+                <a:solidFill>
+                  <a:srgbClr val="1F2A3A"/>
+                </a:solidFill>
+                <a:latin typeface="맑은 고딕"/>
+                <a:ea typeface="맑은 고딕"/>
+                <a:cs typeface="맑은 고딕"/>
+              </a:rPr>
+              <a:t>판단 규칙: 원격 자동이어서 가능</a:t>
+            </a:r>
+          </a:p>
         </p:txBody>
       </p:sp>
       <p:sp>
@@ -11802,6 +11485,24 @@
               <a:t>팬 최대 운전과 부하 80 % (SOP-COOL-12) · 점수 +2.75</a:t>
             </a:r>
           </a:p>
+          <a:p>
+            <a:pPr algn="l" eaLnBrk="0">
+              <a:lnSpc>
+                <a:spcPct val="110000"/>
+              </a:lnSpc>
+            </a:pPr>
+            <a:r>
+              <a:rPr sz="1400" b="0">
+                <a:solidFill>
+                  <a:srgbClr val="1F2A3A"/>
+                </a:solidFill>
+                <a:latin typeface="맑은 고딕"/>
+                <a:ea typeface="맑은 고딕"/>
+                <a:cs typeface="맑은 고딕"/>
+              </a:rPr>
+              <a:t>판단 규칙: 원격 자동이어서 가능</a:t>
+            </a:r>
+          </a:p>
         </p:txBody>
       </p:sp>
       <p:sp>
@@ -11948,6 +11649,24 @@
                 <a:cs typeface="맑은 고딕"/>
               </a:rPr>
               <a:t>쿨러 핀 세척 (SOP-COOL-14) · 점수 -1.58</a:t>
+            </a:r>
+          </a:p>
+          <a:p>
+            <a:pPr algn="l" eaLnBrk="0">
+              <a:lnSpc>
+                <a:spcPct val="110000"/>
+              </a:lnSpc>
+            </a:pPr>
+            <a:r>
+              <a:rPr sz="1400" b="0">
+                <a:solidFill>
+                  <a:srgbClr val="1F2A3A"/>
+                </a:solidFill>
+                <a:latin typeface="맑은 고딕"/>
+                <a:ea typeface="맑은 고딕"/>
+                <a:cs typeface="맑은 고딕"/>
+              </a:rPr>
+              <a:t>판단 규칙: 운전 모드와 무관하게 가능</a:t>
             </a:r>
           </a:p>
         </p:txBody>
@@ -12051,7 +11770,7 @@
                 <a:ea typeface="맑은 고딕"/>
                 <a:cs typeface="맑은 고딕"/>
               </a:rPr>
-              <a:t>업무 DB에서 읽는 값: 납기와 품질</a:t>
+              <a:t>도구 사이를 넘어가는 식별자</a:t>
             </a:r>
           </a:p>
         </p:txBody>
@@ -12090,7 +11809,7 @@
                 <a:ea typeface="맑은 고딕"/>
                 <a:cs typeface="맑은 고딕"/>
               </a:rPr>
-              <a:t>생산과 품질의 사정은 그래프에 값으로 두지 않고, 판단할 때마다 mes_orders와 qms_lots로 업무 DB에서 읽는다.</a:t>
+              <a:t>도구와 도구 사이에는 문장이 아니라 식별자가 넘어가므로, 뒤의 도구는 앞의 도구가 가리킨 바로 그 대상을 읽는다.</a:t>
             </a:r>
           </a:p>
         </p:txBody>
@@ -12165,146 +11884,20 @@
       </p:sp>
       <p:sp>
         <p:nvSpPr>
-          <p:cNvPr id="6" name="TextBox 5"/>
-          <p:cNvSpPr txBox="1"/>
-          <p:nvPr/>
-        </p:nvSpPr>
-        <p:spPr>
-          <a:xfrm>
-            <a:off x="640080" y="1933956"/>
-            <a:ext cx="3291839" cy="1371600"/>
-          </a:xfrm>
-          <a:prstGeom prst="rect">
-            <a:avLst/>
-          </a:prstGeom>
-          <a:noFill/>
-        </p:spPr>
-        <p:txBody>
-          <a:bodyPr wrap="square" anchor="ctr"/>
-          <a:lstStyle/>
-          <a:p>
-            <a:pPr algn="l" eaLnBrk="0">
-              <a:lnSpc>
-                <a:spcPct val="110000"/>
-              </a:lnSpc>
-              <a:spcAft>
-                <a:spcPts val="200"/>
-              </a:spcAft>
-            </a:pPr>
-            <a:r>
-              <a:rPr sz="1800" b="1">
-                <a:solidFill>
-                  <a:srgbClr val="13294B"/>
-                </a:solidFill>
-                <a:latin typeface="맑은 고딕"/>
-                <a:ea typeface="맑은 고딕"/>
-                <a:cs typeface="맑은 고딕"/>
-              </a:rPr>
-              <a:t>mes_orders</a:t>
-            </a:r>
-          </a:p>
-          <a:p>
-            <a:pPr algn="l" eaLnBrk="0">
-              <a:lnSpc>
-                <a:spcPct val="110000"/>
-              </a:lnSpc>
-              <a:spcAft>
-                <a:spcPts val="200"/>
-              </a:spcAft>
-            </a:pPr>
-            <a:r>
-              <a:rPr sz="1150" b="0">
-                <a:solidFill>
-                  <a:srgbClr val="556175"/>
-                </a:solidFill>
-                <a:latin typeface="맑은 고딕"/>
-                <a:ea typeface="맑은 고딕"/>
-                <a:cs typeface="맑은 고딕"/>
-              </a:rPr>
-              <a:t>Manufacturing Execution System</a:t>
-            </a:r>
-          </a:p>
-        </p:txBody>
-      </p:sp>
-      <p:sp>
-        <p:nvSpPr>
-          <p:cNvPr id="7" name="TextBox 6"/>
-          <p:cNvSpPr txBox="1"/>
-          <p:nvPr/>
-        </p:nvSpPr>
-        <p:spPr>
-          <a:xfrm>
-            <a:off x="4023359" y="1933956"/>
-            <a:ext cx="7528255" cy="1371600"/>
-          </a:xfrm>
-          <a:prstGeom prst="rect">
-            <a:avLst/>
-          </a:prstGeom>
-          <a:noFill/>
-        </p:spPr>
-        <p:txBody>
-          <a:bodyPr wrap="square" anchor="ctr"/>
-          <a:lstStyle/>
-          <a:p>
-            <a:pPr algn="l" eaLnBrk="0">
-              <a:lnSpc>
-                <a:spcPct val="110000"/>
-              </a:lnSpc>
-              <a:spcAft>
-                <a:spcPts val="300"/>
-              </a:spcAft>
-            </a:pPr>
-            <a:r>
-              <a:rPr sz="1400" b="0">
-                <a:solidFill>
-                  <a:srgbClr val="1F2A3A"/>
-                </a:solidFill>
-                <a:latin typeface="맑은 고딕"/>
-                <a:ea typeface="맑은 고딕"/>
-                <a:cs typeface="맑은 고딕"/>
-              </a:rPr>
-              <a:t>HYD-01에 걸린 생산 오더를 읽는다.</a:t>
-            </a:r>
-          </a:p>
-          <a:p>
-            <a:pPr algn="l" eaLnBrk="0">
-              <a:lnSpc>
-                <a:spcPct val="110000"/>
-              </a:lnSpc>
-              <a:spcAft>
-                <a:spcPts val="300"/>
-              </a:spcAft>
-            </a:pPr>
-            <a:r>
-              <a:rPr sz="1400" b="0">
-                <a:solidFill>
-                  <a:srgbClr val="1F2A3A"/>
-                </a:solidFill>
-                <a:latin typeface="맑은 고딕"/>
-                <a:ea typeface="맑은 고딕"/>
-                <a:cs typeface="맑은 고딕"/>
-              </a:rPr>
-              <a:t>이 사건: OEM 오더의 납기까지 5.98 h, 늦으면 시간당 120만 원</a:t>
-            </a:r>
-          </a:p>
-        </p:txBody>
-      </p:sp>
-      <p:sp>
-        <p:nvSpPr>
-          <p:cNvPr id="8" name="Rectangle 7"/>
+          <p:cNvPr id="6" name="Rectangle 5"/>
           <p:cNvSpPr/>
           <p:nvPr/>
         </p:nvSpPr>
         <p:spPr>
           <a:xfrm>
-            <a:off x="548640" y="3296412"/>
-            <a:ext cx="11094415" cy="13716"/>
+            <a:off x="1658081" y="3566096"/>
+            <a:ext cx="8875532" cy="146304"/>
           </a:xfrm>
           <a:prstGeom prst="rect">
             <a:avLst/>
           </a:prstGeom>
           <a:solidFill>
-            <a:srgbClr val="D3D9E1"/>
+            <a:srgbClr val="5CB8F2"/>
           </a:solidFill>
           <a:ln>
             <a:noFill/>
@@ -12320,146 +11913,20 @@
       </p:sp>
       <p:sp>
         <p:nvSpPr>
-          <p:cNvPr id="9" name="TextBox 8"/>
-          <p:cNvSpPr txBox="1"/>
-          <p:nvPr/>
-        </p:nvSpPr>
-        <p:spPr>
-          <a:xfrm>
-            <a:off x="640080" y="3305556"/>
-            <a:ext cx="3291839" cy="1371600"/>
-          </a:xfrm>
-          <a:prstGeom prst="rect">
-            <a:avLst/>
-          </a:prstGeom>
-          <a:noFill/>
-        </p:spPr>
-        <p:txBody>
-          <a:bodyPr wrap="square" anchor="ctr"/>
-          <a:lstStyle/>
-          <a:p>
-            <a:pPr algn="l" eaLnBrk="0">
-              <a:lnSpc>
-                <a:spcPct val="110000"/>
-              </a:lnSpc>
-              <a:spcAft>
-                <a:spcPts val="200"/>
-              </a:spcAft>
-            </a:pPr>
-            <a:r>
-              <a:rPr sz="1800" b="1">
-                <a:solidFill>
-                  <a:srgbClr val="13294B"/>
-                </a:solidFill>
-                <a:latin typeface="맑은 고딕"/>
-                <a:ea typeface="맑은 고딕"/>
-                <a:cs typeface="맑은 고딕"/>
-              </a:rPr>
-              <a:t>qms_lots</a:t>
-            </a:r>
-          </a:p>
-          <a:p>
-            <a:pPr algn="l" eaLnBrk="0">
-              <a:lnSpc>
-                <a:spcPct val="110000"/>
-              </a:lnSpc>
-              <a:spcAft>
-                <a:spcPts val="200"/>
-              </a:spcAft>
-            </a:pPr>
-            <a:r>
-              <a:rPr sz="1150" b="0">
-                <a:solidFill>
-                  <a:srgbClr val="556175"/>
-                </a:solidFill>
-                <a:latin typeface="맑은 고딕"/>
-                <a:ea typeface="맑은 고딕"/>
-                <a:cs typeface="맑은 고딕"/>
-              </a:rPr>
-              <a:t>Quality Management System</a:t>
-            </a:r>
-          </a:p>
-        </p:txBody>
-      </p:sp>
-      <p:sp>
-        <p:nvSpPr>
-          <p:cNvPr id="10" name="TextBox 9"/>
-          <p:cNvSpPr txBox="1"/>
-          <p:nvPr/>
-        </p:nvSpPr>
-        <p:spPr>
-          <a:xfrm>
-            <a:off x="4023359" y="3305556"/>
-            <a:ext cx="7528255" cy="1371600"/>
-          </a:xfrm>
-          <a:prstGeom prst="rect">
-            <a:avLst/>
-          </a:prstGeom>
-          <a:noFill/>
-        </p:spPr>
-        <p:txBody>
-          <a:bodyPr wrap="square" anchor="ctr"/>
-          <a:lstStyle/>
-          <a:p>
-            <a:pPr algn="l" eaLnBrk="0">
-              <a:lnSpc>
-                <a:spcPct val="110000"/>
-              </a:lnSpc>
-              <a:spcAft>
-                <a:spcPts val="300"/>
-              </a:spcAft>
-            </a:pPr>
-            <a:r>
-              <a:rPr sz="1400" b="0">
-                <a:solidFill>
-                  <a:srgbClr val="1F2A3A"/>
-                </a:solidFill>
-                <a:latin typeface="맑은 고딕"/>
-                <a:ea typeface="맑은 고딕"/>
-                <a:cs typeface="맑은 고딕"/>
-              </a:rPr>
-              <a:t>HYD-01의 품질 로트를 읽는다.</a:t>
-            </a:r>
-          </a:p>
-          <a:p>
-            <a:pPr algn="l" eaLnBrk="0">
-              <a:lnSpc>
-                <a:spcPct val="110000"/>
-              </a:lnSpc>
-              <a:spcAft>
-                <a:spcPts val="300"/>
-              </a:spcAft>
-            </a:pPr>
-            <a:r>
-              <a:rPr sz="1400" b="0">
-                <a:solidFill>
-                  <a:srgbClr val="1F2A3A"/>
-                </a:solidFill>
-                <a:latin typeface="맑은 고딕"/>
-                <a:ea typeface="맑은 고딕"/>
-                <a:cs typeface="맑은 고딕"/>
-              </a:rPr>
-              <a:t>이 사건: 출하를 기다리는 로트 800개</a:t>
-            </a:r>
-          </a:p>
-        </p:txBody>
-      </p:sp>
-      <p:sp>
-        <p:nvSpPr>
-          <p:cNvPr id="11" name="Rectangle 10"/>
+          <p:cNvPr id="7" name="Chevron 6"/>
           <p:cNvSpPr/>
           <p:nvPr/>
         </p:nvSpPr>
         <p:spPr>
           <a:xfrm>
-            <a:off x="548640" y="4668012"/>
-            <a:ext cx="11094415" cy="13716"/>
-          </a:xfrm>
-          <a:prstGeom prst="rect">
+            <a:off x="2648651" y="3456368"/>
+            <a:ext cx="237744" cy="365760"/>
+          </a:xfrm>
+          <a:prstGeom prst="chevron">
             <a:avLst/>
           </a:prstGeom>
           <a:solidFill>
-            <a:srgbClr val="D3D9E1"/>
+            <a:srgbClr val="13294B"/>
           </a:solidFill>
           <a:ln>
             <a:noFill/>
@@ -12475,22 +11942,198 @@
       </p:sp>
       <p:sp>
         <p:nvSpPr>
-          <p:cNvPr id="12" name="Rounded Rectangle 11"/>
+          <p:cNvPr id="8" name="TextBox 7"/>
+          <p:cNvSpPr txBox="1"/>
+          <p:nvPr/>
+        </p:nvSpPr>
+        <p:spPr>
+          <a:xfrm>
+            <a:off x="2143551" y="3108896"/>
+            <a:ext cx="1247943" cy="310896"/>
+          </a:xfrm>
+          <a:prstGeom prst="rect">
+            <a:avLst/>
+          </a:prstGeom>
+          <a:noFill/>
+        </p:spPr>
+        <p:txBody>
+          <a:bodyPr wrap="square" anchor="ctr"/>
+          <a:lstStyle/>
+          <a:p>
+            <a:pPr algn="ctr" eaLnBrk="0">
+              <a:lnSpc>
+                <a:spcPct val="110000"/>
+              </a:lnSpc>
+            </a:pPr>
+            <a:r>
+              <a:rPr sz="1150" b="1">
+                <a:solidFill>
+                  <a:srgbClr val="1A6FC4"/>
+                </a:solidFill>
+                <a:latin typeface="맑은 고딕"/>
+                <a:ea typeface="맑은 고딕"/>
+                <a:cs typeface="맑은 고딕"/>
+              </a:rPr>
+              <a:t>diagnose</a:t>
+            </a:r>
+          </a:p>
+        </p:txBody>
+      </p:sp>
+      <p:sp>
+        <p:nvSpPr>
+          <p:cNvPr id="9" name="Oval 8"/>
           <p:cNvSpPr/>
           <p:nvPr/>
         </p:nvSpPr>
         <p:spPr>
           <a:xfrm>
-            <a:off x="548640" y="4704588"/>
-            <a:ext cx="11094415" cy="1316736"/>
-          </a:xfrm>
-          <a:prstGeom prst="roundRect">
-            <a:avLst>
-              <a:gd name="adj" fmla="val 6000"/>
-            </a:avLst>
+            <a:off x="1081171" y="3062338"/>
+            <a:ext cx="1153819" cy="1153819"/>
+          </a:xfrm>
+          <a:prstGeom prst="ellipse">
+            <a:avLst/>
           </a:prstGeom>
           <a:solidFill>
-            <a:srgbClr val="E7F3FD"/>
+            <a:srgbClr val="FFFFFF"/>
+          </a:solidFill>
+          <a:ln w="28575">
+            <a:solidFill>
+              <a:srgbClr val="13294B"/>
+            </a:solidFill>
+          </a:ln>
+        </p:spPr>
+        <p:txBody>
+          <a:bodyPr rtlCol="0" anchor="ctr"/>
+          <a:lstStyle/>
+          <a:p>
+            <a:pPr algn="ctr"/>
+          </a:p>
+        </p:txBody>
+      </p:sp>
+      <p:pic>
+        <p:nvPicPr>
+          <p:cNvPr id="10" name="아이콘:bell" descr="bell_13294B_1.6.png"/>
+          <p:cNvPicPr>
+            <a:picLocks noChangeAspect="1"/>
+          </p:cNvPicPr>
+          <p:nvPr/>
+        </p:nvPicPr>
+        <p:blipFill>
+          <a:blip r:embed="rId3"/>
+          <a:stretch>
+            <a:fillRect/>
+          </a:stretch>
+        </p:blipFill>
+        <p:spPr>
+          <a:xfrm>
+            <a:off x="1358088" y="3339255"/>
+            <a:ext cx="599985" cy="599985"/>
+          </a:xfrm>
+          <a:prstGeom prst="rect">
+            <a:avLst/>
+          </a:prstGeom>
+        </p:spPr>
+      </p:pic>
+      <p:sp>
+        <p:nvSpPr>
+          <p:cNvPr id="11" name="TextBox 10"/>
+          <p:cNvSpPr txBox="1"/>
+          <p:nvPr/>
+        </p:nvSpPr>
+        <p:spPr>
+          <a:xfrm>
+            <a:off x="640079" y="4353318"/>
+            <a:ext cx="2036003" cy="932815"/>
+          </a:xfrm>
+          <a:prstGeom prst="rect">
+            <a:avLst/>
+          </a:prstGeom>
+          <a:noFill/>
+        </p:spPr>
+        <p:txBody>
+          <a:bodyPr wrap="square" anchor="t"/>
+          <a:lstStyle/>
+          <a:p>
+            <a:pPr algn="ctr" eaLnBrk="0">
+              <a:lnSpc>
+                <a:spcPct val="110000"/>
+              </a:lnSpc>
+              <a:spcAft>
+                <a:spcPts val="400"/>
+              </a:spcAft>
+            </a:pPr>
+            <a:r>
+              <a:rPr sz="1650" b="1">
+                <a:solidFill>
+                  <a:srgbClr val="13294B"/>
+                </a:solidFill>
+                <a:latin typeface="맑은 고딕"/>
+                <a:ea typeface="맑은 고딕"/>
+                <a:cs typeface="맑은 고딕"/>
+              </a:rPr>
+              <a:t>경보</a:t>
+            </a:r>
+          </a:p>
+          <a:p>
+            <a:pPr algn="ctr" eaLnBrk="0">
+              <a:lnSpc>
+                <a:spcPct val="110000"/>
+              </a:lnSpc>
+              <a:spcAft>
+                <a:spcPts val="400"/>
+              </a:spcAft>
+            </a:pPr>
+            <a:r>
+              <a:rPr sz="1300" b="0">
+                <a:solidFill>
+                  <a:srgbClr val="1F2A3A"/>
+                </a:solidFill>
+                <a:latin typeface="맑은 고딕"/>
+                <a:ea typeface="맑은 고딕"/>
+                <a:cs typeface="맑은 고딕"/>
+              </a:rPr>
+              <a:t>ALT-hyd01-</a:t>
+            </a:r>
+          </a:p>
+          <a:p>
+            <a:pPr algn="ctr" eaLnBrk="0">
+              <a:lnSpc>
+                <a:spcPct val="110000"/>
+              </a:lnSpc>
+              <a:spcAft>
+                <a:spcPts val="400"/>
+              </a:spcAft>
+            </a:pPr>
+            <a:r>
+              <a:rPr sz="1300" b="0">
+                <a:solidFill>
+                  <a:srgbClr val="1F2A3A"/>
+                </a:solidFill>
+                <a:latin typeface="맑은 고딕"/>
+                <a:ea typeface="맑은 고딕"/>
+                <a:cs typeface="맑은 고딕"/>
+              </a:rPr>
+              <a:t>0014-e0a1</a:t>
+            </a:r>
+          </a:p>
+        </p:txBody>
+      </p:sp>
+      <p:sp>
+        <p:nvSpPr>
+          <p:cNvPr id="12" name="Chevron 11"/>
+          <p:cNvSpPr/>
+          <p:nvPr/>
+        </p:nvSpPr>
+        <p:spPr>
+          <a:xfrm>
+            <a:off x="4867534" y="3456368"/>
+            <a:ext cx="237744" cy="365760"/>
+          </a:xfrm>
+          <a:prstGeom prst="chevron">
+            <a:avLst/>
+          </a:prstGeom>
+          <a:solidFill>
+            <a:srgbClr val="13294B"/>
           </a:solidFill>
           <a:ln>
             <a:noFill/>
@@ -12512,8 +12155,8 @@
         </p:nvSpPr>
         <p:spPr>
           <a:xfrm>
-            <a:off x="640080" y="4677156"/>
-            <a:ext cx="3291839" cy="1371600"/>
+            <a:off x="4362434" y="3108896"/>
+            <a:ext cx="1247943" cy="310896"/>
           </a:xfrm>
           <a:prstGeom prst="rect">
             <a:avLst/>
@@ -12524,16 +12167,110 @@
           <a:bodyPr wrap="square" anchor="ctr"/>
           <a:lstStyle/>
           <a:p>
-            <a:pPr algn="l" eaLnBrk="0">
+            <a:pPr algn="ctr" eaLnBrk="0">
+              <a:lnSpc>
+                <a:spcPct val="110000"/>
+              </a:lnSpc>
+            </a:pPr>
+            <a:r>
+              <a:rPr sz="1150" b="1">
+                <a:solidFill>
+                  <a:srgbClr val="1A6FC4"/>
+                </a:solidFill>
+                <a:latin typeface="맑은 고딕"/>
+                <a:ea typeface="맑은 고딕"/>
+                <a:cs typeface="맑은 고딕"/>
+              </a:rPr>
+              <a:t>diagnose</a:t>
+            </a:r>
+          </a:p>
+        </p:txBody>
+      </p:sp>
+      <p:sp>
+        <p:nvSpPr>
+          <p:cNvPr id="14" name="Oval 13"/>
+          <p:cNvSpPr/>
+          <p:nvPr/>
+        </p:nvSpPr>
+        <p:spPr>
+          <a:xfrm>
+            <a:off x="3300054" y="3062338"/>
+            <a:ext cx="1153819" cy="1153819"/>
+          </a:xfrm>
+          <a:prstGeom prst="ellipse">
+            <a:avLst/>
+          </a:prstGeom>
+          <a:solidFill>
+            <a:srgbClr val="FFFFFF"/>
+          </a:solidFill>
+          <a:ln w="28575">
+            <a:solidFill>
+              <a:srgbClr val="13294B"/>
+            </a:solidFill>
+          </a:ln>
+        </p:spPr>
+        <p:txBody>
+          <a:bodyPr rtlCol="0" anchor="ctr"/>
+          <a:lstStyle/>
+          <a:p>
+            <a:pPr algn="ctr"/>
+          </a:p>
+        </p:txBody>
+      </p:sp>
+      <p:pic>
+        <p:nvPicPr>
+          <p:cNvPr id="15" name="아이콘:alert-triangle" descr="alert-triangle_13294B_1.6.png"/>
+          <p:cNvPicPr>
+            <a:picLocks noChangeAspect="1"/>
+          </p:cNvPicPr>
+          <p:nvPr/>
+        </p:nvPicPr>
+        <p:blipFill>
+          <a:blip r:embed="rId4"/>
+          <a:stretch>
+            <a:fillRect/>
+          </a:stretch>
+        </p:blipFill>
+        <p:spPr>
+          <a:xfrm>
+            <a:off x="3576971" y="3339255"/>
+            <a:ext cx="599985" cy="599985"/>
+          </a:xfrm>
+          <a:prstGeom prst="rect">
+            <a:avLst/>
+          </a:prstGeom>
+        </p:spPr>
+      </p:pic>
+      <p:sp>
+        <p:nvSpPr>
+          <p:cNvPr id="16" name="TextBox 15"/>
+          <p:cNvSpPr txBox="1"/>
+          <p:nvPr/>
+        </p:nvSpPr>
+        <p:spPr>
+          <a:xfrm>
+            <a:off x="2858963" y="4353318"/>
+            <a:ext cx="2036003" cy="932815"/>
+          </a:xfrm>
+          <a:prstGeom prst="rect">
+            <a:avLst/>
+          </a:prstGeom>
+          <a:noFill/>
+        </p:spPr>
+        <p:txBody>
+          <a:bodyPr wrap="square" anchor="t"/>
+          <a:lstStyle/>
+          <a:p>
+            <a:pPr algn="ctr" eaLnBrk="0">
               <a:lnSpc>
                 <a:spcPct val="110000"/>
               </a:lnSpc>
               <a:spcAft>
-                <a:spcPts val="200"/>
+                <a:spcPts val="400"/>
               </a:spcAft>
             </a:pPr>
             <a:r>
-              <a:rPr sz="1800" b="1">
+              <a:rPr sz="1650" b="1">
                 <a:solidFill>
                   <a:srgbClr val="13294B"/>
                 </a:solidFill>
@@ -12541,42 +12278,92 @@
                 <a:ea typeface="맑은 고딕"/>
                 <a:cs typeface="맑은 고딕"/>
               </a:rPr>
-              <a:t>지식에 등록된 것</a:t>
-            </a:r>
-          </a:p>
-          <a:p>
-            <a:pPr algn="l" eaLnBrk="0">
+              <a:t>고장 유형</a:t>
+            </a:r>
+          </a:p>
+          <a:p>
+            <a:pPr algn="ctr" eaLnBrk="0">
               <a:lnSpc>
                 <a:spcPct val="110000"/>
               </a:lnSpc>
               <a:spcAft>
-                <a:spcPts val="200"/>
+                <a:spcPts val="400"/>
               </a:spcAft>
             </a:pPr>
             <a:r>
-              <a:rPr sz="1150" b="0">
-                <a:solidFill>
-                  <a:srgbClr val="556175"/>
-                </a:solidFill>
-                <a:latin typeface="맑은 고딕"/>
-                <a:ea typeface="맑은 고딕"/>
-                <a:cs typeface="맑은 고딕"/>
-              </a:rPr>
-              <a:t>값의 자리</a:t>
-            </a:r>
-          </a:p>
-        </p:txBody>
-      </p:sp>
-      <p:sp>
-        <p:nvSpPr>
-          <p:cNvPr id="14" name="TextBox 13"/>
-          <p:cNvSpPr txBox="1"/>
-          <p:nvPr/>
-        </p:nvSpPr>
-        <p:spPr>
-          <a:xfrm>
-            <a:off x="4023359" y="4677156"/>
-            <a:ext cx="7528255" cy="1371600"/>
+              <a:rPr sz="1300" b="0">
+                <a:solidFill>
+                  <a:srgbClr val="1F2A3A"/>
+                </a:solidFill>
+                <a:latin typeface="맑은 고딕"/>
+                <a:ea typeface="맑은 고딕"/>
+                <a:cs typeface="맑은 고딕"/>
+              </a:rPr>
+              <a:t>fm:cooler-</a:t>
+            </a:r>
+          </a:p>
+          <a:p>
+            <a:pPr algn="ctr" eaLnBrk="0">
+              <a:lnSpc>
+                <a:spcPct val="110000"/>
+              </a:lnSpc>
+              <a:spcAft>
+                <a:spcPts val="400"/>
+              </a:spcAft>
+            </a:pPr>
+            <a:r>
+              <a:rPr sz="1300" b="0">
+                <a:solidFill>
+                  <a:srgbClr val="1F2A3A"/>
+                </a:solidFill>
+                <a:latin typeface="맑은 고딕"/>
+                <a:ea typeface="맑은 고딕"/>
+                <a:cs typeface="맑은 고딕"/>
+              </a:rPr>
+              <a:t>performance-loss</a:t>
+            </a:r>
+          </a:p>
+        </p:txBody>
+      </p:sp>
+      <p:sp>
+        <p:nvSpPr>
+          <p:cNvPr id="17" name="Chevron 16"/>
+          <p:cNvSpPr/>
+          <p:nvPr/>
+        </p:nvSpPr>
+        <p:spPr>
+          <a:xfrm>
+            <a:off x="7086417" y="3456368"/>
+            <a:ext cx="237744" cy="365760"/>
+          </a:xfrm>
+          <a:prstGeom prst="chevron">
+            <a:avLst/>
+          </a:prstGeom>
+          <a:solidFill>
+            <a:srgbClr val="13294B"/>
+          </a:solidFill>
+          <a:ln>
+            <a:noFill/>
+          </a:ln>
+        </p:spPr>
+        <p:txBody>
+          <a:bodyPr rtlCol="0" anchor="ctr"/>
+          <a:lstStyle/>
+          <a:p>
+            <a:pPr algn="ctr"/>
+          </a:p>
+        </p:txBody>
+      </p:sp>
+      <p:sp>
+        <p:nvSpPr>
+          <p:cNvPr id="18" name="TextBox 17"/>
+          <p:cNvSpPr txBox="1"/>
+          <p:nvPr/>
+        </p:nvSpPr>
+        <p:spPr>
+          <a:xfrm>
+            <a:off x="6581317" y="3108896"/>
+            <a:ext cx="1247943" cy="310896"/>
           </a:xfrm>
           <a:prstGeom prst="rect">
             <a:avLst/>
@@ -12587,16 +12374,131 @@
           <a:bodyPr wrap="square" anchor="ctr"/>
           <a:lstStyle/>
           <a:p>
-            <a:pPr algn="l" eaLnBrk="0">
+            <a:pPr algn="ctr" eaLnBrk="0">
+              <a:lnSpc>
+                <a:spcPct val="110000"/>
+              </a:lnSpc>
+            </a:pPr>
+            <a:r>
+              <a:rPr sz="1150" b="1">
+                <a:solidFill>
+                  <a:srgbClr val="1A6FC4"/>
+                </a:solidFill>
+                <a:latin typeface="맑은 고딕"/>
+                <a:ea typeface="맑은 고딕"/>
+                <a:cs typeface="맑은 고딕"/>
+              </a:rPr>
+              <a:t>evaluate</a:t>
+            </a:r>
+          </a:p>
+        </p:txBody>
+      </p:sp>
+      <p:sp>
+        <p:nvSpPr>
+          <p:cNvPr id="19" name="Oval 18"/>
+          <p:cNvSpPr/>
+          <p:nvPr/>
+        </p:nvSpPr>
+        <p:spPr>
+          <a:xfrm>
+            <a:off x="5518938" y="3062338"/>
+            <a:ext cx="1153819" cy="1153819"/>
+          </a:xfrm>
+          <a:prstGeom prst="ellipse">
+            <a:avLst/>
+          </a:prstGeom>
+          <a:solidFill>
+            <a:srgbClr val="FFFFFF"/>
+          </a:solidFill>
+          <a:ln w="28575">
+            <a:solidFill>
+              <a:srgbClr val="13294B"/>
+            </a:solidFill>
+          </a:ln>
+        </p:spPr>
+        <p:txBody>
+          <a:bodyPr rtlCol="0" anchor="ctr"/>
+          <a:lstStyle/>
+          <a:p>
+            <a:pPr algn="ctr"/>
+          </a:p>
+        </p:txBody>
+      </p:sp>
+      <p:pic>
+        <p:nvPicPr>
+          <p:cNvPr id="20" name="아이콘:search" descr="search_13294B_1.6.png"/>
+          <p:cNvPicPr>
+            <a:picLocks noChangeAspect="1"/>
+          </p:cNvPicPr>
+          <p:nvPr/>
+        </p:nvPicPr>
+        <p:blipFill>
+          <a:blip r:embed="rId5"/>
+          <a:stretch>
+            <a:fillRect/>
+          </a:stretch>
+        </p:blipFill>
+        <p:spPr>
+          <a:xfrm>
+            <a:off x="5795854" y="3339255"/>
+            <a:ext cx="599985" cy="599985"/>
+          </a:xfrm>
+          <a:prstGeom prst="rect">
+            <a:avLst/>
+          </a:prstGeom>
+        </p:spPr>
+      </p:pic>
+      <p:sp>
+        <p:nvSpPr>
+          <p:cNvPr id="21" name="TextBox 20"/>
+          <p:cNvSpPr txBox="1"/>
+          <p:nvPr/>
+        </p:nvSpPr>
+        <p:spPr>
+          <a:xfrm>
+            <a:off x="5077846" y="4353318"/>
+            <a:ext cx="2036003" cy="932815"/>
+          </a:xfrm>
+          <a:prstGeom prst="rect">
+            <a:avLst/>
+          </a:prstGeom>
+          <a:noFill/>
+        </p:spPr>
+        <p:txBody>
+          <a:bodyPr wrap="square" anchor="t"/>
+          <a:lstStyle/>
+          <a:p>
+            <a:pPr algn="ctr" eaLnBrk="0">
               <a:lnSpc>
                 <a:spcPct val="110000"/>
               </a:lnSpc>
               <a:spcAft>
-                <a:spcPts val="300"/>
+                <a:spcPts val="400"/>
               </a:spcAft>
             </a:pPr>
             <a:r>
-              <a:rPr sz="1400" b="0">
+              <a:rPr sz="1650" b="1">
+                <a:solidFill>
+                  <a:srgbClr val="13294B"/>
+                </a:solidFill>
+                <a:latin typeface="맑은 고딕"/>
+                <a:ea typeface="맑은 고딕"/>
+                <a:cs typeface="맑은 고딕"/>
+              </a:rPr>
+              <a:t>원인</a:t>
+            </a:r>
+          </a:p>
+          <a:p>
+            <a:pPr algn="ctr" eaLnBrk="0">
+              <a:lnSpc>
+                <a:spcPct val="110000"/>
+              </a:lnSpc>
+              <a:spcAft>
+                <a:spcPts val="400"/>
+              </a:spcAft>
+            </a:pPr>
+            <a:r>
+              <a:rPr sz="1300" b="0">
                 <a:solidFill>
                   <a:srgbClr val="1F2A3A"/>
                 </a:solidFill>
@@ -12604,20 +12506,20 @@
                 <a:ea typeface="맑은 고딕"/>
                 <a:cs typeface="맑은 고딕"/>
               </a:rPr>
-              <a:t>값이 아니라 값이 놓인 자리와 읽는 방법이다.</a:t>
-            </a:r>
-          </a:p>
-          <a:p>
-            <a:pPr algn="l" eaLnBrk="0">
+              <a:t>cause:cooler-</a:t>
+            </a:r>
+          </a:p>
+          <a:p>
+            <a:pPr algn="ctr" eaLnBrk="0">
               <a:lnSpc>
                 <a:spcPct val="110000"/>
               </a:lnSpc>
               <a:spcAft>
-                <a:spcPts val="300"/>
+                <a:spcPts val="400"/>
               </a:spcAft>
             </a:pPr>
             <a:r>
-              <a:rPr sz="1400" b="0">
+              <a:rPr sz="1300" b="0">
                 <a:solidFill>
                   <a:srgbClr val="1F2A3A"/>
                 </a:solidFill>
@@ -12625,7 +12527,353 @@
                 <a:ea typeface="맑은 고딕"/>
                 <a:cs typeface="맑은 고딕"/>
               </a:rPr>
-              <a:t>업무 데이터베이스를 등록할 때 열마다 입력 데이터의 자리를 만들어 두었다.</a:t>
+              <a:t>fin-fouling</a:t>
+            </a:r>
+          </a:p>
+        </p:txBody>
+      </p:sp>
+      <p:sp>
+        <p:nvSpPr>
+          <p:cNvPr id="22" name="Chevron 21"/>
+          <p:cNvSpPr/>
+          <p:nvPr/>
+        </p:nvSpPr>
+        <p:spPr>
+          <a:xfrm>
+            <a:off x="9305300" y="3456368"/>
+            <a:ext cx="237744" cy="365760"/>
+          </a:xfrm>
+          <a:prstGeom prst="chevron">
+            <a:avLst/>
+          </a:prstGeom>
+          <a:solidFill>
+            <a:srgbClr val="13294B"/>
+          </a:solidFill>
+          <a:ln>
+            <a:noFill/>
+          </a:ln>
+        </p:spPr>
+        <p:txBody>
+          <a:bodyPr rtlCol="0" anchor="ctr"/>
+          <a:lstStyle/>
+          <a:p>
+            <a:pPr algn="ctr"/>
+          </a:p>
+        </p:txBody>
+      </p:sp>
+      <p:sp>
+        <p:nvSpPr>
+          <p:cNvPr id="23" name="TextBox 22"/>
+          <p:cNvSpPr txBox="1"/>
+          <p:nvPr/>
+        </p:nvSpPr>
+        <p:spPr>
+          <a:xfrm>
+            <a:off x="8800200" y="3108896"/>
+            <a:ext cx="1247943" cy="310896"/>
+          </a:xfrm>
+          <a:prstGeom prst="rect">
+            <a:avLst/>
+          </a:prstGeom>
+          <a:noFill/>
+        </p:spPr>
+        <p:txBody>
+          <a:bodyPr wrap="square" anchor="ctr"/>
+          <a:lstStyle/>
+          <a:p>
+            <a:pPr algn="ctr" eaLnBrk="0">
+              <a:lnSpc>
+                <a:spcPct val="110000"/>
+              </a:lnSpc>
+            </a:pPr>
+            <a:r>
+              <a:rPr sz="1150" b="1">
+                <a:solidFill>
+                  <a:srgbClr val="1A6FC4"/>
+                </a:solidFill>
+                <a:latin typeface="맑은 고딕"/>
+                <a:ea typeface="맑은 고딕"/>
+                <a:cs typeface="맑은 고딕"/>
+              </a:rPr>
+              <a:t>submit</a:t>
+            </a:r>
+          </a:p>
+        </p:txBody>
+      </p:sp>
+      <p:sp>
+        <p:nvSpPr>
+          <p:cNvPr id="24" name="Oval 23"/>
+          <p:cNvSpPr/>
+          <p:nvPr/>
+        </p:nvSpPr>
+        <p:spPr>
+          <a:xfrm>
+            <a:off x="7737821" y="3062338"/>
+            <a:ext cx="1153819" cy="1153819"/>
+          </a:xfrm>
+          <a:prstGeom prst="ellipse">
+            <a:avLst/>
+          </a:prstGeom>
+          <a:solidFill>
+            <a:srgbClr val="FFFFFF"/>
+          </a:solidFill>
+          <a:ln w="28575">
+            <a:solidFill>
+              <a:srgbClr val="13294B"/>
+            </a:solidFill>
+          </a:ln>
+        </p:spPr>
+        <p:txBody>
+          <a:bodyPr rtlCol="0" anchor="ctr"/>
+          <a:lstStyle/>
+          <a:p>
+            <a:pPr algn="ctr"/>
+          </a:p>
+        </p:txBody>
+      </p:sp>
+      <p:pic>
+        <p:nvPicPr>
+          <p:cNvPr id="25" name="아이콘:tool" descr="tool_13294B_1.6.png"/>
+          <p:cNvPicPr>
+            <a:picLocks noChangeAspect="1"/>
+          </p:cNvPicPr>
+          <p:nvPr/>
+        </p:nvPicPr>
+        <p:blipFill>
+          <a:blip r:embed="rId6"/>
+          <a:stretch>
+            <a:fillRect/>
+          </a:stretch>
+        </p:blipFill>
+        <p:spPr>
+          <a:xfrm>
+            <a:off x="8014737" y="3339255"/>
+            <a:ext cx="599985" cy="599985"/>
+          </a:xfrm>
+          <a:prstGeom prst="rect">
+            <a:avLst/>
+          </a:prstGeom>
+        </p:spPr>
+      </p:pic>
+      <p:sp>
+        <p:nvSpPr>
+          <p:cNvPr id="26" name="TextBox 25"/>
+          <p:cNvSpPr txBox="1"/>
+          <p:nvPr/>
+        </p:nvSpPr>
+        <p:spPr>
+          <a:xfrm>
+            <a:off x="7296729" y="4353318"/>
+            <a:ext cx="2036003" cy="932815"/>
+          </a:xfrm>
+          <a:prstGeom prst="rect">
+            <a:avLst/>
+          </a:prstGeom>
+          <a:noFill/>
+        </p:spPr>
+        <p:txBody>
+          <a:bodyPr wrap="square" anchor="t"/>
+          <a:lstStyle/>
+          <a:p>
+            <a:pPr algn="ctr" eaLnBrk="0">
+              <a:lnSpc>
+                <a:spcPct val="110000"/>
+              </a:lnSpc>
+              <a:spcAft>
+                <a:spcPts val="400"/>
+              </a:spcAft>
+            </a:pPr>
+            <a:r>
+              <a:rPr sz="1650" b="1">
+                <a:solidFill>
+                  <a:srgbClr val="13294B"/>
+                </a:solidFill>
+                <a:latin typeface="맑은 고딕"/>
+                <a:ea typeface="맑은 고딕"/>
+                <a:cs typeface="맑은 고딕"/>
+              </a:rPr>
+              <a:t>조치 방법</a:t>
+            </a:r>
+          </a:p>
+          <a:p>
+            <a:pPr algn="ctr" eaLnBrk="0">
+              <a:lnSpc>
+                <a:spcPct val="110000"/>
+              </a:lnSpc>
+              <a:spcAft>
+                <a:spcPts val="400"/>
+              </a:spcAft>
+            </a:pPr>
+            <a:r>
+              <a:rPr sz="1300" b="0">
+                <a:solidFill>
+                  <a:srgbClr val="1F2A3A"/>
+                </a:solidFill>
+                <a:latin typeface="맑은 고딕"/>
+                <a:ea typeface="맑은 고딕"/>
+                <a:cs typeface="맑은 고딕"/>
+              </a:rPr>
+              <a:t>skill:</a:t>
+            </a:r>
+          </a:p>
+          <a:p>
+            <a:pPr algn="ctr" eaLnBrk="0">
+              <a:lnSpc>
+                <a:spcPct val="110000"/>
+              </a:lnSpc>
+              <a:spcAft>
+                <a:spcPts val="400"/>
+              </a:spcAft>
+            </a:pPr>
+            <a:r>
+              <a:rPr sz="1300" b="0">
+                <a:solidFill>
+                  <a:srgbClr val="1F2A3A"/>
+                </a:solidFill>
+                <a:latin typeface="맑은 고딕"/>
+                <a:ea typeface="맑은 고딕"/>
+                <a:cs typeface="맑은 고딕"/>
+              </a:rPr>
+              <a:t>sop-cool-11</a:t>
+            </a:r>
+          </a:p>
+        </p:txBody>
+      </p:sp>
+      <p:sp>
+        <p:nvSpPr>
+          <p:cNvPr id="27" name="Oval 26"/>
+          <p:cNvSpPr/>
+          <p:nvPr/>
+        </p:nvSpPr>
+        <p:spPr>
+          <a:xfrm>
+            <a:off x="9956704" y="3062338"/>
+            <a:ext cx="1153819" cy="1153819"/>
+          </a:xfrm>
+          <a:prstGeom prst="ellipse">
+            <a:avLst/>
+          </a:prstGeom>
+          <a:solidFill>
+            <a:srgbClr val="5CB8F2"/>
+          </a:solidFill>
+          <a:ln w="28575">
+            <a:solidFill>
+              <a:srgbClr val="13294B"/>
+            </a:solidFill>
+          </a:ln>
+        </p:spPr>
+        <p:txBody>
+          <a:bodyPr rtlCol="0" anchor="ctr"/>
+          <a:lstStyle/>
+          <a:p>
+            <a:pPr algn="ctr"/>
+          </a:p>
+        </p:txBody>
+      </p:sp>
+      <p:pic>
+        <p:nvPicPr>
+          <p:cNvPr id="28" name="아이콘:file-check" descr="file-check_13294B_1.6.png"/>
+          <p:cNvPicPr>
+            <a:picLocks noChangeAspect="1"/>
+          </p:cNvPicPr>
+          <p:nvPr/>
+        </p:nvPicPr>
+        <p:blipFill>
+          <a:blip r:embed="rId7"/>
+          <a:stretch>
+            <a:fillRect/>
+          </a:stretch>
+        </p:blipFill>
+        <p:spPr>
+          <a:xfrm>
+            <a:off x="10233620" y="3339255"/>
+            <a:ext cx="599985" cy="599985"/>
+          </a:xfrm>
+          <a:prstGeom prst="rect">
+            <a:avLst/>
+          </a:prstGeom>
+        </p:spPr>
+      </p:pic>
+      <p:sp>
+        <p:nvSpPr>
+          <p:cNvPr id="29" name="TextBox 28"/>
+          <p:cNvSpPr txBox="1"/>
+          <p:nvPr/>
+        </p:nvSpPr>
+        <p:spPr>
+          <a:xfrm>
+            <a:off x="9515612" y="4353318"/>
+            <a:ext cx="2036003" cy="932815"/>
+          </a:xfrm>
+          <a:prstGeom prst="rect">
+            <a:avLst/>
+          </a:prstGeom>
+          <a:noFill/>
+        </p:spPr>
+        <p:txBody>
+          <a:bodyPr wrap="square" anchor="t"/>
+          <a:lstStyle/>
+          <a:p>
+            <a:pPr algn="ctr" eaLnBrk="0">
+              <a:lnSpc>
+                <a:spcPct val="110000"/>
+              </a:lnSpc>
+              <a:spcAft>
+                <a:spcPts val="400"/>
+              </a:spcAft>
+            </a:pPr>
+            <a:r>
+              <a:rPr sz="1650" b="1">
+                <a:solidFill>
+                  <a:srgbClr val="13294B"/>
+                </a:solidFill>
+                <a:latin typeface="맑은 고딕"/>
+                <a:ea typeface="맑은 고딕"/>
+                <a:cs typeface="맑은 고딕"/>
+              </a:rPr>
+              <a:t>추천안</a:t>
+            </a:r>
+          </a:p>
+          <a:p>
+            <a:pPr algn="ctr" eaLnBrk="0">
+              <a:lnSpc>
+                <a:spcPct val="110000"/>
+              </a:lnSpc>
+              <a:spcAft>
+                <a:spcPts val="400"/>
+              </a:spcAft>
+            </a:pPr>
+            <a:r>
+              <a:rPr sz="1300" b="0">
+                <a:solidFill>
+                  <a:srgbClr val="1F2A3A"/>
+                </a:solidFill>
+                <a:latin typeface="맑은 고딕"/>
+                <a:ea typeface="맑은 고딕"/>
+                <a:cs typeface="맑은 고딕"/>
+              </a:rPr>
+              <a:t>DEC-1010-</a:t>
+            </a:r>
+          </a:p>
+          <a:p>
+            <a:pPr algn="ctr" eaLnBrk="0">
+              <a:lnSpc>
+                <a:spcPct val="110000"/>
+              </a:lnSpc>
+              <a:spcAft>
+                <a:spcPts val="400"/>
+              </a:spcAft>
+            </a:pPr>
+            <a:r>
+              <a:rPr sz="1300" b="0">
+                <a:solidFill>
+                  <a:srgbClr val="1F2A3A"/>
+                </a:solidFill>
+                <a:latin typeface="맑은 고딕"/>
+                <a:ea typeface="맑은 고딕"/>
+                <a:cs typeface="맑은 고딕"/>
+              </a:rPr>
+              <a:t>002-408b</a:t>
             </a:r>
           </a:p>
         </p:txBody>
@@ -16322,7 +16570,7 @@
                 <a:ea typeface="맑은 고딕"/>
                 <a:cs typeface="맑은 고딕"/>
               </a:rPr>
-              <a:t>• 도구 호출마다 읽는 지식과 값을 짚는다</a:t>
+              <a:t>• 에이전트가 도구마다 읽는 지식과 값을 설명한다</a:t>
             </a:r>
           </a:p>
           <a:p>
@@ -19320,7 +19568,7 @@
       </p:sp>
       <p:pic>
         <p:nvPicPr>
-          <p:cNvPr id="6" name="삽화:사건선_지식에서판단.svg" descr="illust_6715965031845562043_1792123197.png"/>
+          <p:cNvPr id="6" name="삽화:사건선_지식에서판단.svg" descr="illust_1931522847302436648_1792123197.png"/>
           <p:cNvPicPr>
             <a:picLocks noChangeAspect="1"/>
           </p:cNvPicPr>
@@ -19379,7 +19627,7 @@
                 <a:ea typeface="맑은 고딕"/>
                 <a:cs typeface="맑은 고딕"/>
               </a:rPr>
-              <a:t>여기까지 끝났다</a:t>
+              <a:t>완료 구간</a:t>
             </a:r>
           </a:p>
           <a:p>
@@ -19400,7 +19648,7 @@
                 <a:ea typeface="맑은 고딕"/>
                 <a:cs typeface="맑은 고딕"/>
               </a:rPr>
-              <a:t>지식을 읽어 추천안을 제출했다</a:t>
+              <a:t>경보 · 진단 · 제안</a:t>
             </a:r>
           </a:p>
         </p:txBody>
@@ -19442,7 +19690,7 @@
                 <a:ea typeface="맑은 고딕"/>
                 <a:cs typeface="맑은 고딕"/>
               </a:rPr>
-              <a:t>아직 실행되지 않았다</a:t>
+              <a:t>미실행 구간</a:t>
             </a:r>
           </a:p>
           <a:p>
@@ -19477,7 +19725,7 @@
         <p:spPr>
           <a:xfrm>
             <a:off x="4459423" y="5125943"/>
-            <a:ext cx="1963709" cy="577342"/>
+            <a:ext cx="1963709" cy="778764"/>
           </a:xfrm>
           <a:prstGeom prst="rect">
             <a:avLst/>
@@ -19518,7 +19766,7 @@
               </a:spcAft>
             </a:pPr>
             <a:r>
-              <a:rPr sz="1300" b="0">
+              <a:rPr sz="1200" b="0">
                 <a:solidFill>
                   <a:srgbClr val="556175"/>
                 </a:solidFill>
@@ -19526,7 +19774,7 @@
                 <a:ea typeface="맑은 고딕"/>
                 <a:cs typeface="맑은 고딕"/>
               </a:rPr>
-              <a:t>도구를 거쳐 읽었다</a:t>
+              <a:t>지식 그래프 · SOP · DB</a:t>
             </a:r>
           </a:p>
         </p:txBody>
@@ -23696,7 +23944,7 @@
       </p:sp>
       <p:pic>
         <p:nvPicPr>
-          <p:cNvPr id="6" name="삽화:시스템실행.svg" descr="illust_3713215857248399563_1792123197.png"/>
+          <p:cNvPr id="6" name="삽화:시스템실행.svg" descr="illust_4705349453000626677_1792123197.png"/>
           <p:cNvPicPr>
             <a:picLocks noChangeAspect="1"/>
           </p:cNvPicPr>
@@ -23839,7 +24087,7 @@
                 <a:ea typeface="맑은 고딕"/>
                 <a:cs typeface="맑은 고딕"/>
               </a:rPr>
-              <a:t>서비스 작업을 차례로 연다</a:t>
+              <a:t>Process Engine</a:t>
             </a:r>
           </a:p>
         </p:txBody>
@@ -24577,7 +24825,7 @@
                 <a:ea typeface="맑은 고딕"/>
                 <a:cs typeface="맑은 고딕"/>
               </a:rPr>
-              <a:t>E_end</a:t>
+              <a:t>끝 이벤트 E_end</a:t>
             </a:r>
           </a:p>
           <a:p>
@@ -24743,7 +24991,7 @@
                 <a:ea typeface="맑은 고딕"/>
                 <a:cs typeface="맑은 고딕"/>
               </a:rPr>
-              <a:t>E_rejected</a:t>
+              <a:t>끝 이벤트 E_rejected</a:t>
             </a:r>
           </a:p>
           <a:p>
@@ -28593,7 +28841,7 @@
       </p:sp>
       <p:pic>
         <p:nvPicPr>
-          <p:cNvPr id="6" name="삽화:장치자리.svg" descr="illust_476871230269397784_1792123197.png"/>
+          <p:cNvPr id="6" name="삽화:장치자리.svg" descr="illust_4577922302938049520_1792123197.png"/>
           <p:cNvPicPr>
             <a:picLocks noChangeAspect="1"/>
           </p:cNvPicPr>
@@ -28673,7 +28921,7 @@
                 <a:ea typeface="맑은 고딕"/>
                 <a:cs typeface="맑은 고딕"/>
               </a:rPr>
-              <a:t>c3_cooling: 작업 9, 분기 2, 타이머 1 · 경보 ALT-hyd01-0014-e0a1로 열려 E_end에서 닫힌 한 건</a:t>
+              <a:t>정의 c3_cooling(작업 9 · 분기 2 · 타이머 1) · 인스턴스 1건</a:t>
             </a:r>
           </a:p>
         </p:txBody>
@@ -29198,7 +29446,7 @@
                 <a:ea typeface="맑은 고딕"/>
                 <a:cs typeface="맑은 고딕"/>
               </a:rPr>
-              <a:t>agent:cooling이 도구를 10번 불렀다</a:t>
+              <a:t>agent:cooling · 도구 호출 10회</a:t>
             </a:r>
           </a:p>
           <a:p>
@@ -29219,7 +29467,7 @@
                 <a:ea typeface="맑은 고딕"/>
                 <a:cs typeface="맑은 고딕"/>
               </a:rPr>
-              <a:t>스킬 cooling-emergency-response</a:t>
+              <a:t>cooling-emergency-response</a:t>
             </a:r>
           </a:p>
           <a:p>
@@ -29240,7 +29488,7 @@
                 <a:ea typeface="맑은 고딕"/>
                 <a:cs typeface="맑은 고딕"/>
               </a:rPr>
-              <a:t>hyd-dmn · enterprise의 도구</a:t>
+              <a:t>MCP 서버 hyd-dmn · enterprise</a:t>
             </a:r>
           </a:p>
         </p:txBody>
@@ -29303,7 +29551,7 @@
                 <a:ea typeface="맑은 고딕"/>
                 <a:cs typeface="맑은 고딕"/>
               </a:rPr>
-              <a:t>실행에 앞서 정했다</a:t>
+              <a:t>SDD · BDD</a:t>
             </a:r>
           </a:p>
         </p:txBody>
@@ -35523,7 +35771,7 @@
       </p:sp>
       <p:pic>
         <p:nvPicPr>
-          <p:cNvPr id="6" name="삽화:세영역.svg" descr="illust_1980057035477056449_1792123197.png"/>
+          <p:cNvPr id="6" name="삽화:세영역.svg" descr="illust_7061449238723557181_1792123197.png"/>
           <p:cNvPicPr>
             <a:picLocks noChangeAspect="1"/>
           </p:cNvPicPr>
@@ -37683,19 +37931,21 @@
         </p:nvSpPr>
         <p:spPr>
           <a:xfrm>
-            <a:off x="548640" y="2515679"/>
-            <a:ext cx="2485567" cy="2951353"/>
+            <a:off x="548640" y="2448814"/>
+            <a:ext cx="2567863" cy="3085084"/>
           </a:xfrm>
           <a:prstGeom prst="roundRect">
             <a:avLst>
-              <a:gd name="adj" fmla="val 5000"/>
+              <a:gd name="adj" fmla="val 4000"/>
             </a:avLst>
           </a:prstGeom>
           <a:solidFill>
-            <a:srgbClr val="F3F6F9"/>
+            <a:srgbClr val="FFFFFF"/>
           </a:solidFill>
-          <a:ln>
-            <a:noFill/>
+          <a:ln w="15875">
+            <a:solidFill>
+              <a:srgbClr val="D3D9E1"/>
+            </a:solidFill>
           </a:ln>
         </p:spPr>
         <p:txBody>
@@ -37714,14 +37964,14 @@
         </p:nvSpPr>
         <p:spPr>
           <a:xfrm>
-            <a:off x="1425663" y="2698559"/>
+            <a:off x="777240" y="2649982"/>
             <a:ext cx="731520" cy="731520"/>
           </a:xfrm>
           <a:prstGeom prst="ellipse">
             <a:avLst/>
           </a:prstGeom>
           <a:solidFill>
-            <a:srgbClr val="FFFFFF"/>
+            <a:srgbClr val="E7F3FD"/>
           </a:solidFill>
           <a:ln>
             <a:noFill/>
@@ -37751,7 +38001,7 @@
         </p:blipFill>
         <p:spPr>
           <a:xfrm>
-            <a:off x="1579283" y="2852178"/>
+            <a:off x="930859" y="2803601"/>
             <a:ext cx="424281" cy="424281"/>
           </a:xfrm>
           <a:prstGeom prst="rect">
@@ -37767,8 +38017,8 @@
         </p:nvSpPr>
         <p:spPr>
           <a:xfrm>
-            <a:off x="621792" y="3503231"/>
-            <a:ext cx="2339263" cy="1890649"/>
+            <a:off x="713232" y="3472942"/>
+            <a:ext cx="2238679" cy="1558036"/>
           </a:xfrm>
           <a:prstGeom prst="rect">
             <a:avLst/>
@@ -37779,7 +38029,7 @@
           <a:bodyPr wrap="square" anchor="t"/>
           <a:lstStyle/>
           <a:p>
-            <a:pPr algn="ctr" eaLnBrk="0">
+            <a:pPr algn="l" eaLnBrk="0">
               <a:lnSpc>
                 <a:spcPct val="110000"/>
               </a:lnSpc>
@@ -37788,7 +38038,7 @@
               </a:spcAft>
             </a:pPr>
             <a:r>
-              <a:rPr sz="2000" b="1">
+              <a:rPr sz="1800" b="1">
                 <a:solidFill>
                   <a:srgbClr val="13294B"/>
                 </a:solidFill>
@@ -37796,11 +38046,11 @@
                 <a:ea typeface="맑은 고딕"/>
                 <a:cs typeface="맑은 고딕"/>
               </a:rPr>
-              <a:t>문서 읽기</a:t>
-            </a:r>
-          </a:p>
-          <a:p>
-            <a:pPr algn="ctr" eaLnBrk="0">
+              <a:t>입력</a:t>
+            </a:r>
+          </a:p>
+          <a:p>
+            <a:pPr algn="l" eaLnBrk="0" marL="160020" indent="-160020">
               <a:lnSpc>
                 <a:spcPct val="110000"/>
               </a:lnSpc>
@@ -37809,7 +38059,7 @@
               </a:spcAft>
             </a:pPr>
             <a:r>
-              <a:rPr sz="1650" b="0">
+              <a:rPr sz="1400" b="0">
                 <a:solidFill>
                   <a:srgbClr val="1F2A3A"/>
                 </a:solidFill>
@@ -37817,11 +38067,11 @@
                 <a:ea typeface="맑은 고딕"/>
                 <a:cs typeface="맑은 고딕"/>
               </a:rPr>
-              <a:t>답할 질문을 정하고</a:t>
-            </a:r>
-          </a:p>
-          <a:p>
-            <a:pPr algn="ctr" eaLnBrk="0">
+              <a:t>• 제공된 문서나 공개할 수 있는 내 자료</a:t>
+            </a:r>
+          </a:p>
+          <a:p>
+            <a:pPr algn="l" eaLnBrk="0" marL="160020" indent="-160020">
               <a:lnSpc>
                 <a:spcPct val="110000"/>
               </a:lnSpc>
@@ -37830,7 +38080,7 @@
               </a:spcAft>
             </a:pPr>
             <a:r>
-              <a:rPr sz="1650" b="0">
+              <a:rPr sz="1400" b="0">
                 <a:solidFill>
                   <a:srgbClr val="1F2A3A"/>
                 </a:solidFill>
@@ -37838,48 +38088,29 @@
                 <a:ea typeface="맑은 고딕"/>
                 <a:cs typeface="맑은 고딕"/>
               </a:rPr>
-              <a:t>핵심 개념, 속성,</a:t>
-            </a:r>
-          </a:p>
-          <a:p>
-            <a:pPr algn="ctr" eaLnBrk="0">
-              <a:lnSpc>
-                <a:spcPct val="110000"/>
-              </a:lnSpc>
-              <a:spcAft>
-                <a:spcPts val="400"/>
-              </a:spcAft>
-            </a:pPr>
-            <a:r>
-              <a:rPr sz="1650" b="0">
-                <a:solidFill>
-                  <a:srgbClr val="1F2A3A"/>
-                </a:solidFill>
-                <a:latin typeface="맑은 고딕"/>
-                <a:ea typeface="맑은 고딕"/>
-                <a:cs typeface="맑은 고딕"/>
-              </a:rPr>
-              <a:t>관계를 가려낸다</a:t>
-            </a:r>
-          </a:p>
-        </p:txBody>
-      </p:sp>
-      <p:sp>
-        <p:nvSpPr>
-          <p:cNvPr id="10" name="Right Arrow 9"/>
+              <a:t>• 문서마다 답할 질문</a:t>
+            </a:r>
+          </a:p>
+        </p:txBody>
+      </p:sp>
+      <p:sp>
+        <p:nvSpPr>
+          <p:cNvPr id="10" name="Rounded Rectangle 9"/>
           <p:cNvSpPr/>
           <p:nvPr/>
         </p:nvSpPr>
         <p:spPr>
           <a:xfrm>
-            <a:off x="3098215" y="3854196"/>
-            <a:ext cx="256031" cy="274320"/>
-          </a:xfrm>
-          <a:prstGeom prst="rightArrow">
-            <a:avLst/>
+            <a:off x="777240" y="5104130"/>
+            <a:ext cx="822960" cy="292608"/>
+          </a:xfrm>
+          <a:prstGeom prst="roundRect">
+            <a:avLst>
+              <a:gd name="adj" fmla="val 50000"/>
+            </a:avLst>
           </a:prstGeom>
           <a:solidFill>
-            <a:srgbClr val="13294B"/>
+            <a:srgbClr val="D3D9E1"/>
           </a:solidFill>
           <a:ln>
             <a:noFill/>
@@ -37895,22 +38126,92 @@
       </p:sp>
       <p:sp>
         <p:nvSpPr>
-          <p:cNvPr id="11" name="Rounded Rectangle 10"/>
+          <p:cNvPr id="11" name="TextBox 10"/>
+          <p:cNvSpPr txBox="1"/>
+          <p:nvPr/>
+        </p:nvSpPr>
+        <p:spPr>
+          <a:xfrm>
+            <a:off x="777240" y="5104130"/>
+            <a:ext cx="822960" cy="292608"/>
+          </a:xfrm>
+          <a:prstGeom prst="rect">
+            <a:avLst/>
+          </a:prstGeom>
+          <a:noFill/>
+        </p:spPr>
+        <p:txBody>
+          <a:bodyPr wrap="square" anchor="ctr"/>
+          <a:lstStyle/>
+          <a:p>
+            <a:pPr algn="ctr" eaLnBrk="0">
+              <a:lnSpc>
+                <a:spcPct val="110000"/>
+              </a:lnSpc>
+            </a:pPr>
+            <a:r>
+              <a:rPr sz="1200" b="1">
+                <a:solidFill>
+                  <a:srgbClr val="13294B"/>
+                </a:solidFill>
+                <a:latin typeface="맑은 고딕"/>
+                <a:ea typeface="맑은 고딕"/>
+                <a:cs typeface="맑은 고딕"/>
+              </a:rPr>
+              <a:t>입력</a:t>
+            </a:r>
+          </a:p>
+        </p:txBody>
+      </p:sp>
+      <p:sp>
+        <p:nvSpPr>
+          <p:cNvPr id="12" name="Rounded Rectangle 11"/>
           <p:cNvSpPr/>
           <p:nvPr/>
         </p:nvSpPr>
         <p:spPr>
           <a:xfrm>
-            <a:off x="3418255" y="2515679"/>
-            <a:ext cx="2485567" cy="2951353"/>
+            <a:off x="3390823" y="2448814"/>
+            <a:ext cx="2567863" cy="3085084"/>
           </a:xfrm>
           <a:prstGeom prst="roundRect">
             <a:avLst>
-              <a:gd name="adj" fmla="val 5000"/>
+              <a:gd name="adj" fmla="val 4000"/>
             </a:avLst>
           </a:prstGeom>
           <a:solidFill>
-            <a:srgbClr val="F3F6F9"/>
+            <a:srgbClr val="FFFFFF"/>
+          </a:solidFill>
+          <a:ln w="15875">
+            <a:solidFill>
+              <a:srgbClr val="D3D9E1"/>
+            </a:solidFill>
+          </a:ln>
+        </p:spPr>
+        <p:txBody>
+          <a:bodyPr rtlCol="0" anchor="ctr"/>
+          <a:lstStyle/>
+          <a:p>
+            <a:pPr algn="ctr"/>
+          </a:p>
+        </p:txBody>
+      </p:sp>
+      <p:sp>
+        <p:nvSpPr>
+          <p:cNvPr id="13" name="Oval 12"/>
+          <p:cNvSpPr/>
+          <p:nvPr/>
+        </p:nvSpPr>
+        <p:spPr>
+          <a:xfrm>
+            <a:off x="3619423" y="2649982"/>
+            <a:ext cx="731520" cy="731520"/>
+          </a:xfrm>
+          <a:prstGeom prst="ellipse">
+            <a:avLst/>
+          </a:prstGeom>
+          <a:solidFill>
+            <a:srgbClr val="E7F3FD"/>
           </a:solidFill>
           <a:ln>
             <a:noFill/>
@@ -37924,38 +38225,9 @@
           </a:p>
         </p:txBody>
       </p:sp>
-      <p:sp>
-        <p:nvSpPr>
-          <p:cNvPr id="12" name="Oval 11"/>
-          <p:cNvSpPr/>
-          <p:nvPr/>
-        </p:nvSpPr>
-        <p:spPr>
-          <a:xfrm>
-            <a:off x="4295279" y="2698559"/>
-            <a:ext cx="731520" cy="731520"/>
-          </a:xfrm>
-          <a:prstGeom prst="ellipse">
-            <a:avLst/>
-          </a:prstGeom>
-          <a:solidFill>
-            <a:srgbClr val="FFFFFF"/>
-          </a:solidFill>
-          <a:ln>
-            <a:noFill/>
-          </a:ln>
-        </p:spPr>
-        <p:txBody>
-          <a:bodyPr rtlCol="0" anchor="ctr"/>
-          <a:lstStyle/>
-          <a:p>
-            <a:pPr algn="ctr"/>
-          </a:p>
-        </p:txBody>
-      </p:sp>
       <p:pic>
         <p:nvPicPr>
-          <p:cNvPr id="13" name="아이콘:schema" descr="schema_13294B_1.6.png"/>
+          <p:cNvPr id="14" name="아이콘:schema" descr="schema_13294B_1.6.png"/>
           <p:cNvPicPr>
             <a:picLocks noChangeAspect="1"/>
           </p:cNvPicPr>
@@ -37969,7 +38241,7 @@
         </p:blipFill>
         <p:spPr>
           <a:xfrm>
-            <a:off x="4448898" y="2852178"/>
+            <a:off x="3773043" y="2803601"/>
             <a:ext cx="424281" cy="424281"/>
           </a:xfrm>
           <a:prstGeom prst="rect">
@@ -37979,14 +38251,14 @@
       </p:pic>
       <p:sp>
         <p:nvSpPr>
-          <p:cNvPr id="14" name="TextBox 13"/>
-          <p:cNvSpPr txBox="1"/>
-          <p:nvPr/>
-        </p:nvSpPr>
-        <p:spPr>
-          <a:xfrm>
-            <a:off x="3491407" y="3503231"/>
-            <a:ext cx="2339263" cy="1890649"/>
+          <p:cNvPr id="15" name="TextBox 14"/>
+          <p:cNvSpPr txBox="1"/>
+          <p:nvPr/>
+        </p:nvSpPr>
+        <p:spPr>
+          <a:xfrm>
+            <a:off x="3555415" y="3472942"/>
+            <a:ext cx="2238679" cy="1558036"/>
           </a:xfrm>
           <a:prstGeom prst="rect">
             <a:avLst/>
@@ -37997,7 +38269,7 @@
           <a:bodyPr wrap="square" anchor="t"/>
           <a:lstStyle/>
           <a:p>
-            <a:pPr algn="ctr" eaLnBrk="0">
+            <a:pPr algn="l" eaLnBrk="0">
               <a:lnSpc>
                 <a:spcPct val="110000"/>
               </a:lnSpc>
@@ -38006,7 +38278,7 @@
               </a:spcAft>
             </a:pPr>
             <a:r>
-              <a:rPr sz="2000" b="1">
+              <a:rPr sz="1800" b="1">
                 <a:solidFill>
                   <a:srgbClr val="13294B"/>
                 </a:solidFill>
@@ -38014,11 +38286,11 @@
                 <a:ea typeface="맑은 고딕"/>
                 <a:cs typeface="맑은 고딕"/>
               </a:rPr>
-              <a:t>스키마</a:t>
-            </a:r>
-          </a:p>
-          <a:p>
-            <a:pPr algn="ctr" eaLnBrk="0">
+              <a:t>범위</a:t>
+            </a:r>
+          </a:p>
+          <a:p>
+            <a:pPr algn="l" eaLnBrk="0" marL="148590" indent="-148590">
               <a:lnSpc>
                 <a:spcPct val="110000"/>
               </a:lnSpc>
@@ -38027,7 +38299,7 @@
               </a:spcAft>
             </a:pPr>
             <a:r>
-              <a:rPr sz="1650" b="0">
+              <a:rPr sz="1300" b="0">
                 <a:solidFill>
                   <a:srgbClr val="1F2A3A"/>
                 </a:solidFill>
@@ -38035,11 +38307,11 @@
                 <a:ea typeface="맑은 고딕"/>
                 <a:cs typeface="맑은 고딕"/>
               </a:rPr>
-              <a:t>클래스, 속성, 관계를</a:t>
-            </a:r>
-          </a:p>
-          <a:p>
-            <a:pPr algn="ctr" eaLnBrk="0">
+              <a:t>• 질문에 필요한 핵심 개념</a:t>
+            </a:r>
+          </a:p>
+          <a:p>
+            <a:pPr algn="l" eaLnBrk="0" marL="148590" indent="-148590">
               <a:lnSpc>
                 <a:spcPct val="110000"/>
               </a:lnSpc>
@@ -38048,7 +38320,7 @@
               </a:spcAft>
             </a:pPr>
             <a:r>
-              <a:rPr sz="1650" b="0">
+              <a:rPr sz="1300" b="0">
                 <a:solidFill>
                   <a:srgbClr val="1F2A3A"/>
                 </a:solidFill>
@@ -38056,27 +38328,29 @@
                 <a:ea typeface="맑은 고딕"/>
                 <a:cs typeface="맑은 고딕"/>
               </a:rPr>
-              <a:t>정의한다</a:t>
-            </a:r>
-          </a:p>
-        </p:txBody>
-      </p:sp>
-      <p:sp>
-        <p:nvSpPr>
-          <p:cNvPr id="15" name="Right Arrow 14"/>
+              <a:t>• 그 개념의 속성과 관계</a:t>
+            </a:r>
+          </a:p>
+        </p:txBody>
+      </p:sp>
+      <p:sp>
+        <p:nvSpPr>
+          <p:cNvPr id="16" name="Rounded Rectangle 15"/>
           <p:cNvSpPr/>
           <p:nvPr/>
         </p:nvSpPr>
         <p:spPr>
           <a:xfrm>
-            <a:off x="5967831" y="3854196"/>
-            <a:ext cx="256031" cy="274320"/>
-          </a:xfrm>
-          <a:prstGeom prst="rightArrow">
-            <a:avLst/>
+            <a:off x="3619423" y="5104130"/>
+            <a:ext cx="822960" cy="292608"/>
+          </a:xfrm>
+          <a:prstGeom prst="roundRect">
+            <a:avLst>
+              <a:gd name="adj" fmla="val 50000"/>
+            </a:avLst>
           </a:prstGeom>
           <a:solidFill>
-            <a:srgbClr val="13294B"/>
+            <a:srgbClr val="D3D9E1"/>
           </a:solidFill>
           <a:ln>
             <a:noFill/>
@@ -38092,22 +38366,92 @@
       </p:sp>
       <p:sp>
         <p:nvSpPr>
-          <p:cNvPr id="16" name="Rounded Rectangle 15"/>
+          <p:cNvPr id="17" name="TextBox 16"/>
+          <p:cNvSpPr txBox="1"/>
+          <p:nvPr/>
+        </p:nvSpPr>
+        <p:spPr>
+          <a:xfrm>
+            <a:off x="3619423" y="5104130"/>
+            <a:ext cx="822960" cy="292608"/>
+          </a:xfrm>
+          <a:prstGeom prst="rect">
+            <a:avLst/>
+          </a:prstGeom>
+          <a:noFill/>
+        </p:spPr>
+        <p:txBody>
+          <a:bodyPr wrap="square" anchor="ctr"/>
+          <a:lstStyle/>
+          <a:p>
+            <a:pPr algn="ctr" eaLnBrk="0">
+              <a:lnSpc>
+                <a:spcPct val="110000"/>
+              </a:lnSpc>
+            </a:pPr>
+            <a:r>
+              <a:rPr sz="1200" b="1">
+                <a:solidFill>
+                  <a:srgbClr val="13294B"/>
+                </a:solidFill>
+                <a:latin typeface="맑은 고딕"/>
+                <a:ea typeface="맑은 고딕"/>
+                <a:cs typeface="맑은 고딕"/>
+              </a:rPr>
+              <a:t>범위</a:t>
+            </a:r>
+          </a:p>
+        </p:txBody>
+      </p:sp>
+      <p:sp>
+        <p:nvSpPr>
+          <p:cNvPr id="18" name="Rounded Rectangle 17"/>
           <p:cNvSpPr/>
           <p:nvPr/>
         </p:nvSpPr>
         <p:spPr>
           <a:xfrm>
-            <a:off x="6287871" y="2515679"/>
-            <a:ext cx="2485567" cy="2951353"/>
+            <a:off x="6233007" y="2448814"/>
+            <a:ext cx="2567863" cy="3085084"/>
           </a:xfrm>
           <a:prstGeom prst="roundRect">
             <a:avLst>
-              <a:gd name="adj" fmla="val 5000"/>
+              <a:gd name="adj" fmla="val 4000"/>
             </a:avLst>
           </a:prstGeom>
           <a:solidFill>
-            <a:srgbClr val="F3F6F9"/>
+            <a:srgbClr val="FFFFFF"/>
+          </a:solidFill>
+          <a:ln w="15875">
+            <a:solidFill>
+              <a:srgbClr val="D3D9E1"/>
+            </a:solidFill>
+          </a:ln>
+        </p:spPr>
+        <p:txBody>
+          <a:bodyPr rtlCol="0" anchor="ctr"/>
+          <a:lstStyle/>
+          <a:p>
+            <a:pPr algn="ctr"/>
+          </a:p>
+        </p:txBody>
+      </p:sp>
+      <p:sp>
+        <p:nvSpPr>
+          <p:cNvPr id="19" name="Oval 18"/>
+          <p:cNvSpPr/>
+          <p:nvPr/>
+        </p:nvSpPr>
+        <p:spPr>
+          <a:xfrm>
+            <a:off x="6461607" y="2649982"/>
+            <a:ext cx="731520" cy="731520"/>
+          </a:xfrm>
+          <a:prstGeom prst="ellipse">
+            <a:avLst/>
+          </a:prstGeom>
+          <a:solidFill>
+            <a:srgbClr val="E7F3FD"/>
           </a:solidFill>
           <a:ln>
             <a:noFill/>
@@ -38121,38 +38465,9 @@
           </a:p>
         </p:txBody>
       </p:sp>
-      <p:sp>
-        <p:nvSpPr>
-          <p:cNvPr id="17" name="Oval 16"/>
-          <p:cNvSpPr/>
-          <p:nvPr/>
-        </p:nvSpPr>
-        <p:spPr>
-          <a:xfrm>
-            <a:off x="7164895" y="2698559"/>
-            <a:ext cx="731520" cy="731520"/>
-          </a:xfrm>
-          <a:prstGeom prst="ellipse">
-            <a:avLst/>
-          </a:prstGeom>
-          <a:solidFill>
-            <a:srgbClr val="FFFFFF"/>
-          </a:solidFill>
-          <a:ln>
-            <a:noFill/>
-          </a:ln>
-        </p:spPr>
-        <p:txBody>
-          <a:bodyPr rtlCol="0" anchor="ctr"/>
-          <a:lstStyle/>
-          <a:p>
-            <a:pPr algn="ctr"/>
-          </a:p>
-        </p:txBody>
-      </p:sp>
       <p:pic>
         <p:nvPicPr>
-          <p:cNvPr id="18" name="아이콘:database" descr="database_13294B_1.6.png"/>
+          <p:cNvPr id="20" name="아이콘:database" descr="database_13294B_1.6.png"/>
           <p:cNvPicPr>
             <a:picLocks noChangeAspect="1"/>
           </p:cNvPicPr>
@@ -38166,7 +38481,7 @@
         </p:blipFill>
         <p:spPr>
           <a:xfrm>
-            <a:off x="7318514" y="2852178"/>
+            <a:off x="6615226" y="2803601"/>
             <a:ext cx="424281" cy="424281"/>
           </a:xfrm>
           <a:prstGeom prst="rect">
@@ -38176,14 +38491,14 @@
       </p:pic>
       <p:sp>
         <p:nvSpPr>
-          <p:cNvPr id="19" name="TextBox 18"/>
-          <p:cNvSpPr txBox="1"/>
-          <p:nvPr/>
-        </p:nvSpPr>
-        <p:spPr>
-          <a:xfrm>
-            <a:off x="6361023" y="3503231"/>
-            <a:ext cx="2339263" cy="1890649"/>
+          <p:cNvPr id="21" name="TextBox 20"/>
+          <p:cNvSpPr txBox="1"/>
+          <p:nvPr/>
+        </p:nvSpPr>
+        <p:spPr>
+          <a:xfrm>
+            <a:off x="6397599" y="3472942"/>
+            <a:ext cx="2238679" cy="1558036"/>
           </a:xfrm>
           <a:prstGeom prst="rect">
             <a:avLst/>
@@ -38194,7 +38509,7 @@
           <a:bodyPr wrap="square" anchor="t"/>
           <a:lstStyle/>
           <a:p>
-            <a:pPr algn="ctr" eaLnBrk="0">
+            <a:pPr algn="l" eaLnBrk="0">
               <a:lnSpc>
                 <a:spcPct val="110000"/>
               </a:lnSpc>
@@ -38203,7 +38518,7 @@
               </a:spcAft>
             </a:pPr>
             <a:r>
-              <a:rPr sz="2000" b="1">
+              <a:rPr sz="1800" b="1">
                 <a:solidFill>
                   <a:srgbClr val="13294B"/>
                 </a:solidFill>
@@ -38211,11 +38526,11 @@
                 <a:ea typeface="맑은 고딕"/>
                 <a:cs typeface="맑은 고딕"/>
               </a:rPr>
-              <a:t>샘플 인스턴스</a:t>
-            </a:r>
-          </a:p>
-          <a:p>
-            <a:pPr algn="ctr" eaLnBrk="0">
+              <a:t>산출물</a:t>
+            </a:r>
+          </a:p>
+          <a:p>
+            <a:pPr algn="l" eaLnBrk="0" marL="160020" indent="-160020">
               <a:lnSpc>
                 <a:spcPct val="110000"/>
               </a:lnSpc>
@@ -38224,7 +38539,7 @@
               </a:spcAft>
             </a:pPr>
             <a:r>
-              <a:rPr sz="1650" b="0">
+              <a:rPr sz="1400" b="0">
                 <a:solidFill>
                   <a:srgbClr val="1F2A3A"/>
                 </a:solidFill>
@@ -38232,11 +38547,11 @@
                 <a:ea typeface="맑은 고딕"/>
                 <a:cs typeface="맑은 고딕"/>
               </a:rPr>
-              <a:t>식별자와 출처를</a:t>
-            </a:r>
-          </a:p>
-          <a:p>
-            <a:pPr algn="ctr" eaLnBrk="0">
+              <a:t>• 스키마</a:t>
+            </a:r>
+          </a:p>
+          <a:p>
+            <a:pPr algn="l" eaLnBrk="0" marL="160020" indent="-160020">
               <a:lnSpc>
                 <a:spcPct val="110000"/>
               </a:lnSpc>
@@ -38245,7 +38560,7 @@
               </a:spcAft>
             </a:pPr>
             <a:r>
-              <a:rPr sz="1650" b="0">
+              <a:rPr sz="1400" b="0">
                 <a:solidFill>
                   <a:srgbClr val="1F2A3A"/>
                 </a:solidFill>
@@ -38253,27 +38568,50 @@
                 <a:ea typeface="맑은 고딕"/>
                 <a:cs typeface="맑은 고딕"/>
               </a:rPr>
-              <a:t>붙여 적는다</a:t>
-            </a:r>
-          </a:p>
-        </p:txBody>
-      </p:sp>
-      <p:sp>
-        <p:nvSpPr>
-          <p:cNvPr id="20" name="Right Arrow 19"/>
+              <a:t>• 식별자와 출처를 붙인 샘플 인스턴스</a:t>
+            </a:r>
+          </a:p>
+          <a:p>
+            <a:pPr algn="l" eaLnBrk="0" marL="160020" indent="-160020">
+              <a:lnSpc>
+                <a:spcPct val="110000"/>
+              </a:lnSpc>
+              <a:spcAft>
+                <a:spcPts val="400"/>
+              </a:spcAft>
+            </a:pPr>
+            <a:r>
+              <a:rPr sz="1400" b="0">
+                <a:solidFill>
+                  <a:srgbClr val="1F2A3A"/>
+                </a:solidFill>
+                <a:latin typeface="맑은 고딕"/>
+                <a:ea typeface="맑은 고딕"/>
+                <a:cs typeface="맑은 고딕"/>
+              </a:rPr>
+              <a:t>• 질문의 조회문</a:t>
+            </a:r>
+          </a:p>
+        </p:txBody>
+      </p:sp>
+      <p:sp>
+        <p:nvSpPr>
+          <p:cNvPr id="22" name="Rounded Rectangle 21"/>
           <p:cNvSpPr/>
           <p:nvPr/>
         </p:nvSpPr>
         <p:spPr>
           <a:xfrm>
-            <a:off x="8837447" y="3854196"/>
-            <a:ext cx="256031" cy="274320"/>
-          </a:xfrm>
-          <a:prstGeom prst="rightArrow">
-            <a:avLst/>
+            <a:off x="6461607" y="5104130"/>
+            <a:ext cx="822960" cy="292608"/>
+          </a:xfrm>
+          <a:prstGeom prst="roundRect">
+            <a:avLst>
+              <a:gd name="adj" fmla="val 50000"/>
+            </a:avLst>
           </a:prstGeom>
           <a:solidFill>
-            <a:srgbClr val="13294B"/>
+            <a:srgbClr val="D3D9E1"/>
           </a:solidFill>
           <a:ln>
             <a:noFill/>
@@ -38289,24 +38627,63 @@
       </p:sp>
       <p:sp>
         <p:nvSpPr>
-          <p:cNvPr id="21" name="Rounded Rectangle 20"/>
+          <p:cNvPr id="23" name="TextBox 22"/>
+          <p:cNvSpPr txBox="1"/>
+          <p:nvPr/>
+        </p:nvSpPr>
+        <p:spPr>
+          <a:xfrm>
+            <a:off x="6461607" y="5104130"/>
+            <a:ext cx="822960" cy="292608"/>
+          </a:xfrm>
+          <a:prstGeom prst="rect">
+            <a:avLst/>
+          </a:prstGeom>
+          <a:noFill/>
+        </p:spPr>
+        <p:txBody>
+          <a:bodyPr wrap="square" anchor="ctr"/>
+          <a:lstStyle/>
+          <a:p>
+            <a:pPr algn="ctr" eaLnBrk="0">
+              <a:lnSpc>
+                <a:spcPct val="110000"/>
+              </a:lnSpc>
+            </a:pPr>
+            <a:r>
+              <a:rPr sz="1200" b="1">
+                <a:solidFill>
+                  <a:srgbClr val="13294B"/>
+                </a:solidFill>
+                <a:latin typeface="맑은 고딕"/>
+                <a:ea typeface="맑은 고딕"/>
+                <a:cs typeface="맑은 고딕"/>
+              </a:rPr>
+              <a:t>산출물</a:t>
+            </a:r>
+          </a:p>
+        </p:txBody>
+      </p:sp>
+      <p:sp>
+        <p:nvSpPr>
+          <p:cNvPr id="24" name="Rounded Rectangle 23"/>
           <p:cNvSpPr/>
           <p:nvPr/>
         </p:nvSpPr>
         <p:spPr>
           <a:xfrm>
-            <a:off x="9157487" y="2515679"/>
-            <a:ext cx="2485567" cy="2951353"/>
+            <a:off x="9075191" y="2448814"/>
+            <a:ext cx="2567863" cy="3085084"/>
           </a:xfrm>
           <a:prstGeom prst="roundRect">
             <a:avLst>
-              <a:gd name="adj" fmla="val 5000"/>
+              <a:gd name="adj" fmla="val 4000"/>
             </a:avLst>
           </a:prstGeom>
           <a:solidFill>
-            <a:srgbClr val="E7F3FD"/>
+            <a:srgbClr val="FFFFFF"/>
           </a:solidFill>
-          <a:ln w="25400">
+          <a:ln w="28575">
             <a:solidFill>
               <a:srgbClr val="5CB8F2"/>
             </a:solidFill>
@@ -38322,13 +38699,13 @@
       </p:sp>
       <p:sp>
         <p:nvSpPr>
-          <p:cNvPr id="22" name="Oval 21"/>
+          <p:cNvPr id="25" name="Oval 24"/>
           <p:cNvSpPr/>
           <p:nvPr/>
         </p:nvSpPr>
         <p:spPr>
           <a:xfrm>
-            <a:off x="10034511" y="2698559"/>
+            <a:off x="9303791" y="2649982"/>
             <a:ext cx="731520" cy="731520"/>
           </a:xfrm>
           <a:prstGeom prst="ellipse">
@@ -38351,7 +38728,7 @@
       </p:sp>
       <p:pic>
         <p:nvPicPr>
-          <p:cNvPr id="23" name="아이콘:zoom-check" descr="zoom-check_13294B_1.6.png"/>
+          <p:cNvPr id="26" name="아이콘:zoom-check" descr="zoom-check_13294B_1.6.png"/>
           <p:cNvPicPr>
             <a:picLocks noChangeAspect="1"/>
           </p:cNvPicPr>
@@ -38365,7 +38742,7 @@
         </p:blipFill>
         <p:spPr>
           <a:xfrm>
-            <a:off x="10188130" y="2852178"/>
+            <a:off x="9457410" y="2803601"/>
             <a:ext cx="424281" cy="424281"/>
           </a:xfrm>
           <a:prstGeom prst="rect">
@@ -38375,14 +38752,14 @@
       </p:pic>
       <p:sp>
         <p:nvSpPr>
-          <p:cNvPr id="24" name="TextBox 23"/>
-          <p:cNvSpPr txBox="1"/>
-          <p:nvPr/>
-        </p:nvSpPr>
-        <p:spPr>
-          <a:xfrm>
-            <a:off x="9230639" y="3503231"/>
-            <a:ext cx="2339263" cy="1890649"/>
+          <p:cNvPr id="27" name="TextBox 26"/>
+          <p:cNvSpPr txBox="1"/>
+          <p:nvPr/>
+        </p:nvSpPr>
+        <p:spPr>
+          <a:xfrm>
+            <a:off x="9239783" y="3472942"/>
+            <a:ext cx="2238679" cy="1558036"/>
           </a:xfrm>
           <a:prstGeom prst="rect">
             <a:avLst/>
@@ -38393,7 +38770,7 @@
           <a:bodyPr wrap="square" anchor="t"/>
           <a:lstStyle/>
           <a:p>
-            <a:pPr algn="ctr" eaLnBrk="0">
+            <a:pPr algn="l" eaLnBrk="0">
               <a:lnSpc>
                 <a:spcPct val="110000"/>
               </a:lnSpc>
@@ -38402,7 +38779,7 @@
               </a:spcAft>
             </a:pPr>
             <a:r>
-              <a:rPr sz="2000" b="1">
+              <a:rPr sz="1800" b="1">
                 <a:solidFill>
                   <a:srgbClr val="13294B"/>
                 </a:solidFill>
@@ -38410,11 +38787,11 @@
                 <a:ea typeface="맑은 고딕"/>
                 <a:cs typeface="맑은 고딕"/>
               </a:rPr>
-              <a:t>확인</a:t>
-            </a:r>
-          </a:p>
-          <a:p>
-            <a:pPr algn="ctr" eaLnBrk="0">
+              <a:t>성공 기준</a:t>
+            </a:r>
+          </a:p>
+          <a:p>
+            <a:pPr algn="l" eaLnBrk="0" marL="160020" indent="-160020">
               <a:lnSpc>
                 <a:spcPct val="110000"/>
               </a:lnSpc>
@@ -38423,7 +38800,7 @@
               </a:spcAft>
             </a:pPr>
             <a:r>
-              <a:rPr sz="1650" b="0">
+              <a:rPr sz="1400" b="0">
                 <a:solidFill>
                   <a:srgbClr val="1F2A3A"/>
                 </a:solidFill>
@@ -38431,11 +38808,11 @@
                 <a:ea typeface="맑은 고딕"/>
                 <a:cs typeface="맑은 고딕"/>
               </a:rPr>
-              <a:t>따로 둔 이름 공간에서</a:t>
-            </a:r>
-          </a:p>
-          <a:p>
-            <a:pPr algn="ctr" eaLnBrk="0">
+              <a:t>• 따로 둔 이름 공간에 넣는다</a:t>
+            </a:r>
+          </a:p>
+          <a:p>
+            <a:pPr algn="l" eaLnBrk="0" marL="160020" indent="-160020">
               <a:lnSpc>
                 <a:spcPct val="110000"/>
               </a:lnSpc>
@@ -38444,7 +38821,7 @@
               </a:spcAft>
             </a:pPr>
             <a:r>
-              <a:rPr sz="1650" b="0">
+              <a:rPr sz="1400" b="0">
                 <a:solidFill>
                   <a:srgbClr val="1F2A3A"/>
                 </a:solidFill>
@@ -38452,28 +38829,77 @@
                 <a:ea typeface="맑은 고딕"/>
                 <a:cs typeface="맑은 고딕"/>
               </a:rPr>
-              <a:t>질문이 조회로</a:t>
-            </a:r>
-          </a:p>
+              <a:t>• 정한 질문이 조회로 풀린다</a:t>
+            </a:r>
+          </a:p>
+        </p:txBody>
+      </p:sp>
+      <p:sp>
+        <p:nvSpPr>
+          <p:cNvPr id="28" name="Rounded Rectangle 27"/>
+          <p:cNvSpPr/>
+          <p:nvPr/>
+        </p:nvSpPr>
+        <p:spPr>
+          <a:xfrm>
+            <a:off x="9303791" y="5104130"/>
+            <a:ext cx="1021080" cy="292608"/>
+          </a:xfrm>
+          <a:prstGeom prst="roundRect">
+            <a:avLst>
+              <a:gd name="adj" fmla="val 50000"/>
+            </a:avLst>
+          </a:prstGeom>
+          <a:solidFill>
+            <a:srgbClr val="5CB8F2"/>
+          </a:solidFill>
+          <a:ln>
+            <a:noFill/>
+          </a:ln>
+        </p:spPr>
+        <p:txBody>
+          <a:bodyPr rtlCol="0" anchor="ctr"/>
+          <a:lstStyle/>
+          <a:p>
+            <a:pPr algn="ctr"/>
+          </a:p>
+        </p:txBody>
+      </p:sp>
+      <p:sp>
+        <p:nvSpPr>
+          <p:cNvPr id="29" name="TextBox 28"/>
+          <p:cNvSpPr txBox="1"/>
+          <p:nvPr/>
+        </p:nvSpPr>
+        <p:spPr>
+          <a:xfrm>
+            <a:off x="9303791" y="5104130"/>
+            <a:ext cx="1021080" cy="292608"/>
+          </a:xfrm>
+          <a:prstGeom prst="rect">
+            <a:avLst/>
+          </a:prstGeom>
+          <a:noFill/>
+        </p:spPr>
+        <p:txBody>
+          <a:bodyPr wrap="square" anchor="ctr"/>
+          <a:lstStyle/>
           <a:p>
             <a:pPr algn="ctr" eaLnBrk="0">
               <a:lnSpc>
                 <a:spcPct val="110000"/>
               </a:lnSpc>
-              <a:spcAft>
-                <a:spcPts val="400"/>
-              </a:spcAft>
-            </a:pPr>
-            <a:r>
-              <a:rPr sz="1650" b="0">
-                <a:solidFill>
-                  <a:srgbClr val="1F2A3A"/>
-                </a:solidFill>
-                <a:latin typeface="맑은 고딕"/>
-                <a:ea typeface="맑은 고딕"/>
-                <a:cs typeface="맑은 고딕"/>
-              </a:rPr>
-              <a:t>풀리는지 본다</a:t>
+            </a:pPr>
+            <a:r>
+              <a:rPr sz="1200" b="1">
+                <a:solidFill>
+                  <a:srgbClr val="13294B"/>
+                </a:solidFill>
+                <a:latin typeface="맑은 고딕"/>
+                <a:ea typeface="맑은 고딕"/>
+                <a:cs typeface="맑은 고딕"/>
+              </a:rPr>
+              <a:t>성공 기준</a:t>
             </a:r>
           </a:p>
         </p:txBody>
@@ -38861,8 +39287,8 @@
         </p:nvSpPr>
         <p:spPr>
           <a:xfrm>
-            <a:off x="548640" y="2293873"/>
-            <a:ext cx="3515258" cy="3394964"/>
+            <a:off x="548640" y="2557272"/>
+            <a:ext cx="2567863" cy="2868168"/>
           </a:xfrm>
           <a:prstGeom prst="roundRect">
             <a:avLst>
@@ -38894,7 +39320,7 @@
         </p:nvSpPr>
         <p:spPr>
           <a:xfrm>
-            <a:off x="777240" y="2495042"/>
+            <a:off x="777240" y="2758440"/>
             <a:ext cx="731520" cy="731520"/>
           </a:xfrm>
           <a:prstGeom prst="ellipse">
@@ -38917,7 +39343,7 @@
       </p:sp>
       <p:pic>
         <p:nvPicPr>
-          <p:cNvPr id="8" name="아이콘:robot" descr="robot_13294B_1.6.png"/>
+          <p:cNvPr id="8" name="아이콘:database" descr="database_13294B_1.6.png"/>
           <p:cNvPicPr>
             <a:picLocks noChangeAspect="1"/>
           </p:cNvPicPr>
@@ -38931,7 +39357,7 @@
         </p:blipFill>
         <p:spPr>
           <a:xfrm>
-            <a:off x="930859" y="2648661"/>
+            <a:off x="930859" y="2912059"/>
             <a:ext cx="424281" cy="424281"/>
           </a:xfrm>
           <a:prstGeom prst="rect">
@@ -38947,8 +39373,8 @@
         </p:nvSpPr>
         <p:spPr>
           <a:xfrm>
-            <a:off x="713232" y="3318001"/>
-            <a:ext cx="3186074" cy="1867916"/>
+            <a:off x="713232" y="3581400"/>
+            <a:ext cx="2238679" cy="1341120"/>
           </a:xfrm>
           <a:prstGeom prst="rect">
             <a:avLst/>
@@ -38968,7 +39394,7 @@
               </a:spcAft>
             </a:pPr>
             <a:r>
-              <a:rPr sz="2200" b="1">
+              <a:rPr sz="1800" b="1">
                 <a:solidFill>
                   <a:srgbClr val="13294B"/>
                 </a:solidFill>
@@ -38976,11 +39402,11 @@
                 <a:ea typeface="맑은 고딕"/>
                 <a:cs typeface="맑은 고딕"/>
               </a:rPr>
-              <a:t>에이전트의 정의</a:t>
-            </a:r>
-          </a:p>
-          <a:p>
-            <a:pPr algn="l" eaLnBrk="0" marL="205740" indent="-205740">
+              <a:t>입력</a:t>
+            </a:r>
+          </a:p>
+          <a:p>
+            <a:pPr algn="l" eaLnBrk="0" marL="148590" indent="-148590">
               <a:lnSpc>
                 <a:spcPct val="110000"/>
               </a:lnSpc>
@@ -38989,7 +39415,7 @@
               </a:spcAft>
             </a:pPr>
             <a:r>
-              <a:rPr sz="1800" b="0">
+              <a:rPr sz="1300" b="0">
                 <a:solidFill>
                   <a:srgbClr val="1F2A3A"/>
                 </a:solidFill>
@@ -38997,11 +39423,11 @@
                 <a:ea typeface="맑은 고딕"/>
                 <a:cs typeface="맑은 고딕"/>
               </a:rPr>
-              <a:t>• 목표와 스킬을 적고</a:t>
-            </a:r>
-          </a:p>
-          <a:p>
-            <a:pPr algn="l" eaLnBrk="0" marL="205740" indent="-205740">
+              <a:t>• 앞서 만든 스키마와 자료</a:t>
+            </a:r>
+          </a:p>
+          <a:p>
+            <a:pPr algn="l" eaLnBrk="0" marL="148590" indent="-148590">
               <a:lnSpc>
                 <a:spcPct val="110000"/>
               </a:lnSpc>
@@ -39010,7 +39436,7 @@
               </a:spcAft>
             </a:pPr>
             <a:r>
-              <a:rPr sz="1800" b="0">
+              <a:rPr sz="1300" b="0">
                 <a:solidFill>
                   <a:srgbClr val="1F2A3A"/>
                 </a:solidFill>
@@ -39018,28 +39444,7 @@
                 <a:ea typeface="맑은 고딕"/>
                 <a:cs typeface="맑은 고딕"/>
               </a:rPr>
-              <a:t>• 앞서 만든 스키마와 자료를</a:t>
-            </a:r>
-          </a:p>
-          <a:p>
-            <a:pPr algn="l" eaLnBrk="0" marL="205740" indent="-205740">
-              <a:lnSpc>
-                <a:spcPct val="110000"/>
-              </a:lnSpc>
-              <a:spcAft>
-                <a:spcPts val="400"/>
-              </a:spcAft>
-            </a:pPr>
-            <a:r>
-              <a:rPr sz="1800" b="0">
-                <a:solidFill>
-                  <a:srgbClr val="1F2A3A"/>
-                </a:solidFill>
-                <a:latin typeface="맑은 고딕"/>
-                <a:ea typeface="맑은 고딕"/>
-                <a:cs typeface="맑은 고딕"/>
-              </a:rPr>
-              <a:t>• 읽게 한다</a:t>
+              <a:t>• 쓸 수 있는 읽기 MCP</a:t>
             </a:r>
           </a:p>
         </p:txBody>
@@ -39052,7 +39457,7 @@
         </p:nvSpPr>
         <p:spPr>
           <a:xfrm>
-            <a:off x="777240" y="5259070"/>
+            <a:off x="777240" y="4995672"/>
             <a:ext cx="822960" cy="292608"/>
           </a:xfrm>
           <a:prstGeom prst="roundRect">
@@ -39083,7 +39488,7 @@
         </p:nvSpPr>
         <p:spPr>
           <a:xfrm>
-            <a:off x="777240" y="5259070"/>
+            <a:off x="777240" y="4995672"/>
             <a:ext cx="822960" cy="292608"/>
           </a:xfrm>
           <a:prstGeom prst="rect">
@@ -39109,7 +39514,7 @@
                 <a:ea typeface="맑은 고딕"/>
                 <a:cs typeface="맑은 고딕"/>
               </a:rPr>
-              <a:t>정의</a:t>
+              <a:t>입력</a:t>
             </a:r>
           </a:p>
         </p:txBody>
@@ -39122,8 +39527,8 @@
         </p:nvSpPr>
         <p:spPr>
           <a:xfrm>
-            <a:off x="4338218" y="2293873"/>
-            <a:ext cx="3515258" cy="3394964"/>
+            <a:off x="3390823" y="2557272"/>
+            <a:ext cx="2567863" cy="2868168"/>
           </a:xfrm>
           <a:prstGeom prst="roundRect">
             <a:avLst>
@@ -39155,7 +39560,7 @@
         </p:nvSpPr>
         <p:spPr>
           <a:xfrm>
-            <a:off x="4566818" y="2495042"/>
+            <a:off x="3619423" y="2758440"/>
             <a:ext cx="731520" cy="731520"/>
           </a:xfrm>
           <a:prstGeom prst="ellipse">
@@ -39192,7 +39597,7 @@
         </p:blipFill>
         <p:spPr>
           <a:xfrm>
-            <a:off x="4720437" y="2648661"/>
+            <a:off x="3773043" y="2912059"/>
             <a:ext cx="424281" cy="424281"/>
           </a:xfrm>
           <a:prstGeom prst="rect">
@@ -39208,8 +39613,8 @@
         </p:nvSpPr>
         <p:spPr>
           <a:xfrm>
-            <a:off x="4502810" y="3318001"/>
-            <a:ext cx="3186074" cy="1867916"/>
+            <a:off x="3555415" y="3581400"/>
+            <a:ext cx="2238679" cy="1341120"/>
           </a:xfrm>
           <a:prstGeom prst="rect">
             <a:avLst/>
@@ -39229,7 +39634,7 @@
               </a:spcAft>
             </a:pPr>
             <a:r>
-              <a:rPr sz="2200" b="1">
+              <a:rPr sz="1800" b="1">
                 <a:solidFill>
                   <a:srgbClr val="13294B"/>
                 </a:solidFill>
@@ -39237,11 +39642,11 @@
                 <a:ea typeface="맑은 고딕"/>
                 <a:cs typeface="맑은 고딕"/>
               </a:rPr>
-              <a:t>읽기 도구의 연결</a:t>
-            </a:r>
-          </a:p>
-          <a:p>
-            <a:pPr algn="l" eaLnBrk="0" marL="205740" indent="-205740">
+              <a:t>범위</a:t>
+            </a:r>
+          </a:p>
+          <a:p>
+            <a:pPr algn="l" eaLnBrk="0" marL="160020" indent="-160020">
               <a:lnSpc>
                 <a:spcPct val="110000"/>
               </a:lnSpc>
@@ -39250,7 +39655,7 @@
               </a:spcAft>
             </a:pPr>
             <a:r>
-              <a:rPr sz="1800" b="0">
+              <a:rPr sz="1400" b="0">
                 <a:solidFill>
                   <a:srgbClr val="1F2A3A"/>
                 </a:solidFill>
@@ -39258,11 +39663,11 @@
                 <a:ea typeface="맑은 고딕"/>
                 <a:cs typeface="맑은 고딕"/>
               </a:rPr>
-              <a:t>• 쓸 수 있는 읽기 MCP를</a:t>
-            </a:r>
-          </a:p>
-          <a:p>
-            <a:pPr algn="l" eaLnBrk="0" marL="205740" indent="-205740">
+              <a:t>• 목표와 스킬 작성</a:t>
+            </a:r>
+          </a:p>
+          <a:p>
+            <a:pPr algn="l" eaLnBrk="0" marL="160020" indent="-160020">
               <a:lnSpc>
                 <a:spcPct val="110000"/>
               </a:lnSpc>
@@ -39271,7 +39676,7 @@
               </a:spcAft>
             </a:pPr>
             <a:r>
-              <a:rPr sz="1800" b="0">
+              <a:rPr sz="1400" b="0">
                 <a:solidFill>
                   <a:srgbClr val="1F2A3A"/>
                 </a:solidFill>
@@ -39279,7 +39684,7 @@
                 <a:ea typeface="맑은 고딕"/>
                 <a:cs typeface="맑은 고딕"/>
               </a:rPr>
-              <a:t>• 연결한다</a:t>
+              <a:t>• 읽기 MCP 연결</a:t>
             </a:r>
           </a:p>
         </p:txBody>
@@ -39292,7 +39697,7 @@
         </p:nvSpPr>
         <p:spPr>
           <a:xfrm>
-            <a:off x="4566818" y="5259070"/>
+            <a:off x="3619423" y="4995672"/>
             <a:ext cx="822960" cy="292608"/>
           </a:xfrm>
           <a:prstGeom prst="roundRect">
@@ -39323,7 +39728,7 @@
         </p:nvSpPr>
         <p:spPr>
           <a:xfrm>
-            <a:off x="4566818" y="5259070"/>
+            <a:off x="3619423" y="4995672"/>
             <a:ext cx="822960" cy="292608"/>
           </a:xfrm>
           <a:prstGeom prst="rect">
@@ -39349,7 +39754,7 @@
                 <a:ea typeface="맑은 고딕"/>
                 <a:cs typeface="맑은 고딕"/>
               </a:rPr>
-              <a:t>도구</a:t>
+              <a:t>범위</a:t>
             </a:r>
           </a:p>
         </p:txBody>
@@ -39362,8 +39767,248 @@
         </p:nvSpPr>
         <p:spPr>
           <a:xfrm>
-            <a:off x="8127796" y="2293873"/>
-            <a:ext cx="3515258" cy="3394964"/>
+            <a:off x="6233007" y="2557272"/>
+            <a:ext cx="2567863" cy="2868168"/>
+          </a:xfrm>
+          <a:prstGeom prst="roundRect">
+            <a:avLst>
+              <a:gd name="adj" fmla="val 4000"/>
+            </a:avLst>
+          </a:prstGeom>
+          <a:solidFill>
+            <a:srgbClr val="FFFFFF"/>
+          </a:solidFill>
+          <a:ln w="15875">
+            <a:solidFill>
+              <a:srgbClr val="D3D9E1"/>
+            </a:solidFill>
+          </a:ln>
+        </p:spPr>
+        <p:txBody>
+          <a:bodyPr rtlCol="0" anchor="ctr"/>
+          <a:lstStyle/>
+          <a:p>
+            <a:pPr algn="ctr"/>
+          </a:p>
+        </p:txBody>
+      </p:sp>
+      <p:sp>
+        <p:nvSpPr>
+          <p:cNvPr id="19" name="Oval 18"/>
+          <p:cNvSpPr/>
+          <p:nvPr/>
+        </p:nvSpPr>
+        <p:spPr>
+          <a:xfrm>
+            <a:off x="6461607" y="2758440"/>
+            <a:ext cx="731520" cy="731520"/>
+          </a:xfrm>
+          <a:prstGeom prst="ellipse">
+            <a:avLst/>
+          </a:prstGeom>
+          <a:solidFill>
+            <a:srgbClr val="E7F3FD"/>
+          </a:solidFill>
+          <a:ln>
+            <a:noFill/>
+          </a:ln>
+        </p:spPr>
+        <p:txBody>
+          <a:bodyPr rtlCol="0" anchor="ctr"/>
+          <a:lstStyle/>
+          <a:p>
+            <a:pPr algn="ctr"/>
+          </a:p>
+        </p:txBody>
+      </p:sp>
+      <p:pic>
+        <p:nvPicPr>
+          <p:cNvPr id="20" name="아이콘:file-check" descr="file-check_13294B_1.6.png"/>
+          <p:cNvPicPr>
+            <a:picLocks noChangeAspect="1"/>
+          </p:cNvPicPr>
+          <p:nvPr/>
+        </p:nvPicPr>
+        <p:blipFill>
+          <a:blip r:embed="rId5"/>
+          <a:stretch>
+            <a:fillRect/>
+          </a:stretch>
+        </p:blipFill>
+        <p:spPr>
+          <a:xfrm>
+            <a:off x="6615226" y="2912059"/>
+            <a:ext cx="424281" cy="424281"/>
+          </a:xfrm>
+          <a:prstGeom prst="rect">
+            <a:avLst/>
+          </a:prstGeom>
+        </p:spPr>
+      </p:pic>
+      <p:sp>
+        <p:nvSpPr>
+          <p:cNvPr id="21" name="TextBox 20"/>
+          <p:cNvSpPr txBox="1"/>
+          <p:nvPr/>
+        </p:nvSpPr>
+        <p:spPr>
+          <a:xfrm>
+            <a:off x="6397599" y="3581400"/>
+            <a:ext cx="2238679" cy="1341120"/>
+          </a:xfrm>
+          <a:prstGeom prst="rect">
+            <a:avLst/>
+          </a:prstGeom>
+          <a:noFill/>
+        </p:spPr>
+        <p:txBody>
+          <a:bodyPr wrap="square" anchor="t"/>
+          <a:lstStyle/>
+          <a:p>
+            <a:pPr algn="l" eaLnBrk="0">
+              <a:lnSpc>
+                <a:spcPct val="110000"/>
+              </a:lnSpc>
+              <a:spcAft>
+                <a:spcPts val="400"/>
+              </a:spcAft>
+            </a:pPr>
+            <a:r>
+              <a:rPr sz="1800" b="1">
+                <a:solidFill>
+                  <a:srgbClr val="13294B"/>
+                </a:solidFill>
+                <a:latin typeface="맑은 고딕"/>
+                <a:ea typeface="맑은 고딕"/>
+                <a:cs typeface="맑은 고딕"/>
+              </a:rPr>
+              <a:t>산출물</a:t>
+            </a:r>
+          </a:p>
+          <a:p>
+            <a:pPr algn="l" eaLnBrk="0" marL="160020" indent="-160020">
+              <a:lnSpc>
+                <a:spcPct val="110000"/>
+              </a:lnSpc>
+              <a:spcAft>
+                <a:spcPts val="400"/>
+              </a:spcAft>
+            </a:pPr>
+            <a:r>
+              <a:rPr sz="1400" b="0">
+                <a:solidFill>
+                  <a:srgbClr val="1F2A3A"/>
+                </a:solidFill>
+                <a:latin typeface="맑은 고딕"/>
+                <a:ea typeface="맑은 고딕"/>
+                <a:cs typeface="맑은 고딕"/>
+              </a:rPr>
+              <a:t>• 에이전트 정의와 스킬</a:t>
+            </a:r>
+          </a:p>
+          <a:p>
+            <a:pPr algn="l" eaLnBrk="0" marL="160020" indent="-160020">
+              <a:lnSpc>
+                <a:spcPct val="110000"/>
+              </a:lnSpc>
+              <a:spcAft>
+                <a:spcPts val="400"/>
+              </a:spcAft>
+            </a:pPr>
+            <a:r>
+              <a:rPr sz="1400" b="0">
+                <a:solidFill>
+                  <a:srgbClr val="1F2A3A"/>
+                </a:solidFill>
+                <a:latin typeface="맑은 고딕"/>
+                <a:ea typeface="맑은 고딕"/>
+                <a:cs typeface="맑은 고딕"/>
+              </a:rPr>
+              <a:t>• 제안이나 보류가 담긴 결과 한 건</a:t>
+            </a:r>
+          </a:p>
+        </p:txBody>
+      </p:sp>
+      <p:sp>
+        <p:nvSpPr>
+          <p:cNvPr id="22" name="Rounded Rectangle 21"/>
+          <p:cNvSpPr/>
+          <p:nvPr/>
+        </p:nvSpPr>
+        <p:spPr>
+          <a:xfrm>
+            <a:off x="6461607" y="4995672"/>
+            <a:ext cx="822960" cy="292608"/>
+          </a:xfrm>
+          <a:prstGeom prst="roundRect">
+            <a:avLst>
+              <a:gd name="adj" fmla="val 50000"/>
+            </a:avLst>
+          </a:prstGeom>
+          <a:solidFill>
+            <a:srgbClr val="D3D9E1"/>
+          </a:solidFill>
+          <a:ln>
+            <a:noFill/>
+          </a:ln>
+        </p:spPr>
+        <p:txBody>
+          <a:bodyPr rtlCol="0" anchor="ctr"/>
+          <a:lstStyle/>
+          <a:p>
+            <a:pPr algn="ctr"/>
+          </a:p>
+        </p:txBody>
+      </p:sp>
+      <p:sp>
+        <p:nvSpPr>
+          <p:cNvPr id="23" name="TextBox 22"/>
+          <p:cNvSpPr txBox="1"/>
+          <p:nvPr/>
+        </p:nvSpPr>
+        <p:spPr>
+          <a:xfrm>
+            <a:off x="6461607" y="4995672"/>
+            <a:ext cx="822960" cy="292608"/>
+          </a:xfrm>
+          <a:prstGeom prst="rect">
+            <a:avLst/>
+          </a:prstGeom>
+          <a:noFill/>
+        </p:spPr>
+        <p:txBody>
+          <a:bodyPr wrap="square" anchor="ctr"/>
+          <a:lstStyle/>
+          <a:p>
+            <a:pPr algn="ctr" eaLnBrk="0">
+              <a:lnSpc>
+                <a:spcPct val="110000"/>
+              </a:lnSpc>
+            </a:pPr>
+            <a:r>
+              <a:rPr sz="1200" b="1">
+                <a:solidFill>
+                  <a:srgbClr val="13294B"/>
+                </a:solidFill>
+                <a:latin typeface="맑은 고딕"/>
+                <a:ea typeface="맑은 고딕"/>
+                <a:cs typeface="맑은 고딕"/>
+              </a:rPr>
+              <a:t>산출물</a:t>
+            </a:r>
+          </a:p>
+        </p:txBody>
+      </p:sp>
+      <p:sp>
+        <p:nvSpPr>
+          <p:cNvPr id="24" name="Rounded Rectangle 23"/>
+          <p:cNvSpPr/>
+          <p:nvPr/>
+        </p:nvSpPr>
+        <p:spPr>
+          <a:xfrm>
+            <a:off x="9075191" y="2557272"/>
+            <a:ext cx="2567863" cy="2868168"/>
           </a:xfrm>
           <a:prstGeom prst="roundRect">
             <a:avLst>
@@ -39389,13 +40034,13 @@
       </p:sp>
       <p:sp>
         <p:nvSpPr>
-          <p:cNvPr id="19" name="Oval 18"/>
+          <p:cNvPr id="25" name="Oval 24"/>
           <p:cNvSpPr/>
           <p:nvPr/>
         </p:nvSpPr>
         <p:spPr>
           <a:xfrm>
-            <a:off x="8356396" y="2495042"/>
+            <a:off x="9303791" y="2758440"/>
             <a:ext cx="731520" cy="731520"/>
           </a:xfrm>
           <a:prstGeom prst="ellipse">
@@ -39418,21 +40063,21 @@
       </p:sp>
       <p:pic>
         <p:nvPicPr>
-          <p:cNvPr id="20" name="아이콘:hourglass" descr="hourglass_13294B_1.6.png"/>
+          <p:cNvPr id="26" name="아이콘:hourglass" descr="hourglass_13294B_1.6.png"/>
           <p:cNvPicPr>
             <a:picLocks noChangeAspect="1"/>
           </p:cNvPicPr>
           <p:nvPr/>
         </p:nvPicPr>
         <p:blipFill>
-          <a:blip r:embed="rId5"/>
+          <a:blip r:embed="rId6"/>
           <a:stretch>
             <a:fillRect/>
           </a:stretch>
         </p:blipFill>
         <p:spPr>
           <a:xfrm>
-            <a:off x="8510016" y="2648661"/>
+            <a:off x="9457410" y="2912059"/>
             <a:ext cx="424281" cy="424281"/>
           </a:xfrm>
           <a:prstGeom prst="rect">
@@ -39442,14 +40087,14 @@
       </p:pic>
       <p:sp>
         <p:nvSpPr>
-          <p:cNvPr id="21" name="TextBox 20"/>
-          <p:cNvSpPr txBox="1"/>
-          <p:nvPr/>
-        </p:nvSpPr>
-        <p:spPr>
-          <a:xfrm>
-            <a:off x="8292388" y="3318001"/>
-            <a:ext cx="3186074" cy="1867916"/>
+          <p:cNvPr id="27" name="TextBox 26"/>
+          <p:cNvSpPr txBox="1"/>
+          <p:nvPr/>
+        </p:nvSpPr>
+        <p:spPr>
+          <a:xfrm>
+            <a:off x="9239783" y="3581400"/>
+            <a:ext cx="2238679" cy="1341120"/>
           </a:xfrm>
           <a:prstGeom prst="rect">
             <a:avLst/>
@@ -39469,7 +40114,7 @@
               </a:spcAft>
             </a:pPr>
             <a:r>
-              <a:rPr sz="2200" b="1">
+              <a:rPr sz="1800" b="1">
                 <a:solidFill>
                   <a:srgbClr val="13294B"/>
                 </a:solidFill>
@@ -39477,11 +40122,11 @@
                 <a:ea typeface="맑은 고딕"/>
                 <a:cs typeface="맑은 고딕"/>
               </a:rPr>
-              <a:t>제안과 보류</a:t>
-            </a:r>
-          </a:p>
-          <a:p>
-            <a:pPr algn="l" eaLnBrk="0" marL="205740" indent="-205740">
+              <a:t>성공 기준</a:t>
+            </a:r>
+          </a:p>
+          <a:p>
+            <a:pPr algn="l" eaLnBrk="0" marL="160020" indent="-160020">
               <a:lnSpc>
                 <a:spcPct val="110000"/>
               </a:lnSpc>
@@ -39490,7 +40135,7 @@
               </a:spcAft>
             </a:pPr>
             <a:r>
-              <a:rPr sz="1800" b="0">
+              <a:rPr sz="1400" b="0">
                 <a:solidFill>
                   <a:srgbClr val="1F2A3A"/>
                 </a:solidFill>
@@ -39498,11 +40143,11 @@
                 <a:ea typeface="맑은 고딕"/>
                 <a:cs typeface="맑은 고딕"/>
               </a:rPr>
-              <a:t>• 확인된 것은 제안하고</a:t>
-            </a:r>
-          </a:p>
-          <a:p>
-            <a:pPr algn="l" eaLnBrk="0" marL="205740" indent="-205740">
+              <a:t>• 제안의 근거는 읽은 값</a:t>
+            </a:r>
+          </a:p>
+          <a:p>
+            <a:pPr algn="l" eaLnBrk="0" marL="160020" indent="-160020">
               <a:lnSpc>
                 <a:spcPct val="110000"/>
               </a:lnSpc>
@@ -39511,7 +40156,7 @@
               </a:spcAft>
             </a:pPr>
             <a:r>
-              <a:rPr sz="1800" b="0">
+              <a:rPr sz="1400" b="0">
                 <a:solidFill>
                   <a:srgbClr val="1F2A3A"/>
                 </a:solidFill>
@@ -39519,42 +40164,21 @@
                 <a:ea typeface="맑은 고딕"/>
                 <a:cs typeface="맑은 고딕"/>
               </a:rPr>
-              <a:t>• 미확인 값과 권한 밖의 작업은</a:t>
-            </a:r>
-          </a:p>
-          <a:p>
-            <a:pPr algn="l" eaLnBrk="0" marL="205740" indent="-205740">
-              <a:lnSpc>
-                <a:spcPct val="110000"/>
-              </a:lnSpc>
-              <a:spcAft>
-                <a:spcPts val="400"/>
-              </a:spcAft>
-            </a:pPr>
-            <a:r>
-              <a:rPr sz="1800" b="0">
-                <a:solidFill>
-                  <a:srgbClr val="1F2A3A"/>
-                </a:solidFill>
-                <a:latin typeface="맑은 고딕"/>
-                <a:ea typeface="맑은 고딕"/>
-                <a:cs typeface="맑은 고딕"/>
-              </a:rPr>
-              <a:t>• 보류로 낸다</a:t>
-            </a:r>
-          </a:p>
-        </p:txBody>
-      </p:sp>
-      <p:sp>
-        <p:nvSpPr>
-          <p:cNvPr id="22" name="Rounded Rectangle 21"/>
+              <a:t>• 미확인 값과 권한 밖 작업은 보류</a:t>
+            </a:r>
+          </a:p>
+        </p:txBody>
+      </p:sp>
+      <p:sp>
+        <p:nvSpPr>
+          <p:cNvPr id="28" name="Rounded Rectangle 27"/>
           <p:cNvSpPr/>
           <p:nvPr/>
         </p:nvSpPr>
         <p:spPr>
           <a:xfrm>
-            <a:off x="8356396" y="5259070"/>
-            <a:ext cx="822960" cy="292608"/>
+            <a:off x="9303791" y="4995672"/>
+            <a:ext cx="1021080" cy="292608"/>
           </a:xfrm>
           <a:prstGeom prst="roundRect">
             <a:avLst>
@@ -39578,14 +40202,14 @@
       </p:sp>
       <p:sp>
         <p:nvSpPr>
-          <p:cNvPr id="23" name="TextBox 22"/>
-          <p:cNvSpPr txBox="1"/>
-          <p:nvPr/>
-        </p:nvSpPr>
-        <p:spPr>
-          <a:xfrm>
-            <a:off x="8356396" y="5259070"/>
-            <a:ext cx="822960" cy="292608"/>
+          <p:cNvPr id="29" name="TextBox 28"/>
+          <p:cNvSpPr txBox="1"/>
+          <p:nvPr/>
+        </p:nvSpPr>
+        <p:spPr>
+          <a:xfrm>
+            <a:off x="9303791" y="4995672"/>
+            <a:ext cx="1021080" cy="292608"/>
           </a:xfrm>
           <a:prstGeom prst="rect">
             <a:avLst/>
@@ -39610,7 +40234,7 @@
                 <a:ea typeface="맑은 고딕"/>
                 <a:cs typeface="맑은 고딕"/>
               </a:rPr>
-              <a:t>결과</a:t>
+              <a:t>성공 기준</a:t>
             </a:r>
           </a:p>
         </p:txBody>
@@ -41367,7 +41991,7 @@
       </p:sp>
       <p:pic>
         <p:nvPicPr>
-          <p:cNvPr id="6" name="삽화:사건선_전체.svg" descr="illust_4277609804489676574_1792123197.png"/>
+          <p:cNvPr id="6" name="삽화:사건선_전체.svg" descr="illust_4993840797023965435_1792123197.png"/>
           <p:cNvPicPr>
             <a:picLocks noChangeAspect="1"/>
           </p:cNvPicPr>
@@ -41932,7 +42556,7 @@
                 <a:ea typeface="맑은 고딕"/>
                 <a:cs typeface="맑은 고딕"/>
               </a:rPr>
-              <a:t>ProcessGPT: BPMN 기반 멀티 에이전트 오케스트레이션</a:t>
+              <a:t>BPMN 기반 멀티 에이전트 오케스트레이션: ProcessGPT</a:t>
             </a:r>
           </a:p>
         </p:txBody>
@@ -43893,7 +44517,7 @@
       </p:sp>
       <p:pic>
         <p:nvPicPr>
-          <p:cNvPr id="6" name="삽화:작업목록.svg" descr="illust_7006897524823932646_1792123197.png"/>
+          <p:cNvPr id="6" name="삽화:작업목록.svg" descr="illust_1349356883868560721_1792123197.png"/>
           <p:cNvPicPr>
             <a:picLocks noChangeAspect="1"/>
           </p:cNvPicPr>
@@ -43924,7 +44548,7 @@
         <p:spPr>
           <a:xfrm>
             <a:off x="772014" y="4558649"/>
-            <a:ext cx="2290993" cy="778764"/>
+            <a:ext cx="2290993" cy="577342"/>
           </a:xfrm>
           <a:prstGeom prst="rect">
             <a:avLst/>
@@ -43973,7 +44597,7 @@
                 <a:ea typeface="맑은 고딕"/>
                 <a:cs typeface="맑은 고딕"/>
               </a:rPr>
-              <a:t>정의를 읽어 다음 작업을 정한다</a:t>
+              <a:t>process-gpt-completion</a:t>
             </a:r>
           </a:p>
         </p:txBody>
@@ -51468,7 +52092,7 @@
       </p:sp>
       <p:pic>
         <p:nvPicPr>
-          <p:cNvPr id="6" name="삽화:사건선_영역.svg" descr="illust_3754421608743097128_1792123197.png"/>
+          <p:cNvPr id="6" name="삽화:사건선_영역.svg" descr="illust_3357536241265021552_1792123197.png"/>
           <p:cNvPicPr>
             <a:picLocks noChangeAspect="1"/>
           </p:cNvPicPr>
@@ -56014,7 +56638,7 @@
       </p:sp>
       <p:pic>
         <p:nvPicPr>
-          <p:cNvPr id="6" name="삽화:호출과지식.svg" descr="illust_776090529810312654_1792123197.png"/>
+          <p:cNvPr id="6" name="삽화:스킬도구.svg" descr="illust_3428599954416850341_1792156514.png"/>
           <p:cNvPicPr>
             <a:picLocks noChangeAspect="1"/>
           </p:cNvPicPr>
@@ -56170,8 +56794,8 @@
         </p:nvSpPr>
         <p:spPr>
           <a:xfrm>
-            <a:off x="4863074" y="1864004"/>
-            <a:ext cx="1745519" cy="507618"/>
+            <a:off x="4644884" y="1864004"/>
+            <a:ext cx="2181899" cy="507618"/>
           </a:xfrm>
           <a:prstGeom prst="rect">
             <a:avLst/>
@@ -56199,7 +56823,7 @@
                 <a:ea typeface="맑은 고딕"/>
                 <a:cs typeface="맑은 고딕"/>
               </a:rPr>
-              <a:t>evaluate_cards</a:t>
+              <a:t>mes_orders · qms_lots</a:t>
             </a:r>
           </a:p>
           <a:p>
@@ -56220,7 +56844,7 @@
                 <a:ea typeface="맑은 고딕"/>
                 <a:cs typeface="맑은 고딕"/>
               </a:rPr>
-              <a:t>조치를 견준다</a:t>
+              <a:t>필요하면 업무 사정을 읽는다</a:t>
             </a:r>
           </a:p>
         </p:txBody>
@@ -56233,8 +56857,8 @@
         </p:nvSpPr>
         <p:spPr>
           <a:xfrm>
-            <a:off x="6837693" y="1864004"/>
-            <a:ext cx="1963709" cy="716788"/>
+            <a:off x="6946788" y="1864004"/>
+            <a:ext cx="1745519" cy="507618"/>
           </a:xfrm>
           <a:prstGeom prst="rect">
             <a:avLst/>
@@ -56262,7 +56886,7 @@
                 <a:ea typeface="맑은 고딕"/>
                 <a:cs typeface="맑은 고딕"/>
               </a:rPr>
-              <a:t>mes_orders · qms_lots</a:t>
+              <a:t>evaluate_cards</a:t>
             </a:r>
           </a:p>
           <a:p>
@@ -56283,7 +56907,7 @@
                 <a:ea typeface="맑은 고딕"/>
                 <a:cs typeface="맑은 고딕"/>
               </a:rPr>
-              <a:t>업무 사정을 읽는다</a:t>
+              <a:t>조치를 견준다</a:t>
             </a:r>
           </a:p>
         </p:txBody>
@@ -56485,8 +57109,8 @@
         </p:nvSpPr>
         <p:spPr>
           <a:xfrm>
-            <a:off x="4644884" y="5598688"/>
-            <a:ext cx="2181899" cy="507618"/>
+            <a:off x="4863074" y="5598688"/>
+            <a:ext cx="1745519" cy="507618"/>
           </a:xfrm>
           <a:prstGeom prst="rect">
             <a:avLst/>
@@ -56514,7 +57138,7 @@
                 <a:ea typeface="맑은 고딕"/>
                 <a:cs typeface="맑은 고딕"/>
               </a:rPr>
-              <a:t>SOP와 판단 규칙</a:t>
+              <a:t>업무 DB</a:t>
             </a:r>
           </a:p>
           <a:p>
@@ -56535,7 +57159,7 @@
                 <a:ea typeface="맑은 고딕"/>
                 <a:cs typeface="맑은 고딕"/>
               </a:rPr>
-              <a:t>성과 기준(BSC · KPI)</a:t>
+              <a:t>생산 오더와 품질 로트</a:t>
             </a:r>
           </a:p>
         </p:txBody>
@@ -56548,8 +57172,8 @@
         </p:nvSpPr>
         <p:spPr>
           <a:xfrm>
-            <a:off x="6946788" y="5598688"/>
-            <a:ext cx="1745519" cy="507618"/>
+            <a:off x="6728598" y="5598688"/>
+            <a:ext cx="2181899" cy="507618"/>
           </a:xfrm>
           <a:prstGeom prst="rect">
             <a:avLst/>
@@ -56577,7 +57201,7 @@
                 <a:ea typeface="맑은 고딕"/>
                 <a:cs typeface="맑은 고딕"/>
               </a:rPr>
-              <a:t>업무 DB</a:t>
+              <a:t>SOP와 판단 규칙</a:t>
             </a:r>
           </a:p>
           <a:p>
@@ -56598,7 +57222,7 @@
                 <a:ea typeface="맑은 고딕"/>
                 <a:cs typeface="맑은 고딕"/>
               </a:rPr>
-              <a:t>생산 오더와 품질 로트</a:t>
+              <a:t>성과 기준(BSC · KPI)</a:t>
             </a:r>
           </a:p>
         </p:txBody>
@@ -56611,8 +57235,8 @@
         </p:nvSpPr>
         <p:spPr>
           <a:xfrm>
-            <a:off x="9041411" y="4842296"/>
-            <a:ext cx="2181899" cy="507618"/>
+            <a:off x="9368696" y="4842296"/>
+            <a:ext cx="1527329" cy="507618"/>
           </a:xfrm>
           <a:prstGeom prst="rect">
             <a:avLst/>
@@ -56640,7 +57264,7 @@
                 <a:ea typeface="맑은 고딕"/>
                 <a:cs typeface="맑은 고딕"/>
               </a:rPr>
-              <a:t>모두 읽기다</a:t>
+              <a:t>읽기 전용</a:t>
             </a:r>
           </a:p>
           <a:p>
@@ -56661,7 +57285,7 @@
                 <a:ea typeface="맑은 고딕"/>
                 <a:cs typeface="맑은 고딕"/>
               </a:rPr>
-              <a:t>쓰기는 제출 하나뿐이다</a:t>
+              <a:t>Read-only</a:t>
             </a:r>
           </a:p>
         </p:txBody>

--- a/산출물/교재/PPTX/통합반_온라인/통합반_11일차.pptx
+++ b/산출물/교재/PPTX/통합반_온라인/통합반_11일차.pptx
@@ -565,7 +565,7 @@
           <a:lstStyle/>
           <a:p>
             <a:r>
-              <a:t>안녕하세요. 이번 회차에서는 이 과정을 마무리합니다. 지금까지 쿨러 사건 하나를 붙잡고 세 영역을 나눠서 배웠죠. 판단의 재료가 되는 지식, 그 지식을 읽어서 추천안을 만드는 에이전트, 그리고 그 추천안을 사람의 승인과 시스템 실행으로 잇는 프로세스였어요. 사건을 한번 떠올려 볼까요? 쿨러에 이상이 생겨서 경보가 울렸고요, 에이전트가 원인을 가려서 조치를 추천했습니다. 운전원이 승인하자 시스템이 팬 속도를 올렸죠. 그런데 이 한 건 안에서 세 영역은 서로 무엇을 주고받았을까요? 그리고 이 구조를 쿨러가 아닌 내 업무에도 똑같이 세울 수 있을까요? 이번 회차에서는 먼저 쿨러 사건 한 건 위에서 세 영역이 주고받는 걸 되짚어 보고요, 그다음에 같은 구조를 각자의 작은 업무로 직접 만들어 봅니다. 마지막으로 실제 제품에서도 그 구조를 확인해 보겠습니다.</a:t>
+              <a:t>안녕하세요. 이번 회차에서는 이 과정을 마무리합니다. 지금까지 쿨러 사건 하나를 붙잡고 세 영역을 나눠서 배웠죠. 판단의 재료가 되는 지식, 그 지식을 읽어서 추천안을 만드는 에이전트, 그리고 그 추천안을 사람의 승인과 시스템 실행으로 잇는 프로세스였어요. 사건을 한번 떠올려 볼까요? 쿨러에 이상이 생겨서 경보가 울렸고요, 에이전트가 원인을 가려서 조치를 추천했습니다. 운전원이 승인하자 시스템이 팬 속도를 올렸죠. 그런데 이 한 건 안에서 세 영역은 서로 무엇을 주고받았을까요? 그리고 이 구조를 쿨러가 아닌 내 업무에도 똑같이 세울 수 있을까요? 이번 회차에서는 먼저 쿨러 사건 한 건 위에서 세 영역이 주고받는 걸 되짚어 보고요, 그다음에 같은 구조를 강사가 고른 작은 업무로 직접 만들어 봅니다. 마지막으로 실제 제품에서도 그 구조를 확인해 보겠습니다.</a:t>
             </a:r>
           </a:p>
         </p:txBody>
@@ -1335,7 +1335,7 @@
           <a:lstStyle/>
           <a:p>
             <a:r>
-              <a:t>이번 회차의 학습목표부터 볼게요. 화면에 카드가 네 장 있습니다. 첫 번째 카드는 지식에서 판단까지예요. 에이전트가 도구마다 어떤 지식과 어떤 값을 읽는지 설명하고, 검토와 개정을 거쳐 관리하는 지식과 지금의 값, 그리고 출처가 각각 어디에 있는지 가려 봅니다. 두 번째 카드는 제안에서 완료까지입니다. 추천안이 사람의 승인과 시스템 실행을 거쳐서 끝난 업무가 되는 길을 설명하고요, 에이전트 쪽 장치와 프로세스 쪽 장치가 각각 무엇을 맡는지 나눠 봐요. 세 번째 카드는 내 주제에 적용하기예요. 각자에게 친숙한 작은 업무 하나를 골라서 명세, 지식 구조, 에이전트, 흐름까지 직접 만듭니다. 이때 에이전트는 확인된 것만 제안하고, 나머지는 보류하게 할 거예요. 마지막 카드는 제품에서 확인하기입니다. ProcessGPT 시연을 보면서 배운 구조가 그대로 있는 자리와 넓어진 범위를 가려 보고, 끝으로 학습 노트에 개념과 산출물을 이어 둡니다.</a:t>
+              <a:t>이번 회차의 학습목표부터 볼게요. 화면에 카드가 네 장 있습니다. 첫 번째 카드는 지식에서 판단까지예요. 에이전트가 도구마다 어떤 지식과 어떤 값을 읽는지 설명하고, 검토와 개정을 거쳐 관리하는 지식과 지금의 값, 그리고 출처가 각각 어디에 있는지 가려 봅니다. 두 번째 카드는 제안에서 완료까지입니다. 추천안이 사람의 승인과 시스템 실행을 거쳐서 끝난 업무가 되는 길을 설명하고요, 에이전트 쪽 장치와 프로세스 쪽 장치가 각각 무엇을 맡는지 나눠 봐요. 세 번째 카드는 내 주제에 적용하기예요. 친숙한 작은 업무 하나를 제가 골라서 명세, 지식 구조, 에이전트, 흐름까지 직접 만듭니다. 이때 에이전트는 확인된 것만 제안하고, 나머지는 보류하게 할 거예요. 마지막 카드는 제품에서 확인하기입니다. ProcessGPT 시연을 보면서 배운 구조가 그대로 있는 자리와 넓어진 범위를 가려 보고, 끝으로 학습 노트에 개념과 산출물을 이어 둡니다.</a:t>
             </a:r>
           </a:p>
         </p:txBody>
@@ -1475,7 +1475,7 @@
           <a:lstStyle/>
           <a:p>
             <a:r>
-              <a:t>앞의 세 단원을 닫기 전에, 추천안 한 건에 들어간 걸 한번 갈라 볼게요. 무엇이 읽어 온 것이고, 무엇을 에이전트가 정했을까요? 출처에 따라 카드 세 장으로 나눴습니다. 카드 아래 꼬리표는 그 내용이 언제 바뀌는지를 적은 거예요. 첫 카드는 지식에서 읽은 것입니다. 원인 후보와 증거 기준, 조치 후보와 판단 규칙, 승인 역할과 근거 문서의 절이에요. 승인된 기준이나 정책이 개정될 때 바뀝니다. 정적 지식이라는 말은 영원히 고정된다는 뜻이 아니에요. 둘째 카드는 원천에서 읽은 값이에요. 냉각 효율과 팬 진동, 생산 오더와 품질 로트죠. 이건 계속 바뀝니다. 셋째 카드가 에이전트가 스스로 정한 거예요. 어느 도구를 어떤 순서로 부를지, 근거를 어떤 문장으로 설명할지입니다. 업무 값 조회를 할지 말지, 한다면 언제 할지 같은 게 여기 들어가요. 그래서 실행할 때마다 달라질 수 있습니다. 정리하면, 실행마다 설명의 문장은 달라질 수 있어도, 후보와 기준, 그리고 읽어 온 값은 에이전트가 정하지 않는다는 거예요. 판단의 근거를 지식과 원천으로 확인할 수 있게 하고, 에이전트는 그걸 읽어서 엮는 역할입니다. 현장 지식이 AI의 판단 근거가 된다는 말은, 바로 이 구조를 가리키는 겁니다. 다음 시간에는 이 추천안이 운전원의 승인과 시스템 실행을 거쳐 끝난 업무가 되기까지를 따라갑니다.</a:t>
+              <a:t>앞의 세 단원을 닫기 전에, 추천안 한 건에 들어간 걸 한번 갈라 볼게요. 무엇이 읽어 온 것이고, 무엇을 에이전트가 정했을까요? 출처에 따라 카드 세 장으로 나눴습니다. 카드 아래 꼬리표는 그 내용이 언제 바뀌는지를 적은 거예요. 첫 카드는 지식에서 읽은 것입니다. 원인 후보와 증거 기준, 조치 후보와 판단 규칙, 승인 역할과 근거 문서의 절이에요. 승인된 기준이나 정책이 개정될 때 바뀝니다. 정적 지식이라는 말은 영원히 고정된다는 뜻이 아니에요. 둘째 카드는 원천에서 읽은 값이에요. 냉각 효율과 팬 진동, 생산 오더와 품질 로트죠. 이건 계속 바뀝니다. 셋째 카드가 에이전트가 스스로 정한 거예요. 어느 도구를 어떤 순서로 부를지, 근거를 어떤 문장으로 설명할지입니다. 업무 값 조회를 할지 말지, 한다면 언제 할지 같은 게 여기 들어가요. 그래서 실행할 때마다 달라질 수 있습니다. 정리하면, 실행마다 설명의 문장은 달라질 수 있어도, 후보와 기준, 그리고 읽어 온 값은 에이전트가 정하지 않는다는 거예요. 판단의 근거를 지식과 원천으로 확인할 수 있게 하고, 에이전트는 그걸 읽어서 엮는 역할입니다. 현장 지식이 AI의 판단 근거가 된다는 말은, 바로 이 구조를 가리키는 겁니다. 이어서 이 추천안이 운전원의 승인과 시스템 실행을 거쳐 끝난 업무가 되기까지를 따라갑니다.</a:t>
             </a:r>
           </a:p>
         </p:txBody>
@@ -2035,7 +2035,7 @@
           <a:lstStyle/>
           <a:p>
             <a:r>
-              <a:t>여기까지는 운전원이 승인한 경우였어요. 승인하지 않으면 어떻게 될까요? 같은 추천안이라도 사람의 결정에 따라 결말이 셋으로 갈립니다. 표의 가운데 칸, 시스템 실행의 수를 견줘 보세요. 첫 줄, 이 사례의 정상 경로에서는 승인 뒤 명령이 실행되고, 회복을 확인한 다음 작업지시가 등록돼 정상 종료로 닫혔습니다. 승인만으로 정상 종료가 보장되는 건 아니에요. 회복 기준을 충족하지 못하면 미달 결과를 남기는 다른 경로로 갑니다. 결과 보고는 정상이고요. 둘째 줄, 거절하면 시스템 실행이 한 건도 없어요. 설비 명령도 작업지시도 나가지 않고, 거절의 끝으로 닫힙니다. 결과 보고에는 반려, 그리고 설비 명령은 내지 않았다는 사실이 남아요. 기록을 열어 보면 가지 않은 단계들, 냉각 명령과 재관측과 작업지시는 취소 상태로 남아 있고, 거절의 사유도 함께 남습니다. 어느 갈래로 갔는지가 기록에 그대로 보이는 거죠. 그런데 여기서 조심할 게 있습니다. 이때도 처리 건의 상태는 완료로 표시돼요. 그러니까 일이 실제로 이뤄졌는지는 어느 끝에 닿았는지와 결과 보고로 읽어야 합니다. 셋째 줄, 응답이 없으면 정해 둔 기한이 지난 뒤 승인 지연 알림만 나갑니다. 처리 건은 자동으로 승인되지도, 취소되거나 거절되지도 않아요. 승인을 계속 기다립니다. 늦게 승인하더라도 그때의 조건을 다시 확인해 허용되는 경우에 실행을 이어갑니다. 왜 기한이 지나면 알아서 승인하거나 취소하게 두지 않았을까요? 자동으로 승인하면, 아무도 결정하지 않은 조치가 설비를 움직이게 됩니다. 사람의 승인을 둔 의미가 사라지죠. 반대로 자동으로 취소하면, 유온이 오르고 있는데 필요한 조치가 조용히 사라져요. 그래서 결정은 끝까지 사람에게 남겨 두고, 늦어졌다는 사실만 알려서 사람을 다시 부르는 겁니다. 세 경우 모두 에이전트의 추천안은 같았습니다. 결말을 가른 건 사람의 결정이에요. 그리고 그 결정에 따라 어디로 갈지는 프로세스 정의가 정해 둔 길입니다.</a:t>
+              <a:t>여기까지는 운전원이 승인한 경우였어요. 승인하지 않으면 어떻게 될까요? 같은 추천안이라도 사람의 결정에 따라 결말이 셋으로 갈립니다. 표의 가운데 칸, 시스템 실행의 수를 견줘 보세요. 첫 줄, 이 사례의 정상 경로에서는 승인 뒤 명령이 실행되고, 회복을 확인한 다음 작업지시가 등록돼 정상 종료로 닫혔고 결과 보고도 정상이었습니다. 승인만으로 정상 종료가 보장되는 건 아니에요. 회복 기준을 충족하지 못하면 미달 결과를 남기는 다른 경로로 갑니다. 둘째 줄, 거절하면 시스템 실행이 한 건도 없어요. 설비 명령도 작업지시도 나가지 않고, 거절의 끝으로 닫힙니다. 결과 보고에는 반려, 그리고 설비 명령은 내지 않았다는 사실이 남아요. 기록을 열어 보면 가지 않은 단계들, 냉각 명령과 재관측과 작업지시는 취소 상태로 남아 있고, 거절의 사유도 함께 남습니다. 어느 갈래로 갔는지가 기록에 그대로 보이는 거죠. 그런데 여기서 조심할 게 있습니다. 이때도 처리 건의 상태는 완료로 표시돼요. 그러니까 일이 실제로 이뤄졌는지는 어느 끝에 닿았는지와 결과 보고로 읽어야 합니다. 셋째 줄, 응답이 없으면 정해 둔 기한이 지난 뒤 승인 지연 알림만 나갑니다. 처리 건은 자동으로 승인되지도, 취소되거나 거절되지도 않아요. 승인을 계속 기다립니다. 늦게 승인하더라도 그때의 조건을 다시 확인해 허용되는 경우에 실행을 이어갑니다. 왜 기한이 지나면 알아서 승인하거나 취소하게 두지 않았을까요? 자동으로 승인하면, 아무도 결정하지 않은 조치가 설비를 움직이게 됩니다. 사람의 승인을 둔 의미가 사라지죠. 반대로 자동으로 취소하면, 유온이 오르고 있는데 필요한 조치가 조용히 사라져요. 그래서 결정은 끝까지 사람에게 남겨 두고, 늦어졌다는 사실만 알려서 사람을 다시 부르는 겁니다. 세 경우 모두 에이전트의 추천안은 같았습니다. 결말을 가른 건 사람의 결정이에요. 그리고 그 결정에 따라 어디로 갈지는 프로세스 정의가 정해 둔 길입니다.</a:t>
             </a:r>
           </a:p>
         </p:txBody>
@@ -2525,7 +2525,7 @@
           <a:lstStyle/>
           <a:p>
             <a:r>
-              <a:t>외부 시스템에 닿는 길도 두 쪽이 다르게 나뉘어 있습니다. 왼쪽은 에이전트가 MCP로 연결된 도구를 쓰는 길, 오른쪽은 프로세스가 서비스 작업으로 시스템을 부르는 길이에요. 왼쪽부터 보죠. 이 HYD 에이전트에 제공한 업무 도구는 주로 지식과 값을 읽는 도구입니다. MCP 자체가 읽기 전용 규약인 것은 아니에요. 쓰기 도구도 연결할 수 있어서 어떤 기능과 권한을 제공할지가 설계의 핵심입니다. 진단, 조치 평가, 생산 오더와 품질 로트 조회가 그렇죠. 쓰기는 추천안 제출 하나뿐이에요. 그 제출도 판단 기록 한 건을 남기는 일일 뿐, 설비나 업무 시스템을 바꾸지는 않습니다. 그리고 제출 결과에 허용되지 않은 실행 지시가 들어오는지도 정해진 계약으로 검사합니다. 모든 위험한 문장을 알아보는 만능 검사라고 이해하면 안 됩니다. 오른쪽, 설비와 업무 시스템을 실제로 바꾸는 쓰기는 프로세스의 서비스 작업에 있어요. 팬 속도를 100퍼센트로 바꾸는 냉각 명령, 쿨러 핀 세척 작업지시 등록이 그렇습니다. 이 작업은 승인이 전달된 뒤에만 열려요. 이렇게 나눠 두면 에이전트가 판단을 잘못해도 그 판단만으로는 아무것도 바뀌지 않습니다. 승인 단계에서는 추천의 근거와 현재 조건을 검토해야 하고요, 승인되지 않은 추천안으로는 쓰기에 닿을 길이 없어요. 그러니까 읽기와 쓰기를 가르는 경계가 곧 책임의 경계입니다. [출처·낭독 제외] https://modelcontextprotocol.io/specification/2025-06-18/server/tools</a:t>
+              <a:t>외부 시스템에 닿는 길도 두 쪽이 다르게 나뉘어 있습니다. 왼쪽은 에이전트가 MCP로 연결된 도구를 쓰는 길, 오른쪽은 프로세스가 서비스 작업으로 시스템을 부르는 길이에요. 왼쪽부터 보죠. 이 HYD 에이전트에 제공한 업무 도구는 주로 지식과 값을 읽는 도구입니다. MCP 자체가 읽기 전용 규약인 것은 아니에요. 쓰기 도구도 연결할 수 있어서 어떤 기능과 권한을 제공할지가 설계의 핵심입니다. 진단, 조치 평가, 생산 오더와 품질 로트 조회가 그렇죠. 쓰기는 추천안 제출 하나뿐이에요. 그 제출도 판단 기록 한 건을 남기는 일일 뿐, 설비나 업무 시스템을 바꾸지는 않습니다. 그리고 제출 결과에 허용되지 않은 실행 지시가 들어오는지도 정해진 계약으로 검사합니다. 모든 위험한 문장을 알아보는 만능 검사라고 이해하면 안 됩니다. 오른쪽, 설비와 업무 시스템을 실제로 바꾸는 쓰기는 프로세스의 서비스 작업에 있어요. 팬 속도를 100퍼센트로 바꾸는 냉각 명령, 쿨러 핀 세척 작업지시 등록이 그렇습니다. 이 작업은 승인이 전달된 뒤에만 열려요. 이렇게 나눠 두면 에이전트가 판단을 잘못해도 그 판단만으로는 아무것도 바뀌지 않습니다. 승인 단계에서는 추천의 근거와 현재 조건을 검토해야 하고요, 승인되지 않은 추천안으로는 쓰기에 닿을 길이 없어요. 그러니까 읽기와 쓰기를 가르는 경계가 곧 책임의 경계입니다.</a:t>
             </a:r>
           </a:p>
         </p:txBody>
@@ -2595,7 +2595,7 @@
           <a:lstStyle/>
           <a:p>
             <a:r>
-              <a:t>이 경계가 실제로 지켜지는지 확인하는 장치를 에이전트 영역에서 이미 써 봤죠. 거절 상황을 적은 시나리오예요. 화면 왼쪽처럼 Given, When, Then으로 나눠 적었습니다. 이 시나리오가 무엇을 확인하는지 다시 보겠습니다. Given은 전제예요. 에이전트가 추천안을 내서 승인 단계가 열려 있는 상태죠. 이 전제가 서려면 에이전트 단계가 끝나고, 명세의 출력 계약대로 추천안이 놓여 있어야 합니다. When은 확인하려는 행동이에요. 승인 권한이 있는 담당자가 사유를 적고 거절합니다. Then은 기대 결과고요. 설비 명령이 만들어지지 않고, 업무 처리도 일어나지 않고, 처리 건이 거절로 닫혀야 해요. Then부터 아래 세 줄을 다시 보세요. 에이전트의 문장이 어땠는지는 하나도 묻지 않습니다. 전부 처리 건 전체가 어떻게 움직였는지를 묻죠. 이 예의 명세에는 출력 계약뿐 아니라 승인 전 실행 금지 같은 요구도 들어갑니다. 시나리오는 그 요구가 실제 행동으로 지켜지는지 확인할 예를 제공하죠. SDD나 BDD가 에이전트에만 쓰이는 방법은 아닙니다. 무엇을 유지하고 무엇을 바꿀지 명세로 합의하고, 정상·거절·실패 상황을 실행해 결과와 부수 효과를 확인하는 데 가치가 있어요. 시나리오 문서를 써 놓은 것과 그 검증을 통과한 것은 구별해야 합니다. [출처·낭독 제외] https://cucumber.io/docs/bdd/</a:t>
+              <a:t>이 경계가 실제로 지켜지는지 확인하는 장치를 에이전트 영역에서 이미 써 봤죠. 거절 상황을 적은 시나리오예요. 화면 왼쪽처럼 Given, When, Then으로 나눠 적었습니다. 이 시나리오가 무엇을 확인하는지 다시 보겠습니다. Given은 전제예요. 에이전트가 추천안을 내서 승인 단계가 열려 있는 상태죠. 이 전제가 서려면 에이전트 단계가 끝나고, 명세의 출력 계약대로 추천안이 놓여 있어야 합니다. When은 확인하려는 행동이에요. 승인 권한이 있는 담당자가 사유를 적고 거절합니다. Then은 기대 결과고요. 설비 명령이 만들어지지 않고, 업무 처리도 일어나지 않고, 처리 건이 거절로 닫혀야 해요. Then부터 아래 세 줄을 다시 보세요. 에이전트의 문장이 어땠는지는 하나도 묻지 않습니다. 전부 처리 건 전체가 어떻게 움직였는지를 묻죠. 이 예의 명세에는 출력 계약뿐 아니라 승인 전 실행 금지 같은 요구도 들어갑니다. 시나리오는 그 요구가 실제 행동으로 지켜지는지 확인할 예를 제공하죠. SDD나 BDD가 에이전트에만 쓰이는 방법은 아닙니다. 무엇을 유지하고 무엇을 바꿀지 명세로 합의하고, 정상·거절·실패 상황을 실행해 결과와 부수 효과를 확인하는 데 가치가 있어요. 시나리오 문서를 써 놓은 것과 그 검증을 통과한 것은 구별해야 합니다.</a:t>
             </a:r>
           </a:p>
         </p:txBody>
@@ -3015,7 +3015,7 @@
           <a:lstStyle/>
           <a:p>
             <a:r>
-              <a:t>지금까지 쿨러 사건 한 건 위에서, 지식이 에이전트의 판단이 되고 그 판단이 사람의 승인과 시스템 실행을 거쳐 끝나는 길을 처음부터 끝까지 다시 따라왔죠. 이제 그 구조를 직접 세워 볼 차례입니다. 이번엔 쿨러가 아니라 각자의 업무 위에서요. 내 업무로 옮기는 실습은 넷이 이어지는데, 첫 실습에서는 내 주제의 자료와 업무 목표, 완료 조건을 정의합니다. 먼저 각자에게 친숙한 작은 업무 하나를 고르게 돼요. 회의 준비나 자료 정리처럼, 매번 비슷하게 되풀이되는 일이면 좋습니다. 고른 업무를 화면의 카드 네 장에 맞춰 적어요. 첫 카드는 무엇을 받아 시작하고 어디서 정보를 읽을 수 있는지, 둘째는 에이전트가 무엇을 내는지, 셋째는 어느 결과를 누가 확인하는지, 마지막 카드는 무엇이 되면 끝났다고 보는지예요. 에이전트가 할 일은 읽기, 분류, 추천 가운데서 이 회차 안에 끝까지 만들 수 있는 크기로 줄입니다. 이 실습에서 남는 건 업무 명세 한 장이에요. 네 칸이 모두 차고, 마지막 카드의 완료 조건이 확인할 수 있는 문장이면 성공입니다. 「잘 정리된다」가 아니라, 무엇이 남으면 끝인지가 보여야 해요. 하지 못한 일을 어떻게 남길지도 적혀 있어야 하고요. 이 명세 한 장이 뒤의 세 실습이 따를 기준이 되거든요. 뒤의 실습에서는 이 명세부터 적습니다. 이어지는 지식 구조와 에이전트, 흐름이 무엇을 위해 필요한지 판단할 기준이 되는 한 장이에요.</a:t>
+              <a:t>지금까지 쿨러 사건 한 건 위에서, 지식이 에이전트의 판단이 되고 그 판단이 사람의 승인과 시스템 실행을 거쳐 끝나는 길을 처음부터 끝까지 다시 따라왔죠. 이제 그 구조를 직접 세워 볼 차례입니다. 이번에는 HYD-02의 생산·정비 조율 업무 위에서요. 내 업무로 옮기는 실습은 넷이 이어지는데, 첫 실습에서는 내 주제의 자료와 업무 목표, 완료 조건을 정의합니다. 생산 일정과 정비 기한, 부품·작동유·인력의 확인 자료를 대조해 후보를 제안하는 업무입니다. 회의록을 요약하는 데서 끝내지 않고, 어떤 안건을 결정해야 하는지 근거와 함께 남깁니다. 고른 업무를 화면의 카드 네 장에 맞춰 적어요. 첫 카드는 무엇을 받아 시작하고 어디서 정보를 읽을 수 있는지, 둘째는 에이전트가 무엇을 내는지, 셋째는 어느 결과를 누가 확인하는지, 마지막 카드는 무엇이 되면 끝났다고 보는지예요. 에이전트가 할 일은 읽기, 분류, 추천 가운데서 이 회차 안에 끝까지 만들 수 있는 크기로 줄입니다. 이 실습에서 남는 건 업무 명세 한 장이에요. 필요한 항목이 갖춰지고 각 조건을 원문과 결과로 확인할 수 있어야 합니다. 「잘 정리된다」가 아니라, 무엇이 남으면 끝인지가 보여야 해요. 하지 못한 일을 어떻게 남길지도 적혀 있어야 하고요. 이 명세 한 장이 뒤의 세 실습이 따를 기준이 되거든요. 실제 실습에서는 이 명세부터 적겠습니다. 이어지는 지식 구조와 에이전트, 흐름이 무엇을 위해 필요한지 판단할 기준이 되는 한 장이에요.</a:t>
             </a:r>
           </a:p>
         </p:txBody>
@@ -3155,7 +3155,7 @@
           <a:lstStyle/>
           <a:p>
             <a:r>
-              <a:t>세 번째 실습에서는 만들어 둘 지식 구조를 읽는 에이전트를 붙입니다. 앞 실습에서 질문이 조회로 풀리는지 확인한 뒤에, 그 조회 결과를 사용해 제안하게 할 거예요. 화면의 카드 네 장을 보세요. 입력은 앞에서 만든 스키마와 자료, 그리고 쓸 수 있는 읽기 도구예요. 범위는 에이전트에 목표와 스킬을 적고, 읽기 도구를 MCP로 연결하는 데까지입니다. 에이전트는 바이브 코딩으로 구성해요. 남는 건 에이전트 정의와 스킬, 그리고 제안이나 보류가 담긴 결과 한 건이에요. 이 에이전트가 지킬 규칙은 하나입니다. 확인된 정보로만 제안하고, 확인하지 못한 값이나 권한 밖의 작업은 지어내지 않고 보류로 냅니다. 예를 들어 회의 시간을 추천하는 에이전트라고 해 보죠. 일정을 조회할 도구가 연결되지 않았다면 빈 시간을 짐작해서 적으면 안 돼요. 후보를 낼 수 없다고 보류해야 합니다. 그래서 성공 기준은 마지막 카드의 두 가지예요. 제안의 근거가 실제로 읽은 값이고, 확인하지 못한 것은 보류로 남았으면 성공입니다. 근거가 있는 경우와 값을 읽지 못한 경우를 나눠 실행해 보면서, 스킬에 적은 규칙이 실제 결과에서도 지켜지는지 확인합니다.</a:t>
+              <a:t>세 번째 실습에서는 만들어 둘 지식 구조를 읽는 에이전트를 붙입니다. 앞 실습에서 질문이 조회로 풀리는지 확인한 뒤에, 그 조회 결과를 사용해 제안하게 할 거예요. 화면의 카드 네 장을 보세요. 입력은 앞에서 만든 스키마와 자료, 그리고 쓸 수 있는 읽기 도구예요. 범위는 에이전트에 목표와 스킬을 적고, 읽기 도구를 MCP로 연결하는 데까지입니다. 에이전트는 바이브 코딩으로 구성해요. 남는 건 에이전트 정의와 스킬, 그리고 최초 자료와 후속 자료의 제안·보류 결과예요. 이 에이전트가 지킬 규칙은 하나입니다. 확인된 정보로만 제안하고, 확인하지 못한 값이나 권한 밖의 작업은 지어내지 않고 보류로 냅니다. 이번 업무에서는 정비 시간 후보를 비교합니다. 생산 시간이 비어 있어도 필요한 자원 확인이 남아 있으면 적합한 후보로 확정할 수 없어요. 보류 이유를 남기고 후속 확인 자료가 들어왔을 때 같은 조건을 다시 평가해야 합니다. 그래서 성공 기준은 마지막 카드의 두 가지예요. 제안의 근거가 실제로 읽은 값이고, 확인하지 못한 것은 보류로 남았으면 성공입니다. 최초 자료와 후속 확인 자료의 결과를 비교하면서, 바뀐 판단에는 새 근거가 있고 유지돼야 할 조건은 그대로인지 확인합니다.</a:t>
             </a:r>
           </a:p>
         </p:txBody>
@@ -3365,7 +3365,7 @@
           <a:lstStyle/>
           <a:p>
             <a:r>
-              <a:t>ProcessGPT는 BPMN으로 업무 흐름을 표현하고 여러 에이전트의 일을 조율하는 오픈소스 프로젝트입니다. 개발사의 공식 소개에서 확인할 수 있는 방향이에요. 여기서 볼 핵심은 제품 이름보다 오케스트레이션이라는 역할입니다. 여러 수행자가 각자의 일을 하더라도, 누가 언제 시작하고 어떤 결과를 다음에 넘길지는 조율해야 하죠. HYD에서 프로세스 엔진이 맡았던 역할입니다. 수행자가 여러 전문 에이전트로 늘어나도, 이 연결과 책임을 설계해야 한다는 점은 같습니다. 공식 소개에는 자연어로 프로세스를 정의하는 기능도 나옵니다. 업무를 말로 설명해 초안을 만드는 길이 열리는 거예요. 그렇다고 생성된 그림이 내 업무의 완료 조건이나 승인 규칙까지 자동으로 맞췄다는 뜻은 아닙니다. 사람이 의도를 검토하고 실제 실행 결과를 확인해야 하죠. 시연에서는 기능의 수보다 그 연결을 보겠습니다. 일을 맡기는 설계는 어디에 있고, 실제로 진행되는 한 건은 어디에 있으며, 결과를 낸 뒤 다음 차례를 누가 여는지요. 이 질문은 다른 제품을 볼 때도 그대로 사용할 수 있습니다. [출처·낭독 제외] https://github.com/uengine-oss/process-gpt/blob/main/README.md</a:t>
+              <a:t>ProcessGPT는 BPMN으로 업무 흐름을 표현하고 여러 에이전트의 일을 조율하는 오픈소스 프로젝트입니다. 개발사의 공식 소개에서 확인할 수 있는 방향이에요. 여기서 볼 핵심은 제품 이름보다 오케스트레이션이라는 역할입니다. 여러 수행자가 각자의 일을 하더라도, 누가 언제 시작하고 어떤 결과를 다음에 넘길지는 조율해야 하죠. HYD에서 프로세스 엔진이 맡았던 역할입니다. 수행자가 여러 전문 에이전트로 늘어나도, 이 연결과 책임을 설계해야 한다는 점은 같습니다. 공식 소개에는 자연어로 프로세스를 정의하는 기능도 나옵니다. 업무를 말로 설명해 초안을 만드는 길이 열리는 거예요. 그렇다고 생성된 그림이 내 업무의 완료 조건이나 승인 규칙까지 자동으로 맞췄다는 뜻은 아닙니다. 사람이 의도를 검토하고 실제 실행 결과를 확인해야 하죠. 시연에서는 기능의 수보다 그 연결을 보겠습니다. 일을 맡기는 설계는 어디에 있고, 실제로 진행되는 한 건은 어디에 있으며, 결과를 낸 뒤 다음 차례를 누가 여는지요. 이 질문은 다른 제품을 볼 때도 그대로 사용할 수 있습니다.</a:t>
             </a:r>
           </a:p>
         </p:txBody>
@@ -3715,7 +3715,7 @@
           <a:lstStyle/>
           <a:p>
             <a:r>
-              <a:t>기업 업무에 적용할 때는 표의 여섯 항목을 질문으로 바꿔 보면 좋습니다. 사람 승인은 효과를 내기 전에 필요한 결정이 있었는지, 권한은 그 결정을 할 사람이 맞는지를 묻습니다. 승인 버튼이 보인다는 것만으로 두 질문이 해결되지는 않아요. 감사 추적은 누가 무엇을 결정하고 어떤 실행이 일어났는지 되짚는 길입니다. 제안, 승인, 명령과 결과가 서로 이어져 있어야 원인을 추적할 수 있죠. 이미 한 작업을 다시 시도해도 되는지 판단할 때도 이 기록이 필요합니다. 보상은 실패 뒤에 남은 효과를 정리하는 일입니다. 모든 작업을 과거로 되돌리는 만능 취소가 아니에요. 예를 들어 발주 뒤 다음 단계가 실패했다면, 발주 취소가 가능한지 확인하고 취소 요청이나 정정 절차를 실행해야 합니다. 이미 발송한 안내를 없던 일로 만들 수 없다면 정정 안내가 필요할 수 있고요. BPMN도 보상 작업을 표현할 수 있지만, 무엇을 어떻게 보상할지는 업무별로 설계해야 합니다. 실행 격리는 에이전트와 도구가 접근할 데이터와 기능을 제한합니다. 읽기 도구의 범위, 계정 권한, 연결 가능한 시스템을 함께 봐야 해요. 변경 통제는 어떤 판본으로 실행 중인지와 새 정의를 언제 적용할지를 관리합니다. 처리 건의 판본을 고정해도 센서 값이나 현재 권한까지 고정되는 것은 아닙니다. 오른쪽 칸은 HYD에서 이 원리를 살펴본 자리와 추가로 확인할 지점입니다. 제품을 도입할 때도 각 항목이 실제 설정과 시험에서 어떻게 지켜지는지 확인하세요. 제품 이름이 같다는 이유만으로 우리 업무에 필요한 통제가 모두 갖춰졌다고 결론 내리지 않는 겁니다. [출처·낭독 제외] https://www.omg.org/spec/BPMN/2.0.2/PDF</a:t>
+              <a:t>기업 업무에 적용할 때는 표의 여섯 항목을 질문으로 바꿔 보면 좋습니다. 사람 승인은 효과를 내기 전에 필요한 결정이 있었는지, 권한은 그 결정을 할 사람이 맞는지를 묻습니다. 승인 버튼이 보인다는 것만으로 두 질문이 해결되지는 않아요. 감사 추적은 누가 무엇을 결정하고 어떤 실행이 일어났는지 되짚는 길입니다. 제안, 승인, 명령과 결과가 서로 이어져 있어야 원인을 추적할 수 있죠. 이미 한 작업을 다시 시도해도 되는지 판단할 때도 이 기록이 필요합니다. 보상은 실패 뒤에 남은 효과를 정리하는 일입니다. 모든 작업을 과거로 되돌리는 만능 취소가 아니에요. 예를 들어 발주 뒤 다음 단계가 실패했다면, 발주 취소가 가능한지 확인하고 취소 요청이나 정정 절차를 실행해야 합니다. 이미 발송한 안내를 없던 일로 만들 수 없다면 정정 안내가 필요할 수 있고요. BPMN도 보상 작업을 표현할 수 있지만, 무엇을 어떻게 보상할지는 업무별로 설계해야 합니다. 실행 격리는 에이전트와 도구가 접근할 데이터와 기능을 제한합니다. 읽기 도구의 범위, 계정 권한, 연결 가능한 시스템을 함께 봐야 해요. 변경 통제는 어떤 판본으로 실행 중인지와 새 정의를 언제 적용할지를 관리합니다. 처리 건의 판본을 고정해도 센서 값이나 현재 권한까지 고정되는 것은 아닙니다. 오른쪽 칸은 HYD에서 이 원리를 살펴본 자리와 추가로 확인할 지점입니다. 제품을 도입할 때도 각 항목이 실제 설정과 시험에서 어떻게 지켜지는지 확인하세요. 제품 이름이 같다는 이유만으로 우리 업무에 필요한 통제가 모두 갖춰졌다고 결론 내리지 않는 겁니다.</a:t>
             </a:r>
           </a:p>
         </p:txBody>
@@ -3925,7 +3925,7 @@
           <a:lstStyle/>
           <a:p>
             <a:r>
-              <a:t>실습과 시연을 마친 뒤 다시 모였습니다. 이제 복습과 용어 정리, 퀴즈로 이번 회차를 마무리하겠습니다. 학습 노트에는 완성한 결과뿐 아니라 아직 확인하지 못한 것도 구분해 두세요. 먼저 이번 회차에 배운 흐름을 쿨러 사건으로 복습해 보겠습니다. 표에 쿨러 사건의 다섯 순간을 놓았어요. 답과 근거 칸은 잠깐 가려 둘게요. 순간마다 지식, 에이전트, 프로세스 가운데 어느 영역의 일인지 먼저 골라 보세요. 왜 그 영역인지 근거도 같이 생각해 보시고요. 답을 맞춰 볼까요? 첫째, 핀 오염의 기준을 읽은 순간은 지식의 일입니다. 여기서 지식으로 분류한 것은 읽는 행동이 아니라 기준의 출처와 역할입니다. 기준은 매뉴얼과 정책을 검토해 관리하고 개정하는 지식이죠. 둘째, 지금의 냉각 효율을 읽어서 기준에 댄 건 에이전트의 일이에요. 값은 도구로 읽은 현재 값이고, 그걸 기준에 대어 판단하는 게 에이전트의 몫이니까요. 셋째, 쿨러 핀 세척을 설비보전팀장이 승인한다는 건 다시 지식입니다. 승인 역할은 조치에 적힌 지식이었죠. 넷째, 운전원 승인 뒤에 냉각 명령이 열린 건 프로세스의 일이에요. 단계 사이의 순서는 엔진이 지킵니다. 다섯째가 헷갈리기 쉬워요. 내려간 유온을 다시 읽고 작업지시를 등록한 건 프로세스의 일입니다. 둘째 순간처럼 시계열 DB를 읽긴 하는데, 판단의 재료를 읽은 게 아니라 승인 뒤 실행의 결과를 확인한 서비스 작업이거든요. 결국 같은 값을 읽어도, 누가 무엇을 위해 읽었는지에 따라 영역이 갈립니다. 이 HYD 사례에서는 진단 도구를 통한 대조와 승인 뒤 재관측 서비스의 역할이 다릅니다. 다른 시스템에서는 배치가 달라질 수 있어도, 판단 근거를 읽는 일과 실행 결과를 확인하는 일을 구별하는 질문은 유효합니다.</a:t>
+              <a:t>실습과 시연에서 남긴 기록으로 돌아왔습니다. 이제 복습과 용어 정리, 퀴즈로 이번 회차를 마무리하겠습니다. 학습 노트에는 완성한 결과와 아직 확인하지 못한 것을 구분해 두겠습니다. 먼저 이번 회차에 배운 흐름을 쿨러 사건으로 복습해 보겠습니다. 표에 쿨러 사건의 다섯 순간을 놓았어요. 답과 근거 칸은 잠깐 가려 둘게요. 순간마다 지식, 에이전트, 프로세스 가운데 어느 영역의 일인지 먼저 골라 보세요. 왜 그 영역인지 근거도 같이 생각해 보시고요. 답을 맞춰 볼까요? 첫째, 핀 오염의 기준을 읽은 순간은 지식의 일입니다. 여기서 지식으로 분류한 것은 읽는 행동이 아니라 기준의 출처와 역할입니다. 기준은 매뉴얼과 정책을 검토해 관리하고 개정하는 지식이죠. 둘째, 지금의 냉각 효율을 읽어서 기준에 댄 건 에이전트의 일이에요. 값은 도구로 읽은 현재 값이고, 그걸 기준에 대어 판단하는 게 에이전트의 몫이니까요. 셋째, 쿨러 핀 세척을 설비보전팀장이 승인한다는 건 다시 지식입니다. 승인 역할은 조치에 적힌 지식이었죠. 넷째, 운전원 승인 뒤에 냉각 명령이 열린 건 프로세스의 일이에요. 단계 사이의 순서는 엔진이 지킵니다. 다섯째가 헷갈리기 쉬워요. 내려간 유온을 다시 읽고 작업지시를 등록한 건 프로세스의 일입니다. 둘째 순간처럼 시계열 DB를 읽긴 하는데, 판단의 재료를 읽은 게 아니라 승인 뒤 실행의 결과를 확인한 서비스 작업이거든요. 결국 같은 값을 읽어도, 누가 무엇을 위해 읽었는지에 따라 영역이 갈립니다. 이 HYD 사례에서는 진단 도구를 통한 대조와 승인 뒤 재관측 서비스의 역할이 다릅니다. 다른 시스템에서는 배치가 달라질 수 있어도, 판단 근거를 읽는 일과 실행 결과를 확인하는 일을 구별하는 질문은 유효합니다.</a:t>
             </a:r>
           </a:p>
         </p:txBody>
@@ -4416,6 +4416,356 @@
           <a:p>
             <a:r>
               <a:t>같은 줄 위에 이번엔 세 영역을 겹쳐 놓았어요. 세 군데를 보시면 됩니다. 맨 위의 긴 괄호, 하늘색으로 칠한 둘째 자리, 그리고 왼쪽 아래의 상자예요. 맨 위 괄호가 프로세스입니다. 경보부터 끝까지 전체를 덮고 있죠. 어떤 순서로 무엇을 하고 각 자리를 누가 맡는지, 처음부터 끝까지 책임지는 쪽이 프로세스예요. 하늘색 둘째 자리가 에이전트입니다. 줄 전체를 봐도 에이전트가 일하는 곳은 이 한 자리뿐이에요. 원인을 진단하고 조치를 제안하는 데까지가 에이전트의 몫입니다. 자리로 세어 보면 더 분명해요. 여덟 자리 가운데 에이전트의 자리는 둘째 하나이고, 추천안이 나온 뒤에도 승인부터 끝까지 여섯 자리가 남아 있습니다. 추천안이 나온 순간은 업무가 끝난 때가 아니라, 이제 막 앞부분을 지난 때라는 거죠. 왼쪽 아래 상자는 판단에 쓸 지식과 값을 묶은 거예요. 지식 그래프, SOP와 판단 규칙, 그리고 시계열 DB와 업무 DB의 값이 여기 모여 있습니다. 그런데 이 상자가 줄과 어떻게 이어져 있는지 보세요. 에이전트 자리로 올라가는 화살표 하나뿐이에요. 이 그림은 에이전트가 판단 재료를 읽는 경로를 강조한 겁니다. 지식을 읽을 수 있는 쪽이 에이전트뿐이라는 뜻은 아니에요. 승인 조건을 확인하는 시스템도 필요한 기준을 읽습니다. 이 단원과 이어지는 두 단원에서는 바로 이 화살표 하나를 들여다볼 거예요. 지식이 어떤 모양으로 에이전트에게 건너가는지요. 에이전트 자리부터 끝까지, 프로세스가 맡은 구간은 뒤의 두 단원에서 다룹니다.</a:t>
+            </a:r>
+          </a:p>
+        </p:txBody>
+      </p:sp>
+      <p:sp>
+        <p:nvSpPr>
+          <p:cNvPr id="4" name="Slide Number Placeholder 3"/>
+          <p:cNvSpPr>
+            <a:spLocks noGrp="1"/>
+          </p:cNvSpPr>
+          <p:nvPr>
+            <p:ph type="sldNum" idx="5" sz="quarter"/>
+          </p:nvPr>
+        </p:nvSpPr>
+        <p:spPr/>
+      </p:sp>
+    </p:spTree>
+  </p:cSld>
+  <p:clrMapOvr>
+    <a:masterClrMapping/>
+  </p:clrMapOvr>
+</p:notes>
+</file>
+
+<file path=ppt/notesSlides/notesSlide60.xml><?xml version="1.0" encoding="utf-8"?>
+<p:notes xmlns:a="http://schemas.openxmlformats.org/drawingml/2006/main" xmlns:p="http://schemas.openxmlformats.org/presentationml/2006/main" xmlns:r="http://schemas.openxmlformats.org/officeDocument/2006/relationships">
+  <p:cSld>
+    <p:spTree>
+      <p:nvGrpSpPr>
+        <p:cNvPr id="1" name=""/>
+        <p:cNvGrpSpPr/>
+        <p:nvPr/>
+      </p:nvGrpSpPr>
+      <p:grpSpPr>
+        <a:xfrm>
+          <a:off x="0" y="0"/>
+          <a:ext cx="0" cy="0"/>
+          <a:chOff x="0" y="0"/>
+          <a:chExt cx="0" cy="0"/>
+        </a:xfrm>
+      </p:grpSpPr>
+      <p:sp>
+        <p:nvSpPr>
+          <p:cNvPr id="2" name="Slide Image Placeholder 1"/>
+          <p:cNvSpPr>
+            <a:spLocks noGrp="1"/>
+          </p:cNvSpPr>
+          <p:nvPr>
+            <p:ph type="sldImg" idx="2"/>
+          </p:nvPr>
+        </p:nvSpPr>
+        <p:spPr/>
+      </p:sp>
+      <p:sp>
+        <p:nvSpPr>
+          <p:cNvPr id="3" name="Notes Placeholder 2"/>
+          <p:cNvSpPr>
+            <a:spLocks noGrp="1"/>
+          </p:cNvSpPr>
+          <p:nvPr>
+            <p:ph type="body" idx="3" sz="quarter"/>
+          </p:nvPr>
+        </p:nvSpPr>
+        <p:spPr/>
+        <p:txBody>
+          <a:bodyPr/>
+          <a:lstStyle/>
+          <a:p>
+            <a:r>
+              <a:t>41~42장 통합 발화는 41장 발표자 노트를 따른다.</a:t>
+            </a:r>
+          </a:p>
+        </p:txBody>
+      </p:sp>
+      <p:sp>
+        <p:nvSpPr>
+          <p:cNvPr id="4" name="Slide Number Placeholder 3"/>
+          <p:cNvSpPr>
+            <a:spLocks noGrp="1"/>
+          </p:cNvSpPr>
+          <p:nvPr>
+            <p:ph type="sldNum" idx="5" sz="quarter"/>
+          </p:nvPr>
+        </p:nvSpPr>
+        <p:spPr/>
+      </p:sp>
+    </p:spTree>
+  </p:cSld>
+  <p:clrMapOvr>
+    <a:masterClrMapping/>
+  </p:clrMapOvr>
+</p:notes>
+</file>
+
+<file path=ppt/notesSlides/notesSlide61.xml><?xml version="1.0" encoding="utf-8"?>
+<p:notes xmlns:a="http://schemas.openxmlformats.org/drawingml/2006/main" xmlns:p="http://schemas.openxmlformats.org/presentationml/2006/main" xmlns:r="http://schemas.openxmlformats.org/officeDocument/2006/relationships">
+  <p:cSld>
+    <p:spTree>
+      <p:nvGrpSpPr>
+        <p:cNvPr id="1" name=""/>
+        <p:cNvGrpSpPr/>
+        <p:nvPr/>
+      </p:nvGrpSpPr>
+      <p:grpSpPr>
+        <a:xfrm>
+          <a:off x="0" y="0"/>
+          <a:ext cx="0" cy="0"/>
+          <a:chOff x="0" y="0"/>
+          <a:chExt cx="0" cy="0"/>
+        </a:xfrm>
+      </p:grpSpPr>
+      <p:sp>
+        <p:nvSpPr>
+          <p:cNvPr id="2" name="Slide Image Placeholder 1"/>
+          <p:cNvSpPr>
+            <a:spLocks noGrp="1"/>
+          </p:cNvSpPr>
+          <p:nvPr>
+            <p:ph type="sldImg" idx="2"/>
+          </p:nvPr>
+        </p:nvSpPr>
+        <p:spPr/>
+      </p:sp>
+      <p:sp>
+        <p:nvSpPr>
+          <p:cNvPr id="3" name="Notes Placeholder 2"/>
+          <p:cNvSpPr>
+            <a:spLocks noGrp="1"/>
+          </p:cNvSpPr>
+          <p:nvPr>
+            <p:ph type="body" idx="3" sz="quarter"/>
+          </p:nvPr>
+        </p:nvSpPr>
+        <p:spPr/>
+        <p:txBody>
+          <a:bodyPr/>
+          <a:lstStyle/>
+          <a:p>
+            <a:r>
+              <a:t>43~44장 통합 발화는 43장 발표자 노트를 따른다.</a:t>
+            </a:r>
+          </a:p>
+        </p:txBody>
+      </p:sp>
+      <p:sp>
+        <p:nvSpPr>
+          <p:cNvPr id="4" name="Slide Number Placeholder 3"/>
+          <p:cNvSpPr>
+            <a:spLocks noGrp="1"/>
+          </p:cNvSpPr>
+          <p:nvPr>
+            <p:ph type="sldNum" idx="5" sz="quarter"/>
+          </p:nvPr>
+        </p:nvSpPr>
+        <p:spPr/>
+      </p:sp>
+    </p:spTree>
+  </p:cSld>
+  <p:clrMapOvr>
+    <a:masterClrMapping/>
+  </p:clrMapOvr>
+</p:notes>
+</file>
+
+<file path=ppt/notesSlides/notesSlide62.xml><?xml version="1.0" encoding="utf-8"?>
+<p:notes xmlns:a="http://schemas.openxmlformats.org/drawingml/2006/main" xmlns:p="http://schemas.openxmlformats.org/presentationml/2006/main" xmlns:r="http://schemas.openxmlformats.org/officeDocument/2006/relationships">
+  <p:cSld>
+    <p:spTree>
+      <p:nvGrpSpPr>
+        <p:cNvPr id="1" name=""/>
+        <p:cNvGrpSpPr/>
+        <p:nvPr/>
+      </p:nvGrpSpPr>
+      <p:grpSpPr>
+        <a:xfrm>
+          <a:off x="0" y="0"/>
+          <a:ext cx="0" cy="0"/>
+          <a:chOff x="0" y="0"/>
+          <a:chExt cx="0" cy="0"/>
+        </a:xfrm>
+      </p:grpSpPr>
+      <p:sp>
+        <p:nvSpPr>
+          <p:cNvPr id="2" name="Slide Image Placeholder 1"/>
+          <p:cNvSpPr>
+            <a:spLocks noGrp="1"/>
+          </p:cNvSpPr>
+          <p:nvPr>
+            <p:ph type="sldImg" idx="2"/>
+          </p:nvPr>
+        </p:nvSpPr>
+        <p:spPr/>
+      </p:sp>
+      <p:sp>
+        <p:nvSpPr>
+          <p:cNvPr id="3" name="Notes Placeholder 2"/>
+          <p:cNvSpPr>
+            <a:spLocks noGrp="1"/>
+          </p:cNvSpPr>
+          <p:nvPr>
+            <p:ph type="body" idx="3" sz="quarter"/>
+          </p:nvPr>
+        </p:nvSpPr>
+        <p:spPr/>
+        <p:txBody>
+          <a:bodyPr/>
+          <a:lstStyle/>
+          <a:p>
+            <a:r>
+              <a:t>45~46장 통합 발화는 45장 발표자 노트를 따른다.</a:t>
+            </a:r>
+          </a:p>
+        </p:txBody>
+      </p:sp>
+      <p:sp>
+        <p:nvSpPr>
+          <p:cNvPr id="4" name="Slide Number Placeholder 3"/>
+          <p:cNvSpPr>
+            <a:spLocks noGrp="1"/>
+          </p:cNvSpPr>
+          <p:nvPr>
+            <p:ph type="sldNum" idx="5" sz="quarter"/>
+          </p:nvPr>
+        </p:nvSpPr>
+        <p:spPr/>
+      </p:sp>
+    </p:spTree>
+  </p:cSld>
+  <p:clrMapOvr>
+    <a:masterClrMapping/>
+  </p:clrMapOvr>
+</p:notes>
+</file>
+
+<file path=ppt/notesSlides/notesSlide63.xml><?xml version="1.0" encoding="utf-8"?>
+<p:notes xmlns:a="http://schemas.openxmlformats.org/drawingml/2006/main" xmlns:p="http://schemas.openxmlformats.org/presentationml/2006/main" xmlns:r="http://schemas.openxmlformats.org/officeDocument/2006/relationships">
+  <p:cSld>
+    <p:spTree>
+      <p:nvGrpSpPr>
+        <p:cNvPr id="1" name=""/>
+        <p:cNvGrpSpPr/>
+        <p:nvPr/>
+      </p:nvGrpSpPr>
+      <p:grpSpPr>
+        <a:xfrm>
+          <a:off x="0" y="0"/>
+          <a:ext cx="0" cy="0"/>
+          <a:chOff x="0" y="0"/>
+          <a:chExt cx="0" cy="0"/>
+        </a:xfrm>
+      </p:grpSpPr>
+      <p:sp>
+        <p:nvSpPr>
+          <p:cNvPr id="2" name="Slide Image Placeholder 1"/>
+          <p:cNvSpPr>
+            <a:spLocks noGrp="1"/>
+          </p:cNvSpPr>
+          <p:nvPr>
+            <p:ph type="sldImg" idx="2"/>
+          </p:nvPr>
+        </p:nvSpPr>
+        <p:spPr/>
+      </p:sp>
+      <p:sp>
+        <p:nvSpPr>
+          <p:cNvPr id="3" name="Notes Placeholder 2"/>
+          <p:cNvSpPr>
+            <a:spLocks noGrp="1"/>
+          </p:cNvSpPr>
+          <p:nvPr>
+            <p:ph type="body" idx="3" sz="quarter"/>
+          </p:nvPr>
+        </p:nvSpPr>
+        <p:spPr/>
+        <p:txBody>
+          <a:bodyPr/>
+          <a:lstStyle/>
+          <a:p>
+            <a:r>
+              <a:t>47~48장 통합 발화는 47장 발표자 노트를 따른다.</a:t>
+            </a:r>
+          </a:p>
+        </p:txBody>
+      </p:sp>
+      <p:sp>
+        <p:nvSpPr>
+          <p:cNvPr id="4" name="Slide Number Placeholder 3"/>
+          <p:cNvSpPr>
+            <a:spLocks noGrp="1"/>
+          </p:cNvSpPr>
+          <p:nvPr>
+            <p:ph type="sldNum" idx="5" sz="quarter"/>
+          </p:nvPr>
+        </p:nvSpPr>
+        <p:spPr/>
+      </p:sp>
+    </p:spTree>
+  </p:cSld>
+  <p:clrMapOvr>
+    <a:masterClrMapping/>
+  </p:clrMapOvr>
+</p:notes>
+</file>
+
+<file path=ppt/notesSlides/notesSlide64.xml><?xml version="1.0" encoding="utf-8"?>
+<p:notes xmlns:a="http://schemas.openxmlformats.org/drawingml/2006/main" xmlns:p="http://schemas.openxmlformats.org/presentationml/2006/main" xmlns:r="http://schemas.openxmlformats.org/officeDocument/2006/relationships">
+  <p:cSld>
+    <p:spTree>
+      <p:nvGrpSpPr>
+        <p:cNvPr id="1" name=""/>
+        <p:cNvGrpSpPr/>
+        <p:nvPr/>
+      </p:nvGrpSpPr>
+      <p:grpSpPr>
+        <a:xfrm>
+          <a:off x="0" y="0"/>
+          <a:ext cx="0" cy="0"/>
+          <a:chOff x="0" y="0"/>
+          <a:chExt cx="0" cy="0"/>
+        </a:xfrm>
+      </p:grpSpPr>
+      <p:sp>
+        <p:nvSpPr>
+          <p:cNvPr id="2" name="Slide Image Placeholder 1"/>
+          <p:cNvSpPr>
+            <a:spLocks noGrp="1"/>
+          </p:cNvSpPr>
+          <p:nvPr>
+            <p:ph type="sldImg" idx="2"/>
+          </p:nvPr>
+        </p:nvSpPr>
+        <p:spPr/>
+      </p:sp>
+      <p:sp>
+        <p:nvSpPr>
+          <p:cNvPr id="3" name="Notes Placeholder 2"/>
+          <p:cNvSpPr>
+            <a:spLocks noGrp="1"/>
+          </p:cNvSpPr>
+          <p:nvPr>
+            <p:ph type="body" idx="3" sz="quarter"/>
+          </p:nvPr>
+        </p:nvSpPr>
+        <p:spPr/>
+        <p:txBody>
+          <a:bodyPr/>
+          <a:lstStyle/>
+          <a:p>
+            <a:r>
+              <a:t>56~57장 통합 발화는 56장 발표자 노트를 따른다.</a:t>
             </a:r>
           </a:p>
         </p:txBody>
@@ -41325,7 +41675,7 @@
                 <a:ea typeface="맑은 고딕"/>
                 <a:cs typeface="맑은 고딕"/>
               </a:rPr>
-              <a:t>이 실습을 마치면 내 에이전트를 단계로 둔 흐름이 등록되고, 그 흐름으로 열린 처리 건의 기록이 남는다.</a:t>
+              <a:t>준비된 연결로 흐름을 등록·실행하고, 처리 건의 실제 결과와 미확인 범위를 구분해 기록한다.</a:t>
             </a:r>
           </a:p>
         </p:txBody>

--- a/산출물/교재/PPTX/통합반_온라인/통합반_11일차.pptx
+++ b/산출물/교재/PPTX/통합반_온라인/통합반_11일차.pptx
@@ -565,7 +565,7 @@
           <a:lstStyle/>
           <a:p>
             <a:r>
-              <a:t>안녕하세요. 이번 회차에서는 이 과정을 마무리합니다. 지금까지 쿨러 사건 하나를 붙잡고 세 영역을 나눠서 배웠죠. 판단의 재료가 되는 지식, 그 지식을 읽어서 추천안을 만드는 에이전트, 그리고 그 추천안을 사람의 승인과 시스템 실행으로 잇는 프로세스였어요. 사건을 한번 떠올려 볼까요? 쿨러에 이상이 생겨서 경보가 울렸고요, 에이전트가 원인을 가려서 조치를 추천했습니다. 운전원이 승인하자 시스템이 팬 속도를 올렸죠. 그런데 이 한 건 안에서 세 영역은 서로 무엇을 주고받았을까요? 그리고 이 구조를 쿨러가 아닌 내 업무에도 똑같이 세울 수 있을까요? 이번 회차에서는 먼저 쿨러 사건 한 건 위에서 세 영역이 주고받는 걸 되짚어 보고요, 그다음에 같은 구조를 강사가 고른 작은 업무로 직접 만들어 봅니다. 마지막으로 실제 제품에서도 그 구조를 확인해 보겠습니다.</a:t>
+              <a:t>안녕하세요. 이번 회차에서는 이 과정을 마무리합니다. 지금까지 쿨러 사건 하나를 붙잡고 세 영역을 나눠서 배웠죠. 판단의 재료가 되는 지식, 그 지식을 읽어서 추천안을 만드는 에이전트, 그리고 그 추천안을 사람의 승인과 시스템 실행으로 잇는 프로세스였어요. 사건을 한번 떠올려 볼까요? 쿨러에 이상이 생겨서 경보가 울렸고요, 에이전트가 원인을 가려서 조치를 추천했습니다. 운전원이 승인하자 시스템이 팬 속도를 올렸죠. 그런데 이 한 건 안에서 세 영역은 서로 무엇을 주고받았을까요? 그리고 이 구조를 쿨러가 아닌 내 업무에도 똑같이 세울 수 있을까요? 이번 회차에서는 먼저 쿨러 사건 한 건 위에서 세 영역이 주고받는 걸 되짚어 보고요, 그다음에 같은 구조로 생산·정비 조율 업무를 직접 만들어 보겠습니다. 마지막으로 실제 제품에서도 그 구조를 확인해 보겠습니다.</a:t>
             </a:r>
           </a:p>
         </p:txBody>
@@ -3225,7 +3225,7 @@
           <a:lstStyle/>
           <a:p>
             <a:r>
-              <a:t>네 번째 실습은 직접 그린 흐름으로 에이전트를 실행하는 일입니다. 앞 실습에서 만들 에이전트는 제안이나 보류 한 건을 내는 데서 멈춥니다. 쿨러 사건에서도 에이전트의 일은 추천안을 제출하면서 끝났고, 그 뒤를 이은 건 프로세스였죠. 내 업무도 마찬가지예요. 에이전트가 낸 제안이나 보류를 누가 확인하고 어떻게 끝낼지는 흐름이 정합니다. 작은 업무의 흐름은 bpmn.io로 그리고요, 화면의 다섯 칸, 시작, 에이전트 작업, 필요한 자리의 사람 확인, 결과 보고, 종료입니다. 그린 흐름을 준비된 연결 방식의 범위에서 등록하고 실행하면, 앞에서 만든 에이전트가 그 단계에서 일하고 처리 건 하나가 기록으로 남아요. 등록된 흐름과 그 처리 건의 기록이 이 실습에서 남는 것입니다. 이때 지킬 게 하나 있습니다. 일정 등록이나 메일 발송처럼 준비된 범위 밖의 외부 시스템 쓰기는 성공한 것처럼 적지 않아요. 하지 못한 일로 결과 보고에 남깁니다. 처리 건이 끝 이벤트에 닿아 닫히고, 사람 확인이 필요한 자리에 실제로 있었고, 결과 보고에 한 일과 하지 못한 일이 함께 남았으면 성공이에요. 단, 등록할 수 있는 연결이 먼저 준비돼 있어야 합니다. 수업 예제에는 강사가 실제 도구와 결과 형식에 맞게 채울 자리도 있어요. 연결이 없는 기능을 성공으로 꾸미지 말고, 확인 가능한 범위와 막힌 이유를 결과로 남겨야 합니다.</a:t>
+              <a:t>네 번째 실습은 직접 그린 흐름으로 에이전트를 실행하는 일입니다. 앞 실습에서 만들 에이전트는 제안이나 보류 한 건을 내는 데서 멈춥니다. 쿨러 사건에서도 에이전트의 일은 추천안을 제출하면서 끝났고, 그 뒤를 이은 건 프로세스였죠. 내 업무도 마찬가지예요. 에이전트가 낸 제안이나 보류를 누가 확인하고 어떻게 끝낼지는 흐름이 정합니다. 작은 업무의 흐름은 bpmn.io로 그리고요, 화면의 다섯 칸, 시작, 에이전트 작업, 필요한 자리의 사람 확인, 결과 보고, 종료입니다. 그린 흐름을 준비된 연결 방식의 범위에서 등록하고 실행하면, 앞에서 만든 에이전트가 그 단계에서 일하고 처리 건 하나가 기록으로 남아요. 등록된 흐름과 그 처리 건의 기록이 이 실습에서 남는 것입니다. 이때 지킬 게 하나 있습니다. 일정 등록이나 메일 발송처럼 준비된 범위 밖의 외부 시스템 쓰기는 성공한 것처럼 적지 않아요. 하지 못한 일로 결과 보고에 남깁니다. 처리 건이 끝 이벤트에 닿아 닫히고, 사람 확인이 필요한 자리에 실제로 있었고, 결과 보고에 한 일과 하지 못한 일이 함께 남았으면 성공이에요. 단, 등록할 수 있는 연결이 먼저 준비돼 있어야 합니다. 수업 예제에는 제가 실제 도구와 결과 형식에 맞게 채울 자리도 있어요. 연결이 없는 기능을 성공으로 꾸미지 말고, 확인 가능한 범위와 막힌 이유를 결과로 남겨야 합니다.</a:t>
             </a:r>
           </a:p>
         </p:txBody>
